--- a/docs/SmartPay AP Architecture D1.pptx
+++ b/docs/SmartPay AP Architecture D1.pptx
@@ -17,6 +17,7 @@
     <p:sldId id="265" r:id="rId16"/>
     <p:sldId id="266" r:id="rId17"/>
     <p:sldId id="267" r:id="rId18"/>
+    <p:sldId id="268" r:id="rId19"/>
   </p:sldIdLst>
   <p:sldSz cx="12188952" cy="6858000" type="screen4x3"/>
   <p:notesSz cx="6858000" cy="9144000"/>
@@ -3114,7 +3115,7 @@
             <a:avLst/>
           </a:prstGeom>
           <a:solidFill>
-            <a:srgbClr val="1E2761"/>
+            <a:srgbClr val="1A1A2E"/>
           </a:solidFill>
           <a:ln>
             <a:noFill/>
@@ -3144,20 +3145,90 @@
       </p:sp>
       <p:sp>
         <p:nvSpPr>
-          <p:cNvPr id="3" name="Rectangle 2"/>
+          <p:cNvPr id="3" name="TextBox 2"/>
+          <p:cNvSpPr txBox="1"/>
+          <p:nvPr/>
+        </p:nvSpPr>
+        <p:spPr>
+          <a:xfrm>
+            <a:off x="731520" y="1645920"/>
+            <a:ext cx="10972800" cy="1005840"/>
+          </a:xfrm>
+          <a:prstGeom prst="rect">
+            <a:avLst/>
+          </a:prstGeom>
+          <a:noFill/>
+        </p:spPr>
+        <p:txBody>
+          <a:bodyPr wrap="square">
+            <a:spAutoFit/>
+          </a:bodyPr>
+          <a:lstStyle/>
+          <a:p>
+            <a:pPr algn="l"/>
+            <a:r>
+              <a:rPr sz="5200" b="1" i="0">
+                <a:solidFill>
+                  <a:srgbClr val="FFFFFF"/>
+                </a:solidFill>
+                <a:latin typeface="Calibri"/>
+              </a:rPr>
+              <a:t>SmartPay AP</a:t>
+            </a:r>
+          </a:p>
+        </p:txBody>
+      </p:sp>
+      <p:sp>
+        <p:nvSpPr>
+          <p:cNvPr id="4" name="TextBox 3"/>
+          <p:cNvSpPr txBox="1"/>
+          <p:nvPr/>
+        </p:nvSpPr>
+        <p:spPr>
+          <a:xfrm>
+            <a:off x="731520" y="2743200"/>
+            <a:ext cx="10972800" cy="594360"/>
+          </a:xfrm>
+          <a:prstGeom prst="rect">
+            <a:avLst/>
+          </a:prstGeom>
+          <a:noFill/>
+        </p:spPr>
+        <p:txBody>
+          <a:bodyPr wrap="square">
+            <a:spAutoFit/>
+          </a:bodyPr>
+          <a:lstStyle/>
+          <a:p>
+            <a:pPr algn="l"/>
+            <a:r>
+              <a:rPr sz="2200" b="0" i="0">
+                <a:solidFill>
+                  <a:srgbClr val="AACCEE"/>
+                </a:solidFill>
+                <a:latin typeface="Calibri"/>
+              </a:rPr>
+              <a:t>Agentic AI Platform for Invoice Reconciliation</a:t>
+            </a:r>
+          </a:p>
+        </p:txBody>
+      </p:sp>
+      <p:sp>
+        <p:nvSpPr>
+          <p:cNvPr id="5" name="Rectangle 4"/>
           <p:cNvSpPr/>
           <p:nvPr/>
         </p:nvSpPr>
         <p:spPr>
           <a:xfrm>
-            <a:off x="0" y="0"/>
-            <a:ext cx="109728" cy="6858000"/>
+            <a:off x="731520" y="3429000"/>
+            <a:ext cx="4572000" cy="36576"/>
           </a:xfrm>
           <a:prstGeom prst="rect">
             <a:avLst/>
           </a:prstGeom>
           <a:solidFill>
-            <a:srgbClr val="028090"/>
+            <a:srgbClr val="2E75B6"/>
           </a:solidFill>
           <a:ln>
             <a:noFill/>
@@ -3187,127 +3258,14 @@
       </p:sp>
       <p:sp>
         <p:nvSpPr>
-          <p:cNvPr id="4" name="TextBox 3"/>
+          <p:cNvPr id="6" name="TextBox 5"/>
           <p:cNvSpPr txBox="1"/>
           <p:nvPr/>
         </p:nvSpPr>
         <p:spPr>
           <a:xfrm>
-            <a:off x="548640" y="1097280"/>
-            <a:ext cx="10972800" cy="731520"/>
-          </a:xfrm>
-          <a:prstGeom prst="rect">
-            <a:avLst/>
-          </a:prstGeom>
-          <a:noFill/>
-        </p:spPr>
-        <p:txBody>
-          <a:bodyPr wrap="none">
-            <a:spAutoFit/>
-          </a:bodyPr>
-          <a:lstStyle/>
-          <a:p>
-            <a:pPr algn="l"/>
-            <a:r>
-              <a:rPr sz="4800" b="1">
-                <a:solidFill>
-                  <a:srgbClr val="FFFFFF"/>
-                </a:solidFill>
-                <a:latin typeface="Calibri"/>
-              </a:rPr>
-              <a:t>SmartPay AP</a:t>
-            </a:r>
-          </a:p>
-        </p:txBody>
-      </p:sp>
-      <p:sp>
-        <p:nvSpPr>
-          <p:cNvPr id="5" name="TextBox 4"/>
-          <p:cNvSpPr txBox="1"/>
-          <p:nvPr/>
-        </p:nvSpPr>
-        <p:spPr>
-          <a:xfrm>
-            <a:off x="548640" y="1920240"/>
-            <a:ext cx="10972800" cy="731520"/>
-          </a:xfrm>
-          <a:prstGeom prst="rect">
-            <a:avLst/>
-          </a:prstGeom>
-          <a:noFill/>
-        </p:spPr>
-        <p:txBody>
-          <a:bodyPr wrap="none">
-            <a:spAutoFit/>
-          </a:bodyPr>
-          <a:lstStyle/>
-          <a:p>
-            <a:pPr algn="l"/>
-            <a:r>
-              <a:rPr sz="2200" b="0">
-                <a:solidFill>
-                  <a:srgbClr val="02C39A"/>
-                </a:solidFill>
-                <a:latin typeface="Calibri"/>
-              </a:rPr>
-              <a:t>Agentic AI Platform for Invoice Reconciliation</a:t>
-            </a:r>
-          </a:p>
-        </p:txBody>
-      </p:sp>
-      <p:sp>
-        <p:nvSpPr>
-          <p:cNvPr id="6" name="Rectangle 5"/>
-          <p:cNvSpPr/>
-          <p:nvPr/>
-        </p:nvSpPr>
-        <p:spPr>
-          <a:xfrm>
-            <a:off x="548640" y="2514600"/>
-            <a:ext cx="2286000" cy="45720"/>
-          </a:xfrm>
-          <a:prstGeom prst="rect">
-            <a:avLst/>
-          </a:prstGeom>
-          <a:solidFill>
-            <a:srgbClr val="028090"/>
-          </a:solidFill>
-          <a:ln>
-            <a:noFill/>
-          </a:ln>
-        </p:spPr>
-        <p:style>
-          <a:lnRef idx="1">
-            <a:schemeClr val="accent1"/>
-          </a:lnRef>
-          <a:fillRef idx="3">
-            <a:schemeClr val="accent1"/>
-          </a:fillRef>
-          <a:effectRef idx="2">
-            <a:schemeClr val="accent1"/>
-          </a:effectRef>
-          <a:fontRef idx="minor">
-            <a:schemeClr val="lt1"/>
-          </a:fontRef>
-        </p:style>
-        <p:txBody>
-          <a:bodyPr rtlCol="0" anchor="ctr"/>
-          <a:lstStyle/>
-          <a:p>
-            <a:pPr algn="ctr"/>
-          </a:p>
-        </p:txBody>
-      </p:sp>
-      <p:sp>
-        <p:nvSpPr>
-          <p:cNvPr id="7" name="TextBox 6"/>
-          <p:cNvSpPr txBox="1"/>
-          <p:nvPr/>
-        </p:nvSpPr>
-        <p:spPr>
-          <a:xfrm>
-            <a:off x="548640" y="2743200"/>
-            <a:ext cx="9144000" cy="457200"/>
+            <a:off x="731520" y="3566160"/>
+            <a:ext cx="10972800" cy="411480"/>
           </a:xfrm>
           <a:prstGeom prst="rect">
             <a:avLst/>
@@ -3322,27 +3280,27 @@
           <a:p>
             <a:pPr algn="l"/>
             <a:r>
-              <a:rPr sz="1400" b="0">
-                <a:solidFill>
-                  <a:srgbClr val="E2E8F0"/>
-                </a:solidFill>
-                <a:latin typeface="Calibri"/>
-              </a:rPr>
-              <a:t>Acme Manufacturing — 25 countries — 1,000+ suppliers — 1M invoices/month</a:t>
-            </a:r>
-          </a:p>
-        </p:txBody>
-      </p:sp>
-      <p:sp>
-        <p:nvSpPr>
-          <p:cNvPr id="8" name="TextBox 7"/>
+              <a:rPr sz="1400" b="0" i="0">
+                <a:solidFill>
+                  <a:srgbClr val="BBBBBB"/>
+                </a:solidFill>
+                <a:latin typeface="Calibri"/>
+              </a:rPr>
+              <a:t>Acme Manufacturing  ·  25 countries  ·  1M invoices/month</a:t>
+            </a:r>
+          </a:p>
+        </p:txBody>
+      </p:sp>
+      <p:sp>
+        <p:nvSpPr>
+          <p:cNvPr id="7" name="TextBox 6"/>
           <p:cNvSpPr txBox="1"/>
           <p:nvPr/>
         </p:nvSpPr>
         <p:spPr>
           <a:xfrm>
-            <a:off x="548640" y="3291840"/>
-            <a:ext cx="8229600" cy="1371600"/>
+            <a:off x="731520" y="6309360"/>
+            <a:ext cx="9144000" cy="320040"/>
           </a:xfrm>
           <a:prstGeom prst="rect">
             <a:avLst/>
@@ -3357,50 +3315,13 @@
           <a:p>
             <a:pPr algn="l"/>
             <a:r>
-              <a:rPr sz="1500" b="0">
-                <a:solidFill>
-                  <a:srgbClr val="FFFFFF"/>
-                </a:solidFill>
-                <a:latin typeface="Calibri"/>
-              </a:rPr>
-              <a:t>Manual AP reconciliation doesn't scale. SmartPay AP automates
-invoice matching, mismatch detection, dispute drafting, and payment
-workflows — with human oversight at every critical decision point.</a:t>
-            </a:r>
-          </a:p>
-        </p:txBody>
-      </p:sp>
-      <p:sp>
-        <p:nvSpPr>
-          <p:cNvPr id="9" name="TextBox 8"/>
-          <p:cNvSpPr txBox="1"/>
-          <p:nvPr/>
-        </p:nvSpPr>
-        <p:spPr>
-          <a:xfrm>
-            <a:off x="548640" y="6217920"/>
-            <a:ext cx="9144000" cy="365760"/>
-          </a:xfrm>
-          <a:prstGeom prst="rect">
-            <a:avLst/>
-          </a:prstGeom>
-          <a:noFill/>
-        </p:spPr>
-        <p:txBody>
-          <a:bodyPr wrap="square">
-            <a:spAutoFit/>
-          </a:bodyPr>
-          <a:lstStyle/>
-          <a:p>
-            <a:pPr algn="l"/>
-            <a:r>
-              <a:rPr sz="1100" b="0">
-                <a:solidFill>
-                  <a:srgbClr val="36454F"/>
-                </a:solidFill>
-                <a:latin typeface="Calibri"/>
-              </a:rPr>
-              <a:t>AI Architect Case Study  |  HTC Global Services  |  May 2026</a:t>
+              <a:rPr sz="1100" b="0" i="1">
+                <a:solidFill>
+                  <a:srgbClr val="777777"/>
+                </a:solidFill>
+                <a:latin typeface="Calibri"/>
+              </a:rPr>
+              <a:t>AI Architect Case Study  —  Akhil Ahmed  —  May 2026</a:t>
             </a:r>
           </a:p>
         </p:txBody>
@@ -3438,7 +3359,7 @@
             <a:avLst/>
           </a:prstGeom>
           <a:solidFill>
-            <a:srgbClr val="1E2761"/>
+            <a:srgbClr val="FFFFFF"/>
           </a:solidFill>
           <a:ln>
             <a:noFill/>
@@ -3474,8 +3395,8 @@
         </p:nvSpPr>
         <p:spPr>
           <a:xfrm>
-            <a:off x="548640" y="274320"/>
-            <a:ext cx="10972800" cy="731520"/>
+            <a:off x="548640" y="228600"/>
+            <a:ext cx="10972800" cy="640080"/>
           </a:xfrm>
           <a:prstGeom prst="rect">
             <a:avLst/>
@@ -3483,20 +3404,20 @@
           <a:noFill/>
         </p:spPr>
         <p:txBody>
-          <a:bodyPr wrap="none">
+          <a:bodyPr wrap="square">
             <a:spAutoFit/>
           </a:bodyPr>
           <a:lstStyle/>
           <a:p>
             <a:pPr algn="l"/>
             <a:r>
-              <a:rPr sz="3200" b="1">
-                <a:solidFill>
-                  <a:srgbClr val="FFFFFF"/>
-                </a:solidFill>
-                <a:latin typeface="Calibri"/>
-              </a:rPr>
-              <a:t>Responsible AI — D4</a:t>
+              <a:rPr sz="2800" b="1" i="0">
+                <a:solidFill>
+                  <a:srgbClr val="1A1A2E"/>
+                </a:solidFill>
+                <a:latin typeface="Calibri"/>
+              </a:rPr>
+              <a:t>Security, Access Control &amp; GDPR</a:t>
             </a:r>
           </a:p>
         </p:txBody>
@@ -3509,14 +3430,14 @@
         </p:nvSpPr>
         <p:spPr>
           <a:xfrm>
-            <a:off x="548640" y="868680"/>
-            <a:ext cx="2286000" cy="45720"/>
+            <a:off x="548640" y="822960"/>
+            <a:ext cx="11064240" cy="36576"/>
           </a:xfrm>
           <a:prstGeom prst="rect">
             <a:avLst/>
           </a:prstGeom>
           <a:solidFill>
-            <a:srgbClr val="028090"/>
+            <a:srgbClr val="2E75B6"/>
           </a:solidFill>
           <a:ln>
             <a:noFill/>
@@ -3552,18 +3473,18 @@
         </p:nvSpPr>
         <p:spPr>
           <a:xfrm>
-            <a:off x="365760" y="1097280"/>
-            <a:ext cx="5486400" cy="1463040"/>
+            <a:off x="457200" y="1188720"/>
+            <a:ext cx="5486400" cy="1554480"/>
           </a:xfrm>
           <a:prstGeom prst="rect">
             <a:avLst/>
           </a:prstGeom>
           <a:solidFill>
-            <a:srgbClr val="36454F"/>
+            <a:srgbClr val="F2F2F2"/>
           </a:solidFill>
           <a:ln w="12700">
             <a:solidFill>
-              <a:srgbClr val="028090"/>
+              <a:srgbClr val="CCCCCC"/>
             </a:solidFill>
           </a:ln>
         </p:spPr>
@@ -3597,7 +3518,7 @@
         </p:nvSpPr>
         <p:spPr>
           <a:xfrm>
-            <a:off x="502920" y="1188720"/>
+            <a:off x="594360" y="1280160"/>
             <a:ext cx="5212080" cy="365760"/>
           </a:xfrm>
           <a:prstGeom prst="rect">
@@ -3613,13 +3534,13 @@
           <a:p>
             <a:pPr algn="l"/>
             <a:r>
-              <a:rPr sz="1300" b="1">
-                <a:solidFill>
-                  <a:srgbClr val="02C39A"/>
-                </a:solidFill>
-                <a:latin typeface="Calibri"/>
-              </a:rPr>
-              <a:t>Bias Detection</a:t>
+              <a:rPr sz="1300" b="1" i="0">
+                <a:solidFill>
+                  <a:srgbClr val="2E75B6"/>
+                </a:solidFill>
+                <a:latin typeface="Calibri"/>
+              </a:rPr>
+              <a:t>Access Control (RBAC)</a:t>
             </a:r>
           </a:p>
         </p:txBody>
@@ -3632,8 +3553,8 @@
         </p:nvSpPr>
         <p:spPr>
           <a:xfrm>
-            <a:off x="502920" y="1600200"/>
-            <a:ext cx="5212080" cy="822960"/>
+            <a:off x="594360" y="1691640"/>
+            <a:ext cx="5212080" cy="914400"/>
           </a:xfrm>
           <a:prstGeom prst="rect">
             <a:avLst/>
@@ -3648,13 +3569,13 @@
           <a:p>
             <a:pPr algn="l"/>
             <a:r>
-              <a:rPr sz="1100" b="0">
-                <a:solidFill>
-                  <a:srgbClr val="FFFFFF"/>
-                </a:solidFill>
-                <a:latin typeface="Calibri"/>
-              </a:rPr>
-              <a:t>Monitor mismatch flag rates by vendor, country, and currency. Alert if any segment is flagged &gt;3x the average rate — potential model bias.</a:t>
+              <a:rPr sz="1100" b="0" i="0">
+                <a:solidFill>
+                  <a:srgbClr val="1A1A2E"/>
+                </a:solidFill>
+                <a:latin typeface="Calibri"/>
+              </a:rPr>
+              <a:t>Azure AD — 4 roles: AP Clerk (view), Specialist (approve &lt;$10K), Manager (approve &lt;$50K), Controller (approve any). Enforced at API Gateway before reaching agent.</a:t>
             </a:r>
           </a:p>
         </p:txBody>
@@ -3667,18 +3588,18 @@
         </p:nvSpPr>
         <p:spPr>
           <a:xfrm>
-            <a:off x="6309360" y="1097280"/>
-            <a:ext cx="5486400" cy="1463040"/>
+            <a:off x="6400800" y="1188720"/>
+            <a:ext cx="5486400" cy="1554480"/>
           </a:xfrm>
           <a:prstGeom prst="rect">
             <a:avLst/>
           </a:prstGeom>
           <a:solidFill>
-            <a:srgbClr val="36454F"/>
+            <a:srgbClr val="F2F2F2"/>
           </a:solidFill>
           <a:ln w="12700">
             <a:solidFill>
-              <a:srgbClr val="028090"/>
+              <a:srgbClr val="CCCCCC"/>
             </a:solidFill>
           </a:ln>
         </p:spPr>
@@ -3712,7 +3633,7 @@
         </p:nvSpPr>
         <p:spPr>
           <a:xfrm>
-            <a:off x="6446520" y="1188720"/>
+            <a:off x="6537960" y="1280160"/>
             <a:ext cx="5212080" cy="365760"/>
           </a:xfrm>
           <a:prstGeom prst="rect">
@@ -3728,13 +3649,13 @@
           <a:p>
             <a:pPr algn="l"/>
             <a:r>
-              <a:rPr sz="1300" b="1">
-                <a:solidFill>
-                  <a:srgbClr val="02C39A"/>
-                </a:solidFill>
-                <a:latin typeface="Calibri"/>
-              </a:rPr>
-              <a:t>Explainability</a:t>
+              <a:rPr sz="1300" b="1" i="0">
+                <a:solidFill>
+                  <a:srgbClr val="2E75B6"/>
+                </a:solidFill>
+                <a:latin typeface="Calibri"/>
+              </a:rPr>
+              <a:t>Audit Trail</a:t>
             </a:r>
           </a:p>
         </p:txBody>
@@ -3747,8 +3668,8 @@
         </p:nvSpPr>
         <p:spPr>
           <a:xfrm>
-            <a:off x="6446520" y="1600200"/>
-            <a:ext cx="5212080" cy="822960"/>
+            <a:off x="6537960" y="1691640"/>
+            <a:ext cx="5212080" cy="914400"/>
           </a:xfrm>
           <a:prstGeom prst="rect">
             <a:avLst/>
@@ -3763,13 +3684,13 @@
           <a:p>
             <a:pPr algn="l"/>
             <a:r>
-              <a:rPr sz="1100" b="0">
-                <a:solidFill>
-                  <a:srgbClr val="FFFFFF"/>
-                </a:solidFill>
-                <a:latin typeface="Calibri"/>
-              </a:rPr>
-              <a:t>Every mismatch flag includes: which rule triggered, which feature drove ML decision, and confidence score. Finance teams can always understand why an invoice was flagged.</a:t>
+              <a:rPr sz="1100" b="0" i="0">
+                <a:solidFill>
+                  <a:srgbClr val="1A1A2E"/>
+                </a:solidFill>
+                <a:latin typeface="Calibri"/>
+              </a:rPr>
+              <a:t>Every agent decision logged: timestamp, user ID, invoice ID, result, rationale. Immutable in AWS S3. 7-year retention.</a:t>
             </a:r>
           </a:p>
         </p:txBody>
@@ -3782,18 +3703,18 @@
         </p:nvSpPr>
         <p:spPr>
           <a:xfrm>
-            <a:off x="365760" y="2834639"/>
-            <a:ext cx="5486400" cy="1463040"/>
+            <a:off x="457200" y="2926080"/>
+            <a:ext cx="5486400" cy="1554480"/>
           </a:xfrm>
           <a:prstGeom prst="rect">
             <a:avLst/>
           </a:prstGeom>
           <a:solidFill>
-            <a:srgbClr val="36454F"/>
+            <a:srgbClr val="F2F2F2"/>
           </a:solidFill>
           <a:ln w="12700">
             <a:solidFill>
-              <a:srgbClr val="028090"/>
+              <a:srgbClr val="CCCCCC"/>
             </a:solidFill>
           </a:ln>
         </p:spPr>
@@ -3827,7 +3748,7 @@
         </p:nvSpPr>
         <p:spPr>
           <a:xfrm>
-            <a:off x="502920" y="2926079"/>
+            <a:off x="594360" y="3017520"/>
             <a:ext cx="5212080" cy="365760"/>
           </a:xfrm>
           <a:prstGeom prst="rect">
@@ -3843,13 +3764,13 @@
           <a:p>
             <a:pPr algn="l"/>
             <a:r>
-              <a:rPr sz="1300" b="1">
-                <a:solidFill>
-                  <a:srgbClr val="02C39A"/>
-                </a:solidFill>
-                <a:latin typeface="Calibri"/>
-              </a:rPr>
-              <a:t>Human Oversight</a:t>
+              <a:rPr sz="1300" b="1" i="0">
+                <a:solidFill>
+                  <a:srgbClr val="2E75B6"/>
+                </a:solidFill>
+                <a:latin typeface="Calibri"/>
+              </a:rPr>
+              <a:t>Data Privacy (GDPR)</a:t>
             </a:r>
           </a:p>
         </p:txBody>
@@ -3862,8 +3783,8 @@
         </p:nvSpPr>
         <p:spPr>
           <a:xfrm>
-            <a:off x="502920" y="3337559"/>
-            <a:ext cx="5212080" cy="822960"/>
+            <a:off x="594360" y="3429000"/>
+            <a:ext cx="5212080" cy="914400"/>
           </a:xfrm>
           <a:prstGeom prst="rect">
             <a:avLst/>
@@ -3878,13 +3799,13 @@
           <a:p>
             <a:pPr algn="l"/>
             <a:r>
-              <a:rPr sz="1100" b="0">
-                <a:solidFill>
-                  <a:srgbClr val="FFFFFF"/>
-                </a:solidFill>
-                <a:latin typeface="Calibri"/>
-              </a:rPr>
-              <a:t>No payment action taken without human approval. Agent cannot send emails or trigger SAP payments autonomously. HITL is mandatory, not optional.</a:t>
+              <a:rPr sz="1100" b="0" i="0">
+                <a:solidFill>
+                  <a:srgbClr val="1A1A2E"/>
+                </a:solidFill>
+                <a:latin typeface="Calibri"/>
+              </a:rPr>
+              <a:t>PII encrypted at rest (AES-256) and in transit (TLS 1.3). EU invoices stay in Azure West Europe. GDPR Art. 44.</a:t>
             </a:r>
           </a:p>
         </p:txBody>
@@ -3897,18 +3818,18 @@
         </p:nvSpPr>
         <p:spPr>
           <a:xfrm>
-            <a:off x="6309360" y="2834639"/>
-            <a:ext cx="5486400" cy="1463040"/>
+            <a:off x="6400800" y="2926080"/>
+            <a:ext cx="5486400" cy="1554480"/>
           </a:xfrm>
           <a:prstGeom prst="rect">
             <a:avLst/>
           </a:prstGeom>
           <a:solidFill>
-            <a:srgbClr val="36454F"/>
+            <a:srgbClr val="F2F2F2"/>
           </a:solidFill>
           <a:ln w="12700">
             <a:solidFill>
-              <a:srgbClr val="028090"/>
+              <a:srgbClr val="CCCCCC"/>
             </a:solidFill>
           </a:ln>
         </p:spPr>
@@ -3942,7 +3863,7 @@
         </p:nvSpPr>
         <p:spPr>
           <a:xfrm>
-            <a:off x="6446520" y="2926079"/>
+            <a:off x="6537960" y="3017520"/>
             <a:ext cx="5212080" cy="365760"/>
           </a:xfrm>
           <a:prstGeom prst="rect">
@@ -3958,13 +3879,13 @@
           <a:p>
             <a:pPr algn="l"/>
             <a:r>
-              <a:rPr sz="1300" b="1">
-                <a:solidFill>
-                  <a:srgbClr val="02C39A"/>
-                </a:solidFill>
-                <a:latin typeface="Calibri"/>
-              </a:rPr>
-              <a:t>Model Monitoring</a:t>
+              <a:rPr sz="1300" b="1" i="0">
+                <a:solidFill>
+                  <a:srgbClr val="2E75B6"/>
+                </a:solidFill>
+                <a:latin typeface="Calibri"/>
+              </a:rPr>
+              <a:t>Data Residency</a:t>
             </a:r>
           </a:p>
         </p:txBody>
@@ -3977,8 +3898,8 @@
         </p:nvSpPr>
         <p:spPr>
           <a:xfrm>
-            <a:off x="6446520" y="3337559"/>
-            <a:ext cx="5212080" cy="822960"/>
+            <a:off x="6537960" y="3429000"/>
+            <a:ext cx="5212080" cy="914400"/>
           </a:xfrm>
           <a:prstGeom prst="rect">
             <a:avLst/>
@@ -3993,13 +3914,13 @@
           <a:p>
             <a:pPr algn="l"/>
             <a:r>
-              <a:rPr sz="1100" b="0">
-                <a:solidFill>
-                  <a:srgbClr val="FFFFFF"/>
-                </a:solidFill>
-                <a:latin typeface="Calibri"/>
-              </a:rPr>
-              <a:t>Precision/recall tracked weekly in MLflow. Drift detection on feature distributions. Auto-alert if precision drops below 95% — model retrain triggered.</a:t>
+              <a:rPr sz="1100" b="0" i="0">
+                <a:solidFill>
+                  <a:srgbClr val="1A1A2E"/>
+                </a:solidFill>
+                <a:latin typeface="Calibri"/>
+              </a:rPr>
+              <a:t>EU invoices processed only in Azure West Europe. Never leaves EU boundary. Right to erasure in 30 days.</a:t>
             </a:r>
           </a:p>
         </p:txBody>
@@ -4012,18 +3933,18 @@
         </p:nvSpPr>
         <p:spPr>
           <a:xfrm>
-            <a:off x="365760" y="4572000"/>
-            <a:ext cx="5486400" cy="1463040"/>
+            <a:off x="457200" y="4663440"/>
+            <a:ext cx="5486400" cy="1554480"/>
           </a:xfrm>
           <a:prstGeom prst="rect">
             <a:avLst/>
           </a:prstGeom>
           <a:solidFill>
-            <a:srgbClr val="36454F"/>
+            <a:srgbClr val="F2F2F2"/>
           </a:solidFill>
           <a:ln w="12700">
             <a:solidFill>
-              <a:srgbClr val="028090"/>
+              <a:srgbClr val="CCCCCC"/>
             </a:solidFill>
           </a:ln>
         </p:spPr>
@@ -4057,7 +3978,7 @@
         </p:nvSpPr>
         <p:spPr>
           <a:xfrm>
-            <a:off x="502920" y="4663440"/>
+            <a:off x="594360" y="4754879"/>
             <a:ext cx="5212080" cy="365760"/>
           </a:xfrm>
           <a:prstGeom prst="rect">
@@ -4073,13 +3994,13 @@
           <a:p>
             <a:pPr algn="l"/>
             <a:r>
-              <a:rPr sz="1300" b="1">
-                <a:solidFill>
-                  <a:srgbClr val="02C39A"/>
-                </a:solidFill>
-                <a:latin typeface="Calibri"/>
-              </a:rPr>
-              <a:t>Guardrails</a:t>
+              <a:rPr sz="1300" b="1" i="0">
+                <a:solidFill>
+                  <a:srgbClr val="2E75B6"/>
+                </a:solidFill>
+                <a:latin typeface="Calibri"/>
+              </a:rPr>
+              <a:t>Secrets Management</a:t>
             </a:r>
           </a:p>
         </p:txBody>
@@ -4092,8 +4013,8 @@
         </p:nvSpPr>
         <p:spPr>
           <a:xfrm>
-            <a:off x="502920" y="5074920"/>
-            <a:ext cx="5212080" cy="822960"/>
+            <a:off x="594360" y="5166359"/>
+            <a:ext cx="5212080" cy="914400"/>
           </a:xfrm>
           <a:prstGeom prst="rect">
             <a:avLst/>
@@ -4108,13 +4029,13 @@
           <a:p>
             <a:pPr algn="l"/>
             <a:r>
-              <a:rPr sz="1100" b="0">
-                <a:solidFill>
-                  <a:srgbClr val="FFFFFF"/>
-                </a:solidFill>
-                <a:latin typeface="Calibri"/>
-              </a:rPr>
-              <a:t>High-value invoices (&gt;$50K) always routed to manual review regardless of model decision. Agent tool misuse prevented via input validation in matching_tool().</a:t>
+              <a:rPr sz="1100" b="0" i="0">
+                <a:solidFill>
+                  <a:srgbClr val="1A1A2E"/>
+                </a:solidFill>
+                <a:latin typeface="Calibri"/>
+              </a:rPr>
+              <a:t>Azure Key Vault for all credentials. SAP/Oracle passwords never in code or environment variables.</a:t>
             </a:r>
           </a:p>
         </p:txBody>
@@ -4127,18 +4048,18 @@
         </p:nvSpPr>
         <p:spPr>
           <a:xfrm>
-            <a:off x="6309360" y="4572000"/>
-            <a:ext cx="5486400" cy="1463040"/>
+            <a:off x="6400800" y="4663440"/>
+            <a:ext cx="5486400" cy="1554480"/>
           </a:xfrm>
           <a:prstGeom prst="rect">
             <a:avLst/>
           </a:prstGeom>
           <a:solidFill>
-            <a:srgbClr val="36454F"/>
+            <a:srgbClr val="F2F2F2"/>
           </a:solidFill>
           <a:ln w="12700">
             <a:solidFill>
-              <a:srgbClr val="028090"/>
+              <a:srgbClr val="CCCCCC"/>
             </a:solidFill>
           </a:ln>
         </p:spPr>
@@ -4172,7 +4093,7 @@
         </p:nvSpPr>
         <p:spPr>
           <a:xfrm>
-            <a:off x="6446520" y="4663440"/>
+            <a:off x="6537960" y="4754879"/>
             <a:ext cx="5212080" cy="365760"/>
           </a:xfrm>
           <a:prstGeom prst="rect">
@@ -4188,13 +4109,13 @@
           <a:p>
             <a:pPr algn="l"/>
             <a:r>
-              <a:rPr sz="1300" b="1">
-                <a:solidFill>
-                  <a:srgbClr val="02C39A"/>
-                </a:solidFill>
-                <a:latin typeface="Calibri"/>
-              </a:rPr>
-              <a:t>Data Minimisation</a:t>
+              <a:rPr sz="1300" b="1" i="0">
+                <a:solidFill>
+                  <a:srgbClr val="2E75B6"/>
+                </a:solidFill>
+                <a:latin typeface="Calibri"/>
+              </a:rPr>
+              <a:t>Model Governance</a:t>
             </a:r>
           </a:p>
         </p:txBody>
@@ -4207,8 +4128,8 @@
         </p:nvSpPr>
         <p:spPr>
           <a:xfrm>
-            <a:off x="6446520" y="5074920"/>
-            <a:ext cx="5212080" cy="822960"/>
+            <a:off x="6537960" y="5166359"/>
+            <a:ext cx="5212080" cy="914400"/>
           </a:xfrm>
           <a:prstGeom prst="rect">
             <a:avLst/>
@@ -4223,13 +4144,13 @@
           <a:p>
             <a:pPr algn="l"/>
             <a:r>
-              <a:rPr sz="1100" b="0">
-                <a:solidFill>
-                  <a:srgbClr val="FFFFFF"/>
-                </a:solidFill>
-                <a:latin typeface="Calibri"/>
-              </a:rPr>
-              <a:t>ML model trained only on features needed for matching. No vendor identity, no payment history, no personal data included in training features.</a:t>
+              <a:rPr sz="1100" b="0" i="0">
+                <a:solidFill>
+                  <a:srgbClr val="1A1A2E"/>
+                </a:solidFill>
+                <a:latin typeface="Calibri"/>
+              </a:rPr>
+              <a:t>All predictions logged. Bias monitoring by vendor, currency, country. Auto-alert if model drifts.</a:t>
             </a:r>
           </a:p>
         </p:txBody>
@@ -4267,7 +4188,7 @@
             <a:avLst/>
           </a:prstGeom>
           <a:solidFill>
-            <a:srgbClr val="1E2761"/>
+            <a:srgbClr val="FFFFFF"/>
           </a:solidFill>
           <a:ln>
             <a:noFill/>
@@ -4303,8 +4224,8 @@
         </p:nvSpPr>
         <p:spPr>
           <a:xfrm>
-            <a:off x="548640" y="274320"/>
-            <a:ext cx="10972800" cy="731520"/>
+            <a:off x="548640" y="228600"/>
+            <a:ext cx="10972800" cy="640080"/>
           </a:xfrm>
           <a:prstGeom prst="rect">
             <a:avLst/>
@@ -4312,20 +4233,20 @@
           <a:noFill/>
         </p:spPr>
         <p:txBody>
-          <a:bodyPr wrap="none">
+          <a:bodyPr wrap="square">
             <a:spAutoFit/>
           </a:bodyPr>
           <a:lstStyle/>
           <a:p>
             <a:pPr algn="l"/>
             <a:r>
-              <a:rPr sz="3200" b="1">
-                <a:solidFill>
-                  <a:srgbClr val="FFFFFF"/>
-                </a:solidFill>
-                <a:latin typeface="Calibri"/>
-              </a:rPr>
-              <a:t>Cost Estimate — MVP at Scale</a:t>
+              <a:rPr sz="2800" b="1" i="0">
+                <a:solidFill>
+                  <a:srgbClr val="1A1A2E"/>
+                </a:solidFill>
+                <a:latin typeface="Calibri"/>
+              </a:rPr>
+              <a:t>Responsible AI — D4 Summary</a:t>
             </a:r>
           </a:p>
         </p:txBody>
@@ -4338,14 +4259,14 @@
         </p:nvSpPr>
         <p:spPr>
           <a:xfrm>
-            <a:off x="548640" y="868680"/>
-            <a:ext cx="2286000" cy="45720"/>
+            <a:off x="548640" y="822960"/>
+            <a:ext cx="11064240" cy="36576"/>
           </a:xfrm>
           <a:prstGeom prst="rect">
             <a:avLst/>
           </a:prstGeom>
           <a:solidFill>
-            <a:srgbClr val="028090"/>
+            <a:srgbClr val="2E75B6"/>
           </a:solidFill>
           <a:ln>
             <a:noFill/>
@@ -4381,18 +4302,18 @@
         </p:nvSpPr>
         <p:spPr>
           <a:xfrm>
-            <a:off x="365760" y="1097280"/>
-            <a:ext cx="11430000" cy="3840480"/>
+            <a:off x="457200" y="1188720"/>
+            <a:ext cx="5486400" cy="1554480"/>
           </a:xfrm>
           <a:prstGeom prst="rect">
             <a:avLst/>
           </a:prstGeom>
           <a:solidFill>
-            <a:srgbClr val="36454F"/>
+            <a:srgbClr val="F2F2F2"/>
           </a:solidFill>
           <a:ln w="12700">
             <a:solidFill>
-              <a:srgbClr val="028090"/>
+              <a:srgbClr val="CCCCCC"/>
             </a:solidFill>
           </a:ln>
         </p:spPr>
@@ -4426,8 +4347,8 @@
         </p:nvSpPr>
         <p:spPr>
           <a:xfrm>
-            <a:off x="548640" y="1188720"/>
-            <a:ext cx="3840480" cy="365760"/>
+            <a:off x="594360" y="1280160"/>
+            <a:ext cx="5212080" cy="365760"/>
           </a:xfrm>
           <a:prstGeom prst="rect">
             <a:avLst/>
@@ -4442,13 +4363,13 @@
           <a:p>
             <a:pPr algn="l"/>
             <a:r>
-              <a:rPr sz="1300" b="1">
-                <a:solidFill>
-                  <a:srgbClr val="02C39A"/>
-                </a:solidFill>
-                <a:latin typeface="Calibri"/>
-              </a:rPr>
-              <a:t>Service</a:t>
+              <a:rPr sz="1300" b="1" i="0">
+                <a:solidFill>
+                  <a:srgbClr val="2E75B6"/>
+                </a:solidFill>
+                <a:latin typeface="Calibri"/>
+              </a:rPr>
+              <a:t>Bias Detection</a:t>
             </a:r>
           </a:p>
         </p:txBody>
@@ -4461,8 +4382,8 @@
         </p:nvSpPr>
         <p:spPr>
           <a:xfrm>
-            <a:off x="4572000" y="1188720"/>
-            <a:ext cx="4480560" cy="365760"/>
+            <a:off x="594360" y="1691640"/>
+            <a:ext cx="5212080" cy="914400"/>
           </a:xfrm>
           <a:prstGeom prst="rect">
             <a:avLst/>
@@ -4477,71 +4398,38 @@
           <a:p>
             <a:pPr algn="l"/>
             <a:r>
-              <a:rPr sz="1300" b="1">
-                <a:solidFill>
-                  <a:srgbClr val="02C39A"/>
-                </a:solidFill>
-                <a:latin typeface="Calibri"/>
-              </a:rPr>
-              <a:t>Usage</a:t>
-            </a:r>
-          </a:p>
-        </p:txBody>
-      </p:sp>
-      <p:sp>
-        <p:nvSpPr>
-          <p:cNvPr id="8" name="TextBox 7"/>
-          <p:cNvSpPr txBox="1"/>
-          <p:nvPr/>
-        </p:nvSpPr>
-        <p:spPr>
-          <a:xfrm>
-            <a:off x="9326880" y="1188720"/>
-            <a:ext cx="2286000" cy="365760"/>
-          </a:xfrm>
-          <a:prstGeom prst="rect">
-            <a:avLst/>
-          </a:prstGeom>
-          <a:noFill/>
-        </p:spPr>
-        <p:txBody>
-          <a:bodyPr wrap="square">
-            <a:spAutoFit/>
-          </a:bodyPr>
-          <a:lstStyle/>
-          <a:p>
-            <a:pPr algn="l"/>
-            <a:r>
-              <a:rPr sz="1300" b="1">
-                <a:solidFill>
-                  <a:srgbClr val="02C39A"/>
-                </a:solidFill>
-                <a:latin typeface="Calibri"/>
-              </a:rPr>
-              <a:t>Est. Monthly Cost</a:t>
-            </a:r>
-          </a:p>
-        </p:txBody>
-      </p:sp>
-      <p:sp>
-        <p:nvSpPr>
-          <p:cNvPr id="9" name="Rectangle 8"/>
+              <a:rPr sz="1100" b="0" i="0">
+                <a:solidFill>
+                  <a:srgbClr val="1A1A2E"/>
+                </a:solidFill>
+                <a:latin typeface="Calibri"/>
+              </a:rPr>
+              <a:t>Flag rates monitored weekly by vendor, country, currency. Alert if any segment flagged &gt;3x average rate.</a:t>
+            </a:r>
+          </a:p>
+        </p:txBody>
+      </p:sp>
+      <p:sp>
+        <p:nvSpPr>
+          <p:cNvPr id="8" name="Rectangle 7"/>
           <p:cNvSpPr/>
           <p:nvPr/>
         </p:nvSpPr>
         <p:spPr>
           <a:xfrm>
-            <a:off x="457200" y="1645920"/>
-            <a:ext cx="11247120" cy="457200"/>
+            <a:off x="6400800" y="1188720"/>
+            <a:ext cx="5486400" cy="1554480"/>
           </a:xfrm>
           <a:prstGeom prst="rect">
             <a:avLst/>
           </a:prstGeom>
           <a:solidFill>
-            <a:srgbClr val="1E2761"/>
+            <a:srgbClr val="F2F2F2"/>
           </a:solidFill>
-          <a:ln>
-            <a:noFill/>
+          <a:ln w="12700">
+            <a:solidFill>
+              <a:srgbClr val="CCCCCC"/>
+            </a:solidFill>
           </a:ln>
         </p:spPr>
         <p:style>
@@ -4568,14 +4456,14 @@
       </p:sp>
       <p:sp>
         <p:nvSpPr>
-          <p:cNvPr id="10" name="TextBox 9"/>
+          <p:cNvPr id="9" name="TextBox 8"/>
           <p:cNvSpPr txBox="1"/>
           <p:nvPr/>
         </p:nvSpPr>
         <p:spPr>
           <a:xfrm>
-            <a:off x="548640" y="1691640"/>
-            <a:ext cx="3840480" cy="365760"/>
+            <a:off x="6537960" y="1280160"/>
+            <a:ext cx="5212080" cy="365760"/>
           </a:xfrm>
           <a:prstGeom prst="rect">
             <a:avLst/>
@@ -4590,27 +4478,27 @@
           <a:p>
             <a:pPr algn="l"/>
             <a:r>
-              <a:rPr sz="1200" b="0">
-                <a:solidFill>
-                  <a:srgbClr val="FFFFFF"/>
-                </a:solidFill>
-                <a:latin typeface="Calibri"/>
-              </a:rPr>
-              <a:t>Azure Form Recognizer</a:t>
-            </a:r>
-          </a:p>
-        </p:txBody>
-      </p:sp>
-      <p:sp>
-        <p:nvSpPr>
-          <p:cNvPr id="11" name="TextBox 10"/>
+              <a:rPr sz="1300" b="1" i="0">
+                <a:solidFill>
+                  <a:srgbClr val="2E75B6"/>
+                </a:solidFill>
+                <a:latin typeface="Calibri"/>
+              </a:rPr>
+              <a:t>Explainability</a:t>
+            </a:r>
+          </a:p>
+        </p:txBody>
+      </p:sp>
+      <p:sp>
+        <p:nvSpPr>
+          <p:cNvPr id="10" name="TextBox 9"/>
           <p:cNvSpPr txBox="1"/>
           <p:nvPr/>
         </p:nvSpPr>
         <p:spPr>
           <a:xfrm>
-            <a:off x="4572000" y="1691640"/>
-            <a:ext cx="4480560" cy="365760"/>
+            <a:off x="6537960" y="1691640"/>
+            <a:ext cx="5212080" cy="914400"/>
           </a:xfrm>
           <a:prstGeom prst="rect">
             <a:avLst/>
@@ -4625,71 +4513,38 @@
           <a:p>
             <a:pPr algn="l"/>
             <a:r>
-              <a:rPr sz="1200" b="0">
-                <a:solidFill>
-                  <a:srgbClr val="E2E8F0"/>
-                </a:solidFill>
-                <a:latin typeface="Calibri"/>
-              </a:rPr>
-              <a:t>1M invoices/month</a:t>
-            </a:r>
-          </a:p>
-        </p:txBody>
-      </p:sp>
-      <p:sp>
-        <p:nvSpPr>
-          <p:cNvPr id="12" name="TextBox 11"/>
-          <p:cNvSpPr txBox="1"/>
-          <p:nvPr/>
-        </p:nvSpPr>
-        <p:spPr>
-          <a:xfrm>
-            <a:off x="9326880" y="1691640"/>
-            <a:ext cx="2286000" cy="365760"/>
-          </a:xfrm>
-          <a:prstGeom prst="rect">
-            <a:avLst/>
-          </a:prstGeom>
-          <a:noFill/>
-        </p:spPr>
-        <p:txBody>
-          <a:bodyPr wrap="square">
-            <a:spAutoFit/>
-          </a:bodyPr>
-          <a:lstStyle/>
-          <a:p>
-            <a:pPr algn="l"/>
-            <a:r>
-              <a:rPr sz="1200" b="1">
-                <a:solidFill>
-                  <a:srgbClr val="02C39A"/>
-                </a:solidFill>
-                <a:latin typeface="Calibri"/>
-              </a:rPr>
-              <a:t>$1,500/month</a:t>
-            </a:r>
-          </a:p>
-        </p:txBody>
-      </p:sp>
-      <p:sp>
-        <p:nvSpPr>
-          <p:cNvPr id="13" name="Rectangle 12"/>
+              <a:rPr sz="1100" b="0" i="0">
+                <a:solidFill>
+                  <a:srgbClr val="1A1A2E"/>
+                </a:solidFill>
+                <a:latin typeface="Calibri"/>
+              </a:rPr>
+              <a:t>Every mismatch shows which rule triggered and top ML feature. Finance team always knows why invoice was flagged.</a:t>
+            </a:r>
+          </a:p>
+        </p:txBody>
+      </p:sp>
+      <p:sp>
+        <p:nvSpPr>
+          <p:cNvPr id="11" name="Rectangle 10"/>
           <p:cNvSpPr/>
           <p:nvPr/>
         </p:nvSpPr>
         <p:spPr>
           <a:xfrm>
-            <a:off x="457200" y="2148840"/>
-            <a:ext cx="11247120" cy="457200"/>
+            <a:off x="457200" y="2926080"/>
+            <a:ext cx="5486400" cy="1554480"/>
           </a:xfrm>
           <a:prstGeom prst="rect">
             <a:avLst/>
           </a:prstGeom>
           <a:solidFill>
-            <a:srgbClr val="36454F"/>
+            <a:srgbClr val="F2F2F2"/>
           </a:solidFill>
-          <a:ln>
-            <a:noFill/>
+          <a:ln w="12700">
+            <a:solidFill>
+              <a:srgbClr val="CCCCCC"/>
+            </a:solidFill>
           </a:ln>
         </p:spPr>
         <p:style>
@@ -4716,14 +4571,14 @@
       </p:sp>
       <p:sp>
         <p:nvSpPr>
-          <p:cNvPr id="14" name="TextBox 13"/>
+          <p:cNvPr id="12" name="TextBox 11"/>
           <p:cNvSpPr txBox="1"/>
           <p:nvPr/>
         </p:nvSpPr>
         <p:spPr>
           <a:xfrm>
-            <a:off x="548640" y="2194560"/>
-            <a:ext cx="3840480" cy="365760"/>
+            <a:off x="594360" y="3017520"/>
+            <a:ext cx="5212080" cy="365760"/>
           </a:xfrm>
           <a:prstGeom prst="rect">
             <a:avLst/>
@@ -4738,27 +4593,27 @@
           <a:p>
             <a:pPr algn="l"/>
             <a:r>
-              <a:rPr sz="1200" b="0">
-                <a:solidFill>
-                  <a:srgbClr val="FFFFFF"/>
-                </a:solidFill>
-                <a:latin typeface="Calibri"/>
-              </a:rPr>
-              <a:t>Azure OpenAI (GPT-4)</a:t>
-            </a:r>
-          </a:p>
-        </p:txBody>
-      </p:sp>
-      <p:sp>
-        <p:nvSpPr>
-          <p:cNvPr id="15" name="TextBox 14"/>
+              <a:rPr sz="1300" b="1" i="0">
+                <a:solidFill>
+                  <a:srgbClr val="2E75B6"/>
+                </a:solidFill>
+                <a:latin typeface="Calibri"/>
+              </a:rPr>
+              <a:t>Human Oversight</a:t>
+            </a:r>
+          </a:p>
+        </p:txBody>
+      </p:sp>
+      <p:sp>
+        <p:nvSpPr>
+          <p:cNvPr id="13" name="TextBox 12"/>
           <p:cNvSpPr txBox="1"/>
           <p:nvPr/>
         </p:nvSpPr>
         <p:spPr>
           <a:xfrm>
-            <a:off x="4572000" y="2194560"/>
-            <a:ext cx="4480560" cy="365760"/>
+            <a:off x="594360" y="3429000"/>
+            <a:ext cx="5212080" cy="914400"/>
           </a:xfrm>
           <a:prstGeom prst="rect">
             <a:avLst/>
@@ -4773,71 +4628,38 @@
           <a:p>
             <a:pPr algn="l"/>
             <a:r>
-              <a:rPr sz="1200" b="0">
-                <a:solidFill>
-                  <a:srgbClr val="E2E8F0"/>
-                </a:solidFill>
-                <a:latin typeface="Calibri"/>
-              </a:rPr>
-              <a:t>~75K dispute emails (7.5% mismatch rate)</a:t>
-            </a:r>
-          </a:p>
-        </p:txBody>
-      </p:sp>
-      <p:sp>
-        <p:nvSpPr>
-          <p:cNvPr id="16" name="TextBox 15"/>
-          <p:cNvSpPr txBox="1"/>
-          <p:nvPr/>
-        </p:nvSpPr>
-        <p:spPr>
-          <a:xfrm>
-            <a:off x="9326880" y="2194560"/>
-            <a:ext cx="2286000" cy="365760"/>
-          </a:xfrm>
-          <a:prstGeom prst="rect">
-            <a:avLst/>
-          </a:prstGeom>
-          <a:noFill/>
-        </p:spPr>
-        <p:txBody>
-          <a:bodyPr wrap="square">
-            <a:spAutoFit/>
-          </a:bodyPr>
-          <a:lstStyle/>
-          <a:p>
-            <a:pPr algn="l"/>
-            <a:r>
-              <a:rPr sz="1200" b="1">
-                <a:solidFill>
-                  <a:srgbClr val="02C39A"/>
-                </a:solidFill>
-                <a:latin typeface="Calibri"/>
-              </a:rPr>
-              <a:t>$2,200/month</a:t>
-            </a:r>
-          </a:p>
-        </p:txBody>
-      </p:sp>
-      <p:sp>
-        <p:nvSpPr>
-          <p:cNvPr id="17" name="Rectangle 16"/>
+              <a:rPr sz="1100" b="0" i="0">
+                <a:solidFill>
+                  <a:srgbClr val="1A1A2E"/>
+                </a:solidFill>
+                <a:latin typeface="Calibri"/>
+              </a:rPr>
+              <a:t>No payment or email sent without human approval. HITL is hardcoded — not configurable.</a:t>
+            </a:r>
+          </a:p>
+        </p:txBody>
+      </p:sp>
+      <p:sp>
+        <p:nvSpPr>
+          <p:cNvPr id="14" name="Rectangle 13"/>
           <p:cNvSpPr/>
           <p:nvPr/>
         </p:nvSpPr>
         <p:spPr>
           <a:xfrm>
-            <a:off x="457200" y="2651760"/>
-            <a:ext cx="11247120" cy="457200"/>
+            <a:off x="6400800" y="2926080"/>
+            <a:ext cx="5486400" cy="1554480"/>
           </a:xfrm>
           <a:prstGeom prst="rect">
             <a:avLst/>
           </a:prstGeom>
           <a:solidFill>
-            <a:srgbClr val="1E2761"/>
+            <a:srgbClr val="F2F2F2"/>
           </a:solidFill>
-          <a:ln>
-            <a:noFill/>
+          <a:ln w="12700">
+            <a:solidFill>
+              <a:srgbClr val="CCCCCC"/>
+            </a:solidFill>
           </a:ln>
         </p:spPr>
         <p:style>
@@ -4864,14 +4686,14 @@
       </p:sp>
       <p:sp>
         <p:nvSpPr>
-          <p:cNvPr id="18" name="TextBox 17"/>
+          <p:cNvPr id="15" name="TextBox 14"/>
           <p:cNvSpPr txBox="1"/>
           <p:nvPr/>
         </p:nvSpPr>
         <p:spPr>
           <a:xfrm>
-            <a:off x="548640" y="2697480"/>
-            <a:ext cx="3840480" cy="365760"/>
+            <a:off x="6537960" y="3017520"/>
+            <a:ext cx="5212080" cy="365760"/>
           </a:xfrm>
           <a:prstGeom prst="rect">
             <a:avLst/>
@@ -4886,27 +4708,27 @@
           <a:p>
             <a:pPr algn="l"/>
             <a:r>
-              <a:rPr sz="1200" b="0">
-                <a:solidFill>
-                  <a:srgbClr val="FFFFFF"/>
-                </a:solidFill>
-                <a:latin typeface="Calibri"/>
-              </a:rPr>
-              <a:t>Azure Container Apps</a:t>
-            </a:r>
-          </a:p>
-        </p:txBody>
-      </p:sp>
-      <p:sp>
-        <p:nvSpPr>
-          <p:cNvPr id="19" name="TextBox 18"/>
+              <a:rPr sz="1300" b="1" i="0">
+                <a:solidFill>
+                  <a:srgbClr val="2E75B6"/>
+                </a:solidFill>
+                <a:latin typeface="Calibri"/>
+              </a:rPr>
+              <a:t>Model Monitoring</a:t>
+            </a:r>
+          </a:p>
+        </p:txBody>
+      </p:sp>
+      <p:sp>
+        <p:nvSpPr>
+          <p:cNvPr id="16" name="TextBox 15"/>
           <p:cNvSpPr txBox="1"/>
           <p:nvPr/>
         </p:nvSpPr>
         <p:spPr>
           <a:xfrm>
-            <a:off x="4572000" y="2697480"/>
-            <a:ext cx="4480560" cy="365760"/>
+            <a:off x="6537960" y="3429000"/>
+            <a:ext cx="5212080" cy="914400"/>
           </a:xfrm>
           <a:prstGeom prst="rect">
             <a:avLst/>
@@ -4921,71 +4743,38 @@
           <a:p>
             <a:pPr algn="l"/>
             <a:r>
-              <a:rPr sz="1200" b="0">
-                <a:solidFill>
-                  <a:srgbClr val="E2E8F0"/>
-                </a:solidFill>
-                <a:latin typeface="Calibri"/>
-              </a:rPr>
-              <a:t>Agent workflow hosting, auto-scaled</a:t>
-            </a:r>
-          </a:p>
-        </p:txBody>
-      </p:sp>
-      <p:sp>
-        <p:nvSpPr>
-          <p:cNvPr id="20" name="TextBox 19"/>
-          <p:cNvSpPr txBox="1"/>
-          <p:nvPr/>
-        </p:nvSpPr>
-        <p:spPr>
-          <a:xfrm>
-            <a:off x="9326880" y="2697480"/>
-            <a:ext cx="2286000" cy="365760"/>
-          </a:xfrm>
-          <a:prstGeom prst="rect">
-            <a:avLst/>
-          </a:prstGeom>
-          <a:noFill/>
-        </p:spPr>
-        <p:txBody>
-          <a:bodyPr wrap="square">
-            <a:spAutoFit/>
-          </a:bodyPr>
-          <a:lstStyle/>
-          <a:p>
-            <a:pPr algn="l"/>
-            <a:r>
-              <a:rPr sz="1200" b="1">
-                <a:solidFill>
-                  <a:srgbClr val="02C39A"/>
-                </a:solidFill>
-                <a:latin typeface="Calibri"/>
-              </a:rPr>
-              <a:t>$800/month</a:t>
-            </a:r>
-          </a:p>
-        </p:txBody>
-      </p:sp>
-      <p:sp>
-        <p:nvSpPr>
-          <p:cNvPr id="21" name="Rectangle 20"/>
+              <a:rPr sz="1100" b="0" i="0">
+                <a:solidFill>
+                  <a:srgbClr val="1A1A2E"/>
+                </a:solidFill>
+                <a:latin typeface="Calibri"/>
+              </a:rPr>
+              <a:t>Precision/recall tracked weekly in MLflow. Auto-retrain if precision drops below 95%.</a:t>
+            </a:r>
+          </a:p>
+        </p:txBody>
+      </p:sp>
+      <p:sp>
+        <p:nvSpPr>
+          <p:cNvPr id="17" name="Rectangle 16"/>
           <p:cNvSpPr/>
           <p:nvPr/>
         </p:nvSpPr>
         <p:spPr>
           <a:xfrm>
-            <a:off x="457200" y="3154680"/>
-            <a:ext cx="11247120" cy="457200"/>
+            <a:off x="457200" y="4663440"/>
+            <a:ext cx="5486400" cy="1554480"/>
           </a:xfrm>
           <a:prstGeom prst="rect">
             <a:avLst/>
           </a:prstGeom>
           <a:solidFill>
-            <a:srgbClr val="36454F"/>
+            <a:srgbClr val="F2F2F2"/>
           </a:solidFill>
-          <a:ln>
-            <a:noFill/>
+          <a:ln w="12700">
+            <a:solidFill>
+              <a:srgbClr val="CCCCCC"/>
+            </a:solidFill>
           </a:ln>
         </p:spPr>
         <p:style>
@@ -5012,14 +4801,14 @@
       </p:sp>
       <p:sp>
         <p:nvSpPr>
-          <p:cNvPr id="22" name="TextBox 21"/>
+          <p:cNvPr id="18" name="TextBox 17"/>
           <p:cNvSpPr txBox="1"/>
           <p:nvPr/>
         </p:nvSpPr>
         <p:spPr>
           <a:xfrm>
-            <a:off x="548640" y="3200400"/>
-            <a:ext cx="3840480" cy="365760"/>
+            <a:off x="594360" y="4754879"/>
+            <a:ext cx="5212080" cy="365760"/>
           </a:xfrm>
           <a:prstGeom prst="rect">
             <a:avLst/>
@@ -5034,27 +4823,27 @@
           <a:p>
             <a:pPr algn="l"/>
             <a:r>
-              <a:rPr sz="1200" b="0">
-                <a:solidFill>
-                  <a:srgbClr val="FFFFFF"/>
-                </a:solidFill>
-                <a:latin typeface="Calibri"/>
-              </a:rPr>
-              <a:t>AWS S3 + SageMaker</a:t>
-            </a:r>
-          </a:p>
-        </p:txBody>
-      </p:sp>
-      <p:sp>
-        <p:nvSpPr>
-          <p:cNvPr id="23" name="TextBox 22"/>
+              <a:rPr sz="1300" b="1" i="0">
+                <a:solidFill>
+                  <a:srgbClr val="2E75B6"/>
+                </a:solidFill>
+                <a:latin typeface="Calibri"/>
+              </a:rPr>
+              <a:t>Guardrails</a:t>
+            </a:r>
+          </a:p>
+        </p:txBody>
+      </p:sp>
+      <p:sp>
+        <p:nvSpPr>
+          <p:cNvPr id="19" name="TextBox 18"/>
           <p:cNvSpPr txBox="1"/>
           <p:nvPr/>
         </p:nvSpPr>
         <p:spPr>
           <a:xfrm>
-            <a:off x="4572000" y="3200400"/>
-            <a:ext cx="4480560" cy="365760"/>
+            <a:off x="594360" y="5166359"/>
+            <a:ext cx="5212080" cy="914400"/>
           </a:xfrm>
           <a:prstGeom prst="rect">
             <a:avLst/>
@@ -5069,71 +4858,38 @@
           <a:p>
             <a:pPr algn="l"/>
             <a:r>
-              <a:rPr sz="1200" b="0">
-                <a:solidFill>
-                  <a:srgbClr val="E2E8F0"/>
-                </a:solidFill>
-                <a:latin typeface="Calibri"/>
-              </a:rPr>
-              <a:t>Document archival + model training</a:t>
-            </a:r>
-          </a:p>
-        </p:txBody>
-      </p:sp>
-      <p:sp>
-        <p:nvSpPr>
-          <p:cNvPr id="24" name="TextBox 23"/>
-          <p:cNvSpPr txBox="1"/>
-          <p:nvPr/>
-        </p:nvSpPr>
-        <p:spPr>
-          <a:xfrm>
-            <a:off x="9326880" y="3200400"/>
-            <a:ext cx="2286000" cy="365760"/>
-          </a:xfrm>
-          <a:prstGeom prst="rect">
-            <a:avLst/>
-          </a:prstGeom>
-          <a:noFill/>
-        </p:spPr>
-        <p:txBody>
-          <a:bodyPr wrap="square">
-            <a:spAutoFit/>
-          </a:bodyPr>
-          <a:lstStyle/>
-          <a:p>
-            <a:pPr algn="l"/>
-            <a:r>
-              <a:rPr sz="1200" b="1">
-                <a:solidFill>
-                  <a:srgbClr val="02C39A"/>
-                </a:solidFill>
-                <a:latin typeface="Calibri"/>
-              </a:rPr>
-              <a:t>$600/month</a:t>
-            </a:r>
-          </a:p>
-        </p:txBody>
-      </p:sp>
-      <p:sp>
-        <p:nvSpPr>
-          <p:cNvPr id="25" name="Rectangle 24"/>
+              <a:rPr sz="1100" b="0" i="0">
+                <a:solidFill>
+                  <a:srgbClr val="1A1A2E"/>
+                </a:solidFill>
+                <a:latin typeface="Calibri"/>
+              </a:rPr>
+              <a:t>High-value invoices (&gt;$50K) always manual. Input validation on all MCP tool calls.</a:t>
+            </a:r>
+          </a:p>
+        </p:txBody>
+      </p:sp>
+      <p:sp>
+        <p:nvSpPr>
+          <p:cNvPr id="20" name="Rectangle 19"/>
           <p:cNvSpPr/>
           <p:nvPr/>
         </p:nvSpPr>
         <p:spPr>
           <a:xfrm>
-            <a:off x="457200" y="3657600"/>
-            <a:ext cx="11247120" cy="457200"/>
+            <a:off x="6400800" y="4663440"/>
+            <a:ext cx="5486400" cy="1554480"/>
           </a:xfrm>
           <a:prstGeom prst="rect">
             <a:avLst/>
           </a:prstGeom>
           <a:solidFill>
-            <a:srgbClr val="1E2761"/>
+            <a:srgbClr val="F2F2F2"/>
           </a:solidFill>
-          <a:ln>
-            <a:noFill/>
+          <a:ln w="12700">
+            <a:solidFill>
+              <a:srgbClr val="CCCCCC"/>
+            </a:solidFill>
           </a:ln>
         </p:spPr>
         <p:style>
@@ -5160,14 +4916,14 @@
       </p:sp>
       <p:sp>
         <p:nvSpPr>
-          <p:cNvPr id="26" name="TextBox 25"/>
+          <p:cNvPr id="21" name="TextBox 20"/>
           <p:cNvSpPr txBox="1"/>
           <p:nvPr/>
         </p:nvSpPr>
         <p:spPr>
           <a:xfrm>
-            <a:off x="548640" y="3703320"/>
-            <a:ext cx="3840480" cy="365760"/>
+            <a:off x="6537960" y="4754879"/>
+            <a:ext cx="5212080" cy="365760"/>
           </a:xfrm>
           <a:prstGeom prst="rect">
             <a:avLst/>
@@ -5182,27 +4938,27 @@
           <a:p>
             <a:pPr algn="l"/>
             <a:r>
-              <a:rPr sz="1200" b="0">
-                <a:solidFill>
-                  <a:srgbClr val="FFFFFF"/>
-                </a:solidFill>
-                <a:latin typeface="Calibri"/>
-              </a:rPr>
-              <a:t>Azure Data Factory</a:t>
-            </a:r>
-          </a:p>
-        </p:txBody>
-      </p:sp>
-      <p:sp>
-        <p:nvSpPr>
-          <p:cNvPr id="27" name="TextBox 26"/>
+              <a:rPr sz="1300" b="1" i="0">
+                <a:solidFill>
+                  <a:srgbClr val="2E75B6"/>
+                </a:solidFill>
+                <a:latin typeface="Calibri"/>
+              </a:rPr>
+              <a:t>Data Minimisation</a:t>
+            </a:r>
+          </a:p>
+        </p:txBody>
+      </p:sp>
+      <p:sp>
+        <p:nvSpPr>
+          <p:cNvPr id="22" name="TextBox 21"/>
           <p:cNvSpPr txBox="1"/>
           <p:nvPr/>
         </p:nvSpPr>
         <p:spPr>
           <a:xfrm>
-            <a:off x="4572000" y="3703320"/>
-            <a:ext cx="4480560" cy="365760"/>
+            <a:off x="6537960" y="5166359"/>
+            <a:ext cx="5212080" cy="914400"/>
           </a:xfrm>
           <a:prstGeom prst="rect">
             <a:avLst/>
@@ -5217,311 +4973,13 @@
           <a:p>
             <a:pPr algn="l"/>
             <a:r>
-              <a:rPr sz="1200" b="0">
-                <a:solidFill>
-                  <a:srgbClr val="E2E8F0"/>
-                </a:solidFill>
-                <a:latin typeface="Calibri"/>
-              </a:rPr>
-              <a:t>Pipeline orchestration</a:t>
-            </a:r>
-          </a:p>
-        </p:txBody>
-      </p:sp>
-      <p:sp>
-        <p:nvSpPr>
-          <p:cNvPr id="28" name="TextBox 27"/>
-          <p:cNvSpPr txBox="1"/>
-          <p:nvPr/>
-        </p:nvSpPr>
-        <p:spPr>
-          <a:xfrm>
-            <a:off x="9326880" y="3703320"/>
-            <a:ext cx="2286000" cy="365760"/>
-          </a:xfrm>
-          <a:prstGeom prst="rect">
-            <a:avLst/>
-          </a:prstGeom>
-          <a:noFill/>
-        </p:spPr>
-        <p:txBody>
-          <a:bodyPr wrap="square">
-            <a:spAutoFit/>
-          </a:bodyPr>
-          <a:lstStyle/>
-          <a:p>
-            <a:pPr algn="l"/>
-            <a:r>
-              <a:rPr sz="1200" b="1">
-                <a:solidFill>
-                  <a:srgbClr val="02C39A"/>
-                </a:solidFill>
-                <a:latin typeface="Calibri"/>
-              </a:rPr>
-              <a:t>$400/month</a:t>
-            </a:r>
-          </a:p>
-        </p:txBody>
-      </p:sp>
-      <p:sp>
-        <p:nvSpPr>
-          <p:cNvPr id="29" name="Rectangle 28"/>
-          <p:cNvSpPr/>
-          <p:nvPr/>
-        </p:nvSpPr>
-        <p:spPr>
-          <a:xfrm>
-            <a:off x="457200" y="4160520"/>
-            <a:ext cx="11247120" cy="457200"/>
-          </a:xfrm>
-          <a:prstGeom prst="rect">
-            <a:avLst/>
-          </a:prstGeom>
-          <a:solidFill>
-            <a:srgbClr val="36454F"/>
-          </a:solidFill>
-          <a:ln>
-            <a:noFill/>
-          </a:ln>
-        </p:spPr>
-        <p:style>
-          <a:lnRef idx="1">
-            <a:schemeClr val="accent1"/>
-          </a:lnRef>
-          <a:fillRef idx="3">
-            <a:schemeClr val="accent1"/>
-          </a:fillRef>
-          <a:effectRef idx="2">
-            <a:schemeClr val="accent1"/>
-          </a:effectRef>
-          <a:fontRef idx="minor">
-            <a:schemeClr val="lt1"/>
-          </a:fontRef>
-        </p:style>
-        <p:txBody>
-          <a:bodyPr rtlCol="0" anchor="ctr"/>
-          <a:lstStyle/>
-          <a:p>
-            <a:pPr algn="ctr"/>
-          </a:p>
-        </p:txBody>
-      </p:sp>
-      <p:sp>
-        <p:nvSpPr>
-          <p:cNvPr id="30" name="TextBox 29"/>
-          <p:cNvSpPr txBox="1"/>
-          <p:nvPr/>
-        </p:nvSpPr>
-        <p:spPr>
-          <a:xfrm>
-            <a:off x="548640" y="4206240"/>
-            <a:ext cx="3840480" cy="365760"/>
-          </a:xfrm>
-          <a:prstGeom prst="rect">
-            <a:avLst/>
-          </a:prstGeom>
-          <a:noFill/>
-        </p:spPr>
-        <p:txBody>
-          <a:bodyPr wrap="square">
-            <a:spAutoFit/>
-          </a:bodyPr>
-          <a:lstStyle/>
-          <a:p>
-            <a:pPr algn="l"/>
-            <a:r>
-              <a:rPr sz="1200" b="0">
-                <a:solidFill>
-                  <a:srgbClr val="FFFFFF"/>
-                </a:solidFill>
-                <a:latin typeface="Calibri"/>
-              </a:rPr>
-              <a:t>MLflow + Monitoring</a:t>
-            </a:r>
-          </a:p>
-        </p:txBody>
-      </p:sp>
-      <p:sp>
-        <p:nvSpPr>
-          <p:cNvPr id="31" name="TextBox 30"/>
-          <p:cNvSpPr txBox="1"/>
-          <p:nvPr/>
-        </p:nvSpPr>
-        <p:spPr>
-          <a:xfrm>
-            <a:off x="4572000" y="4206240"/>
-            <a:ext cx="4480560" cy="365760"/>
-          </a:xfrm>
-          <a:prstGeom prst="rect">
-            <a:avLst/>
-          </a:prstGeom>
-          <a:noFill/>
-        </p:spPr>
-        <p:txBody>
-          <a:bodyPr wrap="square">
-            <a:spAutoFit/>
-          </a:bodyPr>
-          <a:lstStyle/>
-          <a:p>
-            <a:pPr algn="l"/>
-            <a:r>
-              <a:rPr sz="1200" b="0">
-                <a:solidFill>
-                  <a:srgbClr val="E2E8F0"/>
-                </a:solidFill>
-                <a:latin typeface="Calibri"/>
-              </a:rPr>
-              <a:t>Model registry + observability</a:t>
-            </a:r>
-          </a:p>
-        </p:txBody>
-      </p:sp>
-      <p:sp>
-        <p:nvSpPr>
-          <p:cNvPr id="32" name="TextBox 31"/>
-          <p:cNvSpPr txBox="1"/>
-          <p:nvPr/>
-        </p:nvSpPr>
-        <p:spPr>
-          <a:xfrm>
-            <a:off x="9326880" y="4206240"/>
-            <a:ext cx="2286000" cy="365760"/>
-          </a:xfrm>
-          <a:prstGeom prst="rect">
-            <a:avLst/>
-          </a:prstGeom>
-          <a:noFill/>
-        </p:spPr>
-        <p:txBody>
-          <a:bodyPr wrap="square">
-            <a:spAutoFit/>
-          </a:bodyPr>
-          <a:lstStyle/>
-          <a:p>
-            <a:pPr algn="l"/>
-            <a:r>
-              <a:rPr sz="1200" b="1">
-                <a:solidFill>
-                  <a:srgbClr val="02C39A"/>
-                </a:solidFill>
-                <a:latin typeface="Calibri"/>
-              </a:rPr>
-              <a:t>$300/month</a:t>
-            </a:r>
-          </a:p>
-        </p:txBody>
-      </p:sp>
-      <p:sp>
-        <p:nvSpPr>
-          <p:cNvPr id="33" name="Rectangle 32"/>
-          <p:cNvSpPr/>
-          <p:nvPr/>
-        </p:nvSpPr>
-        <p:spPr>
-          <a:xfrm>
-            <a:off x="365760" y="5120640"/>
-            <a:ext cx="11430000" cy="1371600"/>
-          </a:xfrm>
-          <a:prstGeom prst="rect">
-            <a:avLst/>
-          </a:prstGeom>
-          <a:solidFill>
-            <a:srgbClr val="0E6655"/>
-          </a:solidFill>
-          <a:ln w="12700">
-            <a:solidFill>
-              <a:srgbClr val="028090"/>
-            </a:solidFill>
-          </a:ln>
-        </p:spPr>
-        <p:style>
-          <a:lnRef idx="1">
-            <a:schemeClr val="accent1"/>
-          </a:lnRef>
-          <a:fillRef idx="3">
-            <a:schemeClr val="accent1"/>
-          </a:fillRef>
-          <a:effectRef idx="2">
-            <a:schemeClr val="accent1"/>
-          </a:effectRef>
-          <a:fontRef idx="minor">
-            <a:schemeClr val="lt1"/>
-          </a:fontRef>
-        </p:style>
-        <p:txBody>
-          <a:bodyPr rtlCol="0" anchor="ctr"/>
-          <a:lstStyle/>
-          <a:p>
-            <a:pPr algn="ctr"/>
-          </a:p>
-        </p:txBody>
-      </p:sp>
-      <p:sp>
-        <p:nvSpPr>
-          <p:cNvPr id="34" name="TextBox 33"/>
-          <p:cNvSpPr txBox="1"/>
-          <p:nvPr/>
-        </p:nvSpPr>
-        <p:spPr>
-          <a:xfrm>
-            <a:off x="548640" y="5212080"/>
-            <a:ext cx="7315200" cy="457200"/>
-          </a:xfrm>
-          <a:prstGeom prst="rect">
-            <a:avLst/>
-          </a:prstGeom>
-          <a:noFill/>
-        </p:spPr>
-        <p:txBody>
-          <a:bodyPr wrap="square">
-            <a:spAutoFit/>
-          </a:bodyPr>
-          <a:lstStyle/>
-          <a:p>
-            <a:pPr algn="l"/>
-            <a:r>
-              <a:rPr sz="1600" b="1">
-                <a:solidFill>
-                  <a:srgbClr val="FFFFFF"/>
-                </a:solidFill>
-                <a:latin typeface="Calibri"/>
-              </a:rPr>
-              <a:t>Total MVP Cost: ~$5,800/month</a:t>
-            </a:r>
-          </a:p>
-        </p:txBody>
-      </p:sp>
-      <p:sp>
-        <p:nvSpPr>
-          <p:cNvPr id="35" name="TextBox 34"/>
-          <p:cNvSpPr txBox="1"/>
-          <p:nvPr/>
-        </p:nvSpPr>
-        <p:spPr>
-          <a:xfrm>
-            <a:off x="548640" y="5669280"/>
-            <a:ext cx="10972800" cy="640080"/>
-          </a:xfrm>
-          <a:prstGeom prst="rect">
-            <a:avLst/>
-          </a:prstGeom>
-          <a:noFill/>
-        </p:spPr>
-        <p:txBody>
-          <a:bodyPr wrap="square">
-            <a:spAutoFit/>
-          </a:bodyPr>
-          <a:lstStyle/>
-          <a:p>
-            <a:pPr algn="l"/>
-            <a:r>
-              <a:rPr sz="1200" b="0">
-                <a:solidFill>
-                  <a:srgbClr val="E2E8F0"/>
-                </a:solidFill>
-                <a:latin typeface="Calibri"/>
-              </a:rPr>
-              <a:t>ROI: Current manual cost ~$45K/month (30 FTEs x $1,500). SmartPay AP saves ~$39K/month = 650% ROI.</a:t>
+              <a:rPr sz="1100" b="0" i="0">
+                <a:solidFill>
+                  <a:srgbClr val="1A1A2E"/>
+                </a:solidFill>
+                <a:latin typeface="Calibri"/>
+              </a:rPr>
+              <a:t>Only matching features used in training. No vendor identity or payment history in ML model.</a:t>
             </a:r>
           </a:p>
         </p:txBody>
@@ -5559,7 +5017,7 @@
             <a:avLst/>
           </a:prstGeom>
           <a:solidFill>
-            <a:srgbClr val="1E2761"/>
+            <a:srgbClr val="FFFFFF"/>
           </a:solidFill>
           <a:ln>
             <a:noFill/>
@@ -5595,8 +5053,8 @@
         </p:nvSpPr>
         <p:spPr>
           <a:xfrm>
-            <a:off x="548640" y="274320"/>
-            <a:ext cx="10972800" cy="731520"/>
+            <a:off x="548640" y="228600"/>
+            <a:ext cx="10972800" cy="640080"/>
           </a:xfrm>
           <a:prstGeom prst="rect">
             <a:avLst/>
@@ -5604,20 +5062,20 @@
           <a:noFill/>
         </p:spPr>
         <p:txBody>
-          <a:bodyPr wrap="none">
+          <a:bodyPr wrap="square">
             <a:spAutoFit/>
           </a:bodyPr>
           <a:lstStyle/>
           <a:p>
             <a:pPr algn="l"/>
             <a:r>
-              <a:rPr sz="3200" b="1">
-                <a:solidFill>
-                  <a:srgbClr val="FFFFFF"/>
-                </a:solidFill>
-                <a:latin typeface="Calibri"/>
-              </a:rPr>
-              <a:t>Trade-offs &amp; Design Decisions</a:t>
+              <a:rPr sz="2800" b="1" i="0">
+                <a:solidFill>
+                  <a:srgbClr val="1A1A2E"/>
+                </a:solidFill>
+                <a:latin typeface="Calibri"/>
+              </a:rPr>
+              <a:t>Tech Stack — What We Actually Built vs Production</a:t>
             </a:r>
           </a:p>
         </p:txBody>
@@ -5630,14 +5088,14 @@
         </p:nvSpPr>
         <p:spPr>
           <a:xfrm>
-            <a:off x="548640" y="868680"/>
-            <a:ext cx="2286000" cy="45720"/>
+            <a:off x="548640" y="822960"/>
+            <a:ext cx="11064240" cy="36576"/>
           </a:xfrm>
           <a:prstGeom prst="rect">
             <a:avLst/>
           </a:prstGeom>
           <a:solidFill>
-            <a:srgbClr val="028090"/>
+            <a:srgbClr val="2E75B6"/>
           </a:solidFill>
           <a:ln>
             <a:noFill/>
@@ -5673,18 +5131,18 @@
         </p:nvSpPr>
         <p:spPr>
           <a:xfrm>
-            <a:off x="365760" y="1097280"/>
-            <a:ext cx="5486400" cy="2286000"/>
+            <a:off x="457200" y="1188720"/>
+            <a:ext cx="5394960" cy="5029200"/>
           </a:xfrm>
           <a:prstGeom prst="rect">
             <a:avLst/>
           </a:prstGeom>
           <a:solidFill>
-            <a:srgbClr val="36454F"/>
+            <a:srgbClr val="F2F2F2"/>
           </a:solidFill>
           <a:ln w="12700">
             <a:solidFill>
-              <a:srgbClr val="028090"/>
+              <a:srgbClr val="CCCCCC"/>
             </a:solidFill>
           </a:ln>
         </p:spPr>
@@ -5718,8 +5176,8 @@
         </p:nvSpPr>
         <p:spPr>
           <a:xfrm>
-            <a:off x="502920" y="1188720"/>
-            <a:ext cx="5212080" cy="411480"/>
+            <a:off x="594360" y="1234440"/>
+            <a:ext cx="5120640" cy="365760"/>
           </a:xfrm>
           <a:prstGeom prst="rect">
             <a:avLst/>
@@ -5734,13 +5192,13 @@
           <a:p>
             <a:pPr algn="l"/>
             <a:r>
-              <a:rPr sz="1300" b="1">
-                <a:solidFill>
-                  <a:srgbClr val="02C39A"/>
-                </a:solidFill>
-                <a:latin typeface="Calibri"/>
-              </a:rPr>
-              <a:t>LangGraph over CrewAI</a:t>
+              <a:rPr sz="1300" b="1" i="0">
+                <a:solidFill>
+                  <a:srgbClr val="37864F"/>
+                </a:solidFill>
+                <a:latin typeface="Calibri"/>
+              </a:rPr>
+              <a:t>Built &amp; Tested (MVP)</a:t>
             </a:r>
           </a:p>
         </p:txBody>
@@ -5753,8 +5211,8 @@
         </p:nvSpPr>
         <p:spPr>
           <a:xfrm>
-            <a:off x="502920" y="1645919"/>
-            <a:ext cx="5212080" cy="1600200"/>
+            <a:off x="594360" y="1645920"/>
+            <a:ext cx="5120640" cy="4754880"/>
           </a:xfrm>
           <a:prstGeom prst="rect">
             <a:avLst/>
@@ -5767,17 +5225,147 @@
           </a:bodyPr>
           <a:lstStyle/>
           <a:p>
-            <a:pPr algn="l"/>
-            <a:r>
-              <a:rPr sz="1100" b="0">
-                <a:solidFill>
-                  <a:srgbClr val="FFFFFF"/>
-                </a:solidFill>
-                <a:latin typeface="Calibri"/>
-              </a:rPr>
-              <a:t>Chose: LangGraph
-Why: Fixed sequential workflow with deterministic steps. Native HITL support. Auditable graph execution.
-Rejected: CrewAI — better for autonomous multi-agent collaboration, not fixed AP flows.</a:t>
+            <a:pPr>
+              <a:spcBef>
+                <a:spcPts val="300"/>
+              </a:spcBef>
+            </a:pPr>
+            <a:r>
+              <a:rPr sz="1100">
+                <a:solidFill>
+                  <a:srgbClr val="1A1A2E"/>
+                </a:solidFill>
+                <a:latin typeface="Calibri"/>
+              </a:rPr>
+              <a:t>• Python 3.11</a:t>
+            </a:r>
+          </a:p>
+          <a:p>
+            <a:pPr>
+              <a:spcBef>
+                <a:spcPts val="300"/>
+              </a:spcBef>
+            </a:pPr>
+            <a:r>
+              <a:rPr sz="1100">
+                <a:solidFill>
+                  <a:srgbClr val="1A1A2E"/>
+                </a:solidFill>
+                <a:latin typeface="Calibri"/>
+              </a:rPr>
+              <a:t>• pandas 2.2.2 — data manipulation</a:t>
+            </a:r>
+          </a:p>
+          <a:p>
+            <a:pPr>
+              <a:spcBef>
+                <a:spcPts val="300"/>
+              </a:spcBef>
+            </a:pPr>
+            <a:r>
+              <a:rPr sz="1100">
+                <a:solidFill>
+                  <a:srgbClr val="1A1A2E"/>
+                </a:solidFill>
+                <a:latin typeface="Calibri"/>
+              </a:rPr>
+              <a:t>• numpy 1.26.4 — numerical operations</a:t>
+            </a:r>
+          </a:p>
+          <a:p>
+            <a:pPr>
+              <a:spcBef>
+                <a:spcPts val="300"/>
+              </a:spcBef>
+            </a:pPr>
+            <a:r>
+              <a:rPr sz="1100">
+                <a:solidFill>
+                  <a:srgbClr val="1A1A2E"/>
+                </a:solidFill>
+                <a:latin typeface="Calibri"/>
+              </a:rPr>
+              <a:t>• scikit-learn 1.5.0 — Random Forest model</a:t>
+            </a:r>
+          </a:p>
+          <a:p>
+            <a:pPr>
+              <a:spcBef>
+                <a:spcPts val="300"/>
+              </a:spcBef>
+            </a:pPr>
+            <a:r>
+              <a:rPr sz="1100">
+                <a:solidFill>
+                  <a:srgbClr val="1A1A2E"/>
+                </a:solidFill>
+                <a:latin typeface="Calibri"/>
+              </a:rPr>
+              <a:t>• matplotlib 3.10.9 — feature importance chart</a:t>
+            </a:r>
+          </a:p>
+          <a:p>
+            <a:pPr>
+              <a:spcBef>
+                <a:spcPts val="300"/>
+              </a:spcBef>
+            </a:pPr>
+            <a:r>
+              <a:rPr sz="1100">
+                <a:solidFill>
+                  <a:srgbClr val="1A1A2E"/>
+                </a:solidFill>
+                <a:latin typeface="Calibri"/>
+              </a:rPr>
+              <a:t>• LangGraph 0.1.5 — agent workflow</a:t>
+            </a:r>
+          </a:p>
+          <a:p>
+            <a:pPr>
+              <a:spcBef>
+                <a:spcPts val="300"/>
+              </a:spcBef>
+            </a:pPr>
+            <a:r>
+              <a:rPr sz="1100">
+                <a:solidFill>
+                  <a:srgbClr val="1A1A2E"/>
+                </a:solidFill>
+                <a:latin typeface="Calibri"/>
+              </a:rPr>
+              <a:t>• LangChain 0.2.5 — LLM abstraction</a:t>
+            </a:r>
+          </a:p>
+          <a:p>
+            <a:pPr>
+              <a:spcBef>
+                <a:spcPts val="300"/>
+              </a:spcBef>
+            </a:pPr>
+            <a:r>
+              <a:rPr sz="1100">
+                <a:solidFill>
+                  <a:srgbClr val="1A1A2E"/>
+                </a:solidFill>
+                <a:latin typeface="Calibri"/>
+              </a:rPr>
+              <a:t>• OpenAI 1.30.5 — GPT-4 email drafting</a:t>
+            </a:r>
+          </a:p>
+          <a:p>
+            <a:pPr>
+              <a:spcBef>
+                <a:spcPts val="300"/>
+              </a:spcBef>
+            </a:pPr>
+            <a:r>
+              <a:rPr sz="1100">
+                <a:solidFill>
+                  <a:srgbClr val="1A1A2E"/>
+                </a:solidFill>
+                <a:latin typeface="Calibri"/>
+              </a:rPr>
+              <a:t>• Jupyter — D2 notebook</a:t>
             </a:r>
           </a:p>
         </p:txBody>
@@ -5790,18 +5378,18 @@
         </p:nvSpPr>
         <p:spPr>
           <a:xfrm>
-            <a:off x="6309360" y="1097280"/>
-            <a:ext cx="5486400" cy="2286000"/>
+            <a:off x="6126480" y="1188720"/>
+            <a:ext cx="5669280" cy="5029200"/>
           </a:xfrm>
           <a:prstGeom prst="rect">
             <a:avLst/>
           </a:prstGeom>
           <a:solidFill>
-            <a:srgbClr val="36454F"/>
+            <a:srgbClr val="F2F2F2"/>
           </a:solidFill>
           <a:ln w="12700">
             <a:solidFill>
-              <a:srgbClr val="028090"/>
+              <a:srgbClr val="CCCCCC"/>
             </a:solidFill>
           </a:ln>
         </p:spPr>
@@ -5835,8 +5423,8 @@
         </p:nvSpPr>
         <p:spPr>
           <a:xfrm>
-            <a:off x="6446520" y="1188720"/>
-            <a:ext cx="5212080" cy="411480"/>
+            <a:off x="6263640" y="1234440"/>
+            <a:ext cx="5394960" cy="365760"/>
           </a:xfrm>
           <a:prstGeom prst="rect">
             <a:avLst/>
@@ -5851,13 +5439,13 @@
           <a:p>
             <a:pPr algn="l"/>
             <a:r>
-              <a:rPr sz="1300" b="1">
-                <a:solidFill>
-                  <a:srgbClr val="02C39A"/>
-                </a:solidFill>
-                <a:latin typeface="Calibri"/>
-              </a:rPr>
-              <a:t>Rules + ML over pure ML</a:t>
+              <a:rPr sz="1300" b="1" i="0">
+                <a:solidFill>
+                  <a:srgbClr val="2E75B6"/>
+                </a:solidFill>
+                <a:latin typeface="Calibri"/>
+              </a:rPr>
+              <a:t>Production Architecture</a:t>
             </a:r>
           </a:p>
         </p:txBody>
@@ -5870,8 +5458,8 @@
         </p:nvSpPr>
         <p:spPr>
           <a:xfrm>
-            <a:off x="6446520" y="1645919"/>
-            <a:ext cx="5212080" cy="1600200"/>
+            <a:off x="6263640" y="1645920"/>
+            <a:ext cx="5394960" cy="4754880"/>
           </a:xfrm>
           <a:prstGeom prst="rect">
             <a:avLst/>
@@ -5884,42 +5472,204 @@
           </a:bodyPr>
           <a:lstStyle/>
           <a:p>
-            <a:pPr algn="l"/>
-            <a:r>
-              <a:rPr sz="1100" b="0">
-                <a:solidFill>
-                  <a:srgbClr val="FFFFFF"/>
-                </a:solidFill>
-                <a:latin typeface="Calibri"/>
-              </a:rPr>
-              <a:t>Chose: Hybrid rule + Random Forest
-Why: Rules are explainable (auditors require this). ML catches subtle patterns rules miss.
-Rejected: Neural networks — black box, hard to audit, overkill for tabular data.</a:t>
-            </a:r>
-          </a:p>
-        </p:txBody>
-      </p:sp>
-      <p:sp>
-        <p:nvSpPr>
-          <p:cNvPr id="11" name="Rectangle 10"/>
+            <a:pPr>
+              <a:spcBef>
+                <a:spcPts val="300"/>
+              </a:spcBef>
+            </a:pPr>
+            <a:r>
+              <a:rPr sz="1100">
+                <a:solidFill>
+                  <a:srgbClr val="1A1A2E"/>
+                </a:solidFill>
+                <a:latin typeface="Calibri"/>
+              </a:rPr>
+              <a:t>• Azure Form Recognizer — PDF extraction</a:t>
+            </a:r>
+          </a:p>
+          <a:p>
+            <a:pPr>
+              <a:spcBef>
+                <a:spcPts val="300"/>
+              </a:spcBef>
+            </a:pPr>
+            <a:r>
+              <a:rPr sz="1100">
+                <a:solidFill>
+                  <a:srgbClr val="1A1A2E"/>
+                </a:solidFill>
+                <a:latin typeface="Calibri"/>
+              </a:rPr>
+              <a:t>• Azure Event Hubs — Kafka-compatible streaming</a:t>
+            </a:r>
+          </a:p>
+          <a:p>
+            <a:pPr>
+              <a:spcBef>
+                <a:spcPts val="300"/>
+              </a:spcBef>
+            </a:pPr>
+            <a:r>
+              <a:rPr sz="1100">
+                <a:solidFill>
+                  <a:srgbClr val="1A1A2E"/>
+                </a:solidFill>
+                <a:latin typeface="Calibri"/>
+              </a:rPr>
+              <a:t>• Azure API Management — gateway + auth</a:t>
+            </a:r>
+          </a:p>
+          <a:p>
+            <a:pPr>
+              <a:spcBef>
+                <a:spcPts val="300"/>
+              </a:spcBef>
+            </a:pPr>
+            <a:r>
+              <a:rPr sz="1100">
+                <a:solidFill>
+                  <a:srgbClr val="1A1A2E"/>
+                </a:solidFill>
+                <a:latin typeface="Calibri"/>
+              </a:rPr>
+              <a:t>• Azure AD — RBAC access control</a:t>
+            </a:r>
+          </a:p>
+          <a:p>
+            <a:pPr>
+              <a:spcBef>
+                <a:spcPts val="300"/>
+              </a:spcBef>
+            </a:pPr>
+            <a:r>
+              <a:rPr sz="1100">
+                <a:solidFill>
+                  <a:srgbClr val="1A1A2E"/>
+                </a:solidFill>
+                <a:latin typeface="Calibri"/>
+              </a:rPr>
+              <a:t>• Azure Container Apps — agent hosting</a:t>
+            </a:r>
+          </a:p>
+          <a:p>
+            <a:pPr>
+              <a:spcBef>
+                <a:spcPts val="300"/>
+              </a:spcBef>
+            </a:pPr>
+            <a:r>
+              <a:rPr sz="1100">
+                <a:solidFill>
+                  <a:srgbClr val="1A1A2E"/>
+                </a:solidFill>
+                <a:latin typeface="Calibri"/>
+              </a:rPr>
+              <a:t>• Azure Key Vault — secrets</a:t>
+            </a:r>
+          </a:p>
+          <a:p>
+            <a:pPr>
+              <a:spcBef>
+                <a:spcPts val="300"/>
+              </a:spcBef>
+            </a:pPr>
+            <a:r>
+              <a:rPr sz="1100">
+                <a:solidFill>
+                  <a:srgbClr val="1A1A2E"/>
+                </a:solidFill>
+                <a:latin typeface="Calibri"/>
+              </a:rPr>
+              <a:t>• AWS S3 — immutable audit logs</a:t>
+            </a:r>
+          </a:p>
+          <a:p>
+            <a:pPr>
+              <a:spcBef>
+                <a:spcPts val="300"/>
+              </a:spcBef>
+            </a:pPr>
+            <a:r>
+              <a:rPr sz="1100">
+                <a:solidFill>
+                  <a:srgbClr val="1A1A2E"/>
+                </a:solidFill>
+                <a:latin typeface="Calibri"/>
+              </a:rPr>
+              <a:t>• Amazon SageMaker — ML training at scale</a:t>
+            </a:r>
+          </a:p>
+          <a:p>
+            <a:pPr>
+              <a:spcBef>
+                <a:spcPts val="300"/>
+              </a:spcBef>
+            </a:pPr>
+            <a:r>
+              <a:rPr sz="1100">
+                <a:solidFill>
+                  <a:srgbClr val="1A1A2E"/>
+                </a:solidFill>
+                <a:latin typeface="Calibri"/>
+              </a:rPr>
+              <a:t>• MCP Protocol — SAP/Oracle connectivity</a:t>
+            </a:r>
+          </a:p>
+          <a:p>
+            <a:pPr>
+              <a:spcBef>
+                <a:spcPts val="300"/>
+              </a:spcBef>
+            </a:pPr>
+            <a:r>
+              <a:rPr sz="1100">
+                <a:solidFill>
+                  <a:srgbClr val="1A1A2E"/>
+                </a:solidFill>
+                <a:latin typeface="Calibri"/>
+              </a:rPr>
+              <a:t>• MLflow — model registry + monitoring</a:t>
+            </a:r>
+          </a:p>
+        </p:txBody>
+      </p:sp>
+    </p:spTree>
+  </p:cSld>
+  <p:clrMapOvr>
+    <a:masterClrMapping/>
+  </p:clrMapOvr>
+</p:sld>
+</file>
+
+<file path=ppt/slides/slide13.xml><?xml version="1.0" encoding="utf-8"?>
+<p:sld xmlns:a="http://schemas.openxmlformats.org/drawingml/2006/main" xmlns:p="http://schemas.openxmlformats.org/presentationml/2006/main" xmlns:r="http://schemas.openxmlformats.org/officeDocument/2006/relationships">
+  <p:cSld>
+    <p:spTree>
+      <p:nvGrpSpPr>
+        <p:cNvPr id="1" name=""/>
+        <p:cNvGrpSpPr/>
+        <p:nvPr/>
+      </p:nvGrpSpPr>
+      <p:grpSpPr/>
+      <p:sp>
+        <p:nvSpPr>
+          <p:cNvPr id="2" name="Rectangle 1"/>
           <p:cNvSpPr/>
           <p:nvPr/>
         </p:nvSpPr>
         <p:spPr>
           <a:xfrm>
-            <a:off x="365760" y="3657600"/>
-            <a:ext cx="5486400" cy="2286000"/>
+            <a:off x="0" y="0"/>
+            <a:ext cx="12188952" cy="6858000"/>
           </a:xfrm>
           <a:prstGeom prst="rect">
             <a:avLst/>
           </a:prstGeom>
           <a:solidFill>
-            <a:srgbClr val="36454F"/>
+            <a:srgbClr val="FFFFFF"/>
           </a:solidFill>
-          <a:ln w="12700">
-            <a:solidFill>
-              <a:srgbClr val="028090"/>
-            </a:solidFill>
+          <a:ln>
+            <a:noFill/>
           </a:ln>
         </p:spPr>
         <p:style>
@@ -5946,14 +5696,14 @@
       </p:sp>
       <p:sp>
         <p:nvSpPr>
-          <p:cNvPr id="12" name="TextBox 11"/>
+          <p:cNvPr id="3" name="TextBox 2"/>
           <p:cNvSpPr txBox="1"/>
           <p:nvPr/>
         </p:nvSpPr>
         <p:spPr>
           <a:xfrm>
-            <a:off x="502920" y="3749039"/>
-            <a:ext cx="5212080" cy="411480"/>
+            <a:off x="548640" y="228600"/>
+            <a:ext cx="10972800" cy="640080"/>
           </a:xfrm>
           <a:prstGeom prst="rect">
             <a:avLst/>
@@ -5968,75 +5718,36 @@
           <a:p>
             <a:pPr algn="l"/>
             <a:r>
-              <a:rPr sz="1300" b="1">
-                <a:solidFill>
-                  <a:srgbClr val="02C39A"/>
-                </a:solidFill>
-                <a:latin typeface="Calibri"/>
-              </a:rPr>
-              <a:t>RAG over Fine-tuning</a:t>
-            </a:r>
-          </a:p>
-        </p:txBody>
-      </p:sp>
-      <p:sp>
-        <p:nvSpPr>
-          <p:cNvPr id="13" name="TextBox 12"/>
-          <p:cNvSpPr txBox="1"/>
-          <p:nvPr/>
-        </p:nvSpPr>
-        <p:spPr>
-          <a:xfrm>
-            <a:off x="502920" y="4206240"/>
-            <a:ext cx="5212080" cy="1600200"/>
-          </a:xfrm>
-          <a:prstGeom prst="rect">
-            <a:avLst/>
-          </a:prstGeom>
-          <a:noFill/>
-        </p:spPr>
-        <p:txBody>
-          <a:bodyPr wrap="square">
-            <a:spAutoFit/>
-          </a:bodyPr>
-          <a:lstStyle/>
-          <a:p>
-            <a:pPr algn="l"/>
-            <a:r>
-              <a:rPr sz="1100" b="0">
-                <a:solidFill>
-                  <a:srgbClr val="FFFFFF"/>
-                </a:solidFill>
-                <a:latin typeface="Calibri"/>
-              </a:rPr>
-              <a:t>Chose: RAG with Azure AI Search
-Why: Vendor contracts change frequently. RAG retrieves latest data without retraining.
-Rejected: Fine-tuning — expensive, stale after contract updates, hard to audit.</a:t>
-            </a:r>
-          </a:p>
-        </p:txBody>
-      </p:sp>
-      <p:sp>
-        <p:nvSpPr>
-          <p:cNvPr id="14" name="Rectangle 13"/>
+              <a:rPr sz="2800" b="1" i="0">
+                <a:solidFill>
+                  <a:srgbClr val="1A1A2E"/>
+                </a:solidFill>
+                <a:latin typeface="Calibri"/>
+              </a:rPr>
+              <a:t>Trade-offs &amp; Design Decisions</a:t>
+            </a:r>
+          </a:p>
+        </p:txBody>
+      </p:sp>
+      <p:sp>
+        <p:nvSpPr>
+          <p:cNvPr id="4" name="Rectangle 3"/>
           <p:cNvSpPr/>
           <p:nvPr/>
         </p:nvSpPr>
         <p:spPr>
           <a:xfrm>
-            <a:off x="6309360" y="3657600"/>
-            <a:ext cx="5486400" cy="2286000"/>
+            <a:off x="548640" y="822960"/>
+            <a:ext cx="11064240" cy="36576"/>
           </a:xfrm>
           <a:prstGeom prst="rect">
             <a:avLst/>
           </a:prstGeom>
           <a:solidFill>
-            <a:srgbClr val="36454F"/>
+            <a:srgbClr val="2E75B6"/>
           </a:solidFill>
-          <a:ln w="12700">
-            <a:solidFill>
-              <a:srgbClr val="028090"/>
-            </a:solidFill>
+          <a:ln>
+            <a:noFill/>
           </a:ln>
         </p:spPr>
         <p:style>
@@ -6063,13 +5774,58 @@
       </p:sp>
       <p:sp>
         <p:nvSpPr>
-          <p:cNvPr id="15" name="TextBox 14"/>
+          <p:cNvPr id="5" name="Rectangle 4"/>
+          <p:cNvSpPr/>
+          <p:nvPr/>
+        </p:nvSpPr>
+        <p:spPr>
+          <a:xfrm>
+            <a:off x="457200" y="1188720"/>
+            <a:ext cx="5486400" cy="2286000"/>
+          </a:xfrm>
+          <a:prstGeom prst="rect">
+            <a:avLst/>
+          </a:prstGeom>
+          <a:solidFill>
+            <a:srgbClr val="F2F2F2"/>
+          </a:solidFill>
+          <a:ln w="12700">
+            <a:solidFill>
+              <a:srgbClr val="CCCCCC"/>
+            </a:solidFill>
+          </a:ln>
+        </p:spPr>
+        <p:style>
+          <a:lnRef idx="1">
+            <a:schemeClr val="accent1"/>
+          </a:lnRef>
+          <a:fillRef idx="3">
+            <a:schemeClr val="accent1"/>
+          </a:fillRef>
+          <a:effectRef idx="2">
+            <a:schemeClr val="accent1"/>
+          </a:effectRef>
+          <a:fontRef idx="minor">
+            <a:schemeClr val="lt1"/>
+          </a:fontRef>
+        </p:style>
+        <p:txBody>
+          <a:bodyPr rtlCol="0" anchor="ctr"/>
+          <a:lstStyle/>
+          <a:p>
+            <a:pPr algn="ctr"/>
+          </a:p>
+        </p:txBody>
+      </p:sp>
+      <p:sp>
+        <p:nvSpPr>
+          <p:cNvPr id="6" name="TextBox 5"/>
           <p:cNvSpPr txBox="1"/>
           <p:nvPr/>
         </p:nvSpPr>
         <p:spPr>
           <a:xfrm>
-            <a:off x="6446520" y="3749039"/>
+            <a:off x="594360" y="1280160"/>
             <a:ext cx="5212080" cy="411480"/>
           </a:xfrm>
           <a:prstGeom prst="rect">
@@ -6085,27 +5841,27 @@
           <a:p>
             <a:pPr algn="l"/>
             <a:r>
-              <a:rPr sz="1300" b="1">
-                <a:solidFill>
-                  <a:srgbClr val="02C39A"/>
-                </a:solidFill>
-                <a:latin typeface="Calibri"/>
-              </a:rPr>
-              <a:t>100% Precision over Recall</a:t>
-            </a:r>
-          </a:p>
-        </p:txBody>
-      </p:sp>
-      <p:sp>
-        <p:nvSpPr>
-          <p:cNvPr id="16" name="TextBox 15"/>
+              <a:rPr sz="1300" b="1" i="0">
+                <a:solidFill>
+                  <a:srgbClr val="2E75B6"/>
+                </a:solidFill>
+                <a:latin typeface="Calibri"/>
+              </a:rPr>
+              <a:t>LangGraph over CrewAI</a:t>
+            </a:r>
+          </a:p>
+        </p:txBody>
+      </p:sp>
+      <p:sp>
+        <p:nvSpPr>
+          <p:cNvPr id="7" name="TextBox 6"/>
           <p:cNvSpPr txBox="1"/>
           <p:nvPr/>
         </p:nvSpPr>
         <p:spPr>
           <a:xfrm>
-            <a:off x="6446520" y="4206240"/>
-            <a:ext cx="5212080" cy="1600200"/>
+            <a:off x="594360" y="1783080"/>
+            <a:ext cx="5212080" cy="1554480"/>
           </a:xfrm>
           <a:prstGeom prst="rect">
             <a:avLst/>
@@ -6120,15 +5876,358 @@
           <a:p>
             <a:pPr algn="l"/>
             <a:r>
-              <a:rPr sz="1100" b="0">
-                <a:solidFill>
-                  <a:srgbClr val="FFFFFF"/>
-                </a:solidFill>
-                <a:latin typeface="Calibri"/>
-              </a:rPr>
-              <a:t>Chose: Optimise for precision
-Why: False positives (blocking good invoices) damage supplier relationships. False negatives (missed fraud) caught in audit.
-Trade-off: 57% recall — 43% of mismatches require audit catch.</a:t>
+              <a:rPr sz="1100" b="0" i="0">
+                <a:solidFill>
+                  <a:srgbClr val="1A1A2E"/>
+                </a:solidFill>
+                <a:latin typeface="Calibri"/>
+              </a:rPr>
+              <a:t>AP reconciliation is a fixed sequential workflow. LangGraph gives deterministic control and native HITL. CrewAI suits autonomous multi-agent tasks — not this use case.</a:t>
+            </a:r>
+          </a:p>
+        </p:txBody>
+      </p:sp>
+      <p:sp>
+        <p:nvSpPr>
+          <p:cNvPr id="8" name="Rectangle 7"/>
+          <p:cNvSpPr/>
+          <p:nvPr/>
+        </p:nvSpPr>
+        <p:spPr>
+          <a:xfrm>
+            <a:off x="6400800" y="1188720"/>
+            <a:ext cx="5486400" cy="2286000"/>
+          </a:xfrm>
+          <a:prstGeom prst="rect">
+            <a:avLst/>
+          </a:prstGeom>
+          <a:solidFill>
+            <a:srgbClr val="F2F2F2"/>
+          </a:solidFill>
+          <a:ln w="12700">
+            <a:solidFill>
+              <a:srgbClr val="CCCCCC"/>
+            </a:solidFill>
+          </a:ln>
+        </p:spPr>
+        <p:style>
+          <a:lnRef idx="1">
+            <a:schemeClr val="accent1"/>
+          </a:lnRef>
+          <a:fillRef idx="3">
+            <a:schemeClr val="accent1"/>
+          </a:fillRef>
+          <a:effectRef idx="2">
+            <a:schemeClr val="accent1"/>
+          </a:effectRef>
+          <a:fontRef idx="minor">
+            <a:schemeClr val="lt1"/>
+          </a:fontRef>
+        </p:style>
+        <p:txBody>
+          <a:bodyPr rtlCol="0" anchor="ctr"/>
+          <a:lstStyle/>
+          <a:p>
+            <a:pPr algn="ctr"/>
+          </a:p>
+        </p:txBody>
+      </p:sp>
+      <p:sp>
+        <p:nvSpPr>
+          <p:cNvPr id="9" name="TextBox 8"/>
+          <p:cNvSpPr txBox="1"/>
+          <p:nvPr/>
+        </p:nvSpPr>
+        <p:spPr>
+          <a:xfrm>
+            <a:off x="6537960" y="1280160"/>
+            <a:ext cx="5212080" cy="411480"/>
+          </a:xfrm>
+          <a:prstGeom prst="rect">
+            <a:avLst/>
+          </a:prstGeom>
+          <a:noFill/>
+        </p:spPr>
+        <p:txBody>
+          <a:bodyPr wrap="square">
+            <a:spAutoFit/>
+          </a:bodyPr>
+          <a:lstStyle/>
+          <a:p>
+            <a:pPr algn="l"/>
+            <a:r>
+              <a:rPr sz="1300" b="1" i="0">
+                <a:solidFill>
+                  <a:srgbClr val="2E75B6"/>
+                </a:solidFill>
+                <a:latin typeface="Calibri"/>
+              </a:rPr>
+              <a:t>Rules + Random Forest over Neural Networks</a:t>
+            </a:r>
+          </a:p>
+        </p:txBody>
+      </p:sp>
+      <p:sp>
+        <p:nvSpPr>
+          <p:cNvPr id="10" name="TextBox 9"/>
+          <p:cNvSpPr txBox="1"/>
+          <p:nvPr/>
+        </p:nvSpPr>
+        <p:spPr>
+          <a:xfrm>
+            <a:off x="6537960" y="1783080"/>
+            <a:ext cx="5212080" cy="1554480"/>
+          </a:xfrm>
+          <a:prstGeom prst="rect">
+            <a:avLst/>
+          </a:prstGeom>
+          <a:noFill/>
+        </p:spPr>
+        <p:txBody>
+          <a:bodyPr wrap="square">
+            <a:spAutoFit/>
+          </a:bodyPr>
+          <a:lstStyle/>
+          <a:p>
+            <a:pPr algn="l"/>
+            <a:r>
+              <a:rPr sz="1100" b="0" i="0">
+                <a:solidFill>
+                  <a:srgbClr val="1A1A2E"/>
+                </a:solidFill>
+                <a:latin typeface="Calibri"/>
+              </a:rPr>
+              <a:t>Rules are explainable — auditors need clear reasons for every flag. RF catches subtle patterns rules miss. Neural nets are black-box and overkill for tabular AP data.</a:t>
+            </a:r>
+          </a:p>
+        </p:txBody>
+      </p:sp>
+      <p:sp>
+        <p:nvSpPr>
+          <p:cNvPr id="11" name="Rectangle 10"/>
+          <p:cNvSpPr/>
+          <p:nvPr/>
+        </p:nvSpPr>
+        <p:spPr>
+          <a:xfrm>
+            <a:off x="457200" y="3657600"/>
+            <a:ext cx="5486400" cy="2286000"/>
+          </a:xfrm>
+          <a:prstGeom prst="rect">
+            <a:avLst/>
+          </a:prstGeom>
+          <a:solidFill>
+            <a:srgbClr val="F2F2F2"/>
+          </a:solidFill>
+          <a:ln w="12700">
+            <a:solidFill>
+              <a:srgbClr val="CCCCCC"/>
+            </a:solidFill>
+          </a:ln>
+        </p:spPr>
+        <p:style>
+          <a:lnRef idx="1">
+            <a:schemeClr val="accent1"/>
+          </a:lnRef>
+          <a:fillRef idx="3">
+            <a:schemeClr val="accent1"/>
+          </a:fillRef>
+          <a:effectRef idx="2">
+            <a:schemeClr val="accent1"/>
+          </a:effectRef>
+          <a:fontRef idx="minor">
+            <a:schemeClr val="lt1"/>
+          </a:fontRef>
+        </p:style>
+        <p:txBody>
+          <a:bodyPr rtlCol="0" anchor="ctr"/>
+          <a:lstStyle/>
+          <a:p>
+            <a:pPr algn="ctr"/>
+          </a:p>
+        </p:txBody>
+      </p:sp>
+      <p:sp>
+        <p:nvSpPr>
+          <p:cNvPr id="12" name="TextBox 11"/>
+          <p:cNvSpPr txBox="1"/>
+          <p:nvPr/>
+        </p:nvSpPr>
+        <p:spPr>
+          <a:xfrm>
+            <a:off x="594360" y="3749039"/>
+            <a:ext cx="5212080" cy="411480"/>
+          </a:xfrm>
+          <a:prstGeom prst="rect">
+            <a:avLst/>
+          </a:prstGeom>
+          <a:noFill/>
+        </p:spPr>
+        <p:txBody>
+          <a:bodyPr wrap="square">
+            <a:spAutoFit/>
+          </a:bodyPr>
+          <a:lstStyle/>
+          <a:p>
+            <a:pPr algn="l"/>
+            <a:r>
+              <a:rPr sz="1300" b="1" i="0">
+                <a:solidFill>
+                  <a:srgbClr val="2E75B6"/>
+                </a:solidFill>
+                <a:latin typeface="Calibri"/>
+              </a:rPr>
+              <a:t>RAG over Fine-tuning</a:t>
+            </a:r>
+          </a:p>
+        </p:txBody>
+      </p:sp>
+      <p:sp>
+        <p:nvSpPr>
+          <p:cNvPr id="13" name="TextBox 12"/>
+          <p:cNvSpPr txBox="1"/>
+          <p:nvPr/>
+        </p:nvSpPr>
+        <p:spPr>
+          <a:xfrm>
+            <a:off x="594360" y="4251960"/>
+            <a:ext cx="5212080" cy="1554480"/>
+          </a:xfrm>
+          <a:prstGeom prst="rect">
+            <a:avLst/>
+          </a:prstGeom>
+          <a:noFill/>
+        </p:spPr>
+        <p:txBody>
+          <a:bodyPr wrap="square">
+            <a:spAutoFit/>
+          </a:bodyPr>
+          <a:lstStyle/>
+          <a:p>
+            <a:pPr algn="l"/>
+            <a:r>
+              <a:rPr sz="1100" b="0" i="0">
+                <a:solidFill>
+                  <a:srgbClr val="1A1A2E"/>
+                </a:solidFill>
+                <a:latin typeface="Calibri"/>
+              </a:rPr>
+              <a:t>Vendor contracts change frequently. RAG retrieves latest data without retraining. Fine-tuning becomes stale after every contract update.</a:t>
+            </a:r>
+          </a:p>
+        </p:txBody>
+      </p:sp>
+      <p:sp>
+        <p:nvSpPr>
+          <p:cNvPr id="14" name="Rectangle 13"/>
+          <p:cNvSpPr/>
+          <p:nvPr/>
+        </p:nvSpPr>
+        <p:spPr>
+          <a:xfrm>
+            <a:off x="6400800" y="3657600"/>
+            <a:ext cx="5486400" cy="2286000"/>
+          </a:xfrm>
+          <a:prstGeom prst="rect">
+            <a:avLst/>
+          </a:prstGeom>
+          <a:solidFill>
+            <a:srgbClr val="F2F2F2"/>
+          </a:solidFill>
+          <a:ln w="12700">
+            <a:solidFill>
+              <a:srgbClr val="CCCCCC"/>
+            </a:solidFill>
+          </a:ln>
+        </p:spPr>
+        <p:style>
+          <a:lnRef idx="1">
+            <a:schemeClr val="accent1"/>
+          </a:lnRef>
+          <a:fillRef idx="3">
+            <a:schemeClr val="accent1"/>
+          </a:fillRef>
+          <a:effectRef idx="2">
+            <a:schemeClr val="accent1"/>
+          </a:effectRef>
+          <a:fontRef idx="minor">
+            <a:schemeClr val="lt1"/>
+          </a:fontRef>
+        </p:style>
+        <p:txBody>
+          <a:bodyPr rtlCol="0" anchor="ctr"/>
+          <a:lstStyle/>
+          <a:p>
+            <a:pPr algn="ctr"/>
+          </a:p>
+        </p:txBody>
+      </p:sp>
+      <p:sp>
+        <p:nvSpPr>
+          <p:cNvPr id="15" name="TextBox 14"/>
+          <p:cNvSpPr txBox="1"/>
+          <p:nvPr/>
+        </p:nvSpPr>
+        <p:spPr>
+          <a:xfrm>
+            <a:off x="6537960" y="3749039"/>
+            <a:ext cx="5212080" cy="411480"/>
+          </a:xfrm>
+          <a:prstGeom prst="rect">
+            <a:avLst/>
+          </a:prstGeom>
+          <a:noFill/>
+        </p:spPr>
+        <p:txBody>
+          <a:bodyPr wrap="square">
+            <a:spAutoFit/>
+          </a:bodyPr>
+          <a:lstStyle/>
+          <a:p>
+            <a:pPr algn="l"/>
+            <a:r>
+              <a:rPr sz="1300" b="1" i="0">
+                <a:solidFill>
+                  <a:srgbClr val="2E75B6"/>
+                </a:solidFill>
+                <a:latin typeface="Calibri"/>
+              </a:rPr>
+              <a:t>MCP over Custom Connectors</a:t>
+            </a:r>
+          </a:p>
+        </p:txBody>
+      </p:sp>
+      <p:sp>
+        <p:nvSpPr>
+          <p:cNvPr id="16" name="TextBox 15"/>
+          <p:cNvSpPr txBox="1"/>
+          <p:nvPr/>
+        </p:nvSpPr>
+        <p:spPr>
+          <a:xfrm>
+            <a:off x="6537960" y="4251960"/>
+            <a:ext cx="5212080" cy="1554480"/>
+          </a:xfrm>
+          <a:prstGeom prst="rect">
+            <a:avLst/>
+          </a:prstGeom>
+          <a:noFill/>
+        </p:spPr>
+        <p:txBody>
+          <a:bodyPr wrap="square">
+            <a:spAutoFit/>
+          </a:bodyPr>
+          <a:lstStyle/>
+          <a:p>
+            <a:pPr algn="l"/>
+            <a:r>
+              <a:rPr sz="1100" b="0" i="0">
+                <a:solidFill>
+                  <a:srgbClr val="1A1A2E"/>
+                </a:solidFill>
+                <a:latin typeface="Calibri"/>
+              </a:rPr>
+              <a:t>MCP gives standardised connectivity to SAP, Oracle, and Azure. Adding a new system = deploy new MCP server. No agent code changes needed.</a:t>
             </a:r>
           </a:p>
         </p:txBody>
@@ -6166,7 +6265,7 @@
             <a:avLst/>
           </a:prstGeom>
           <a:solidFill>
-            <a:srgbClr val="1E2761"/>
+            <a:srgbClr val="FFFFFF"/>
           </a:solidFill>
           <a:ln>
             <a:noFill/>
@@ -6202,8 +6301,8 @@
         </p:nvSpPr>
         <p:spPr>
           <a:xfrm>
-            <a:off x="548640" y="274320"/>
-            <a:ext cx="10972800" cy="731520"/>
+            <a:off x="548640" y="228600"/>
+            <a:ext cx="10972800" cy="640080"/>
           </a:xfrm>
           <a:prstGeom prst="rect">
             <a:avLst/>
@@ -6211,20 +6310,20 @@
           <a:noFill/>
         </p:spPr>
         <p:txBody>
-          <a:bodyPr wrap="none">
+          <a:bodyPr wrap="square">
             <a:spAutoFit/>
           </a:bodyPr>
           <a:lstStyle/>
           <a:p>
             <a:pPr algn="l"/>
             <a:r>
-              <a:rPr sz="3200" b="1">
-                <a:solidFill>
-                  <a:srgbClr val="FFFFFF"/>
-                </a:solidFill>
-                <a:latin typeface="Calibri"/>
-              </a:rPr>
-              <a:t>The Problem We're Solving</a:t>
+              <a:rPr sz="2800" b="1" i="0">
+                <a:solidFill>
+                  <a:srgbClr val="1A1A2E"/>
+                </a:solidFill>
+                <a:latin typeface="Calibri"/>
+              </a:rPr>
+              <a:t>The Business Problem</a:t>
             </a:r>
           </a:p>
         </p:txBody>
@@ -6237,14 +6336,14 @@
         </p:nvSpPr>
         <p:spPr>
           <a:xfrm>
-            <a:off x="548640" y="868680"/>
-            <a:ext cx="2286000" cy="45720"/>
+            <a:off x="548640" y="822960"/>
+            <a:ext cx="11064240" cy="36576"/>
           </a:xfrm>
           <a:prstGeom prst="rect">
             <a:avLst/>
           </a:prstGeom>
           <a:solidFill>
-            <a:srgbClr val="028090"/>
+            <a:srgbClr val="2E75B6"/>
           </a:solidFill>
           <a:ln>
             <a:noFill/>
@@ -6274,24 +6373,59 @@
       </p:sp>
       <p:sp>
         <p:nvSpPr>
-          <p:cNvPr id="5" name="Rectangle 4"/>
+          <p:cNvPr id="5" name="TextBox 4"/>
+          <p:cNvSpPr txBox="1"/>
+          <p:nvPr/>
+        </p:nvSpPr>
+        <p:spPr>
+          <a:xfrm>
+            <a:off x="548640" y="868680"/>
+            <a:ext cx="10972800" cy="365760"/>
+          </a:xfrm>
+          <a:prstGeom prst="rect">
+            <a:avLst/>
+          </a:prstGeom>
+          <a:noFill/>
+        </p:spPr>
+        <p:txBody>
+          <a:bodyPr wrap="square">
+            <a:spAutoFit/>
+          </a:bodyPr>
+          <a:lstStyle/>
+          <a:p>
+            <a:pPr algn="l"/>
+            <a:r>
+              <a:rPr sz="1200" b="0" i="1">
+                <a:solidFill>
+                  <a:srgbClr val="595959"/>
+                </a:solidFill>
+                <a:latin typeface="Calibri"/>
+              </a:rPr>
+              <a:t>Acme processes 1M invoices/month manually — it doesn't scale</a:t>
+            </a:r>
+          </a:p>
+        </p:txBody>
+      </p:sp>
+      <p:sp>
+        <p:nvSpPr>
+          <p:cNvPr id="6" name="Rectangle 5"/>
           <p:cNvSpPr/>
           <p:nvPr/>
         </p:nvSpPr>
         <p:spPr>
           <a:xfrm>
-            <a:off x="365760" y="1188720"/>
+            <a:off x="457200" y="1188720"/>
             <a:ext cx="2560320" cy="1280160"/>
           </a:xfrm>
           <a:prstGeom prst="rect">
             <a:avLst/>
           </a:prstGeom>
           <a:solidFill>
-            <a:srgbClr val="36454F"/>
+            <a:srgbClr val="DDEBF7"/>
           </a:solidFill>
           <a:ln w="12700">
             <a:solidFill>
-              <a:srgbClr val="028090"/>
+              <a:srgbClr val="CCCCCC"/>
             </a:solidFill>
           </a:ln>
         </p:spPr>
@@ -6319,14 +6453,14 @@
       </p:sp>
       <p:sp>
         <p:nvSpPr>
-          <p:cNvPr id="6" name="TextBox 5"/>
+          <p:cNvPr id="7" name="TextBox 6"/>
           <p:cNvSpPr txBox="1"/>
           <p:nvPr/>
         </p:nvSpPr>
         <p:spPr>
           <a:xfrm>
-            <a:off x="457200" y="1280160"/>
-            <a:ext cx="2377440" cy="640080"/>
+            <a:off x="548640" y="1280160"/>
+            <a:ext cx="2377440" cy="594360"/>
           </a:xfrm>
           <a:prstGeom prst="rect">
             <a:avLst/>
@@ -6341,9 +6475,9 @@
           <a:p>
             <a:pPr algn="ctr"/>
             <a:r>
-              <a:rPr sz="2800" b="1">
-                <a:solidFill>
-                  <a:srgbClr val="02C39A"/>
+              <a:rPr sz="2800" b="1" i="0">
+                <a:solidFill>
+                  <a:srgbClr val="2E75B6"/>
                 </a:solidFill>
                 <a:latin typeface="Calibri"/>
               </a:rPr>
@@ -6354,14 +6488,14 @@
       </p:sp>
       <p:sp>
         <p:nvSpPr>
-          <p:cNvPr id="7" name="TextBox 6"/>
+          <p:cNvPr id="8" name="TextBox 7"/>
           <p:cNvSpPr txBox="1"/>
           <p:nvPr/>
         </p:nvSpPr>
         <p:spPr>
           <a:xfrm>
-            <a:off x="457200" y="1874519"/>
-            <a:ext cx="2377440" cy="457200"/>
+            <a:off x="548640" y="1874519"/>
+            <a:ext cx="2377440" cy="411480"/>
           </a:xfrm>
           <a:prstGeom prst="rect">
             <a:avLst/>
@@ -6376,37 +6510,37 @@
           <a:p>
             <a:pPr algn="ctr"/>
             <a:r>
-              <a:rPr sz="1100" b="0">
-                <a:solidFill>
-                  <a:srgbClr val="E2E8F0"/>
-                </a:solidFill>
-                <a:latin typeface="Calibri"/>
-              </a:rPr>
-              <a:t>Invoices per month</a:t>
-            </a:r>
-          </a:p>
-        </p:txBody>
-      </p:sp>
-      <p:sp>
-        <p:nvSpPr>
-          <p:cNvPr id="8" name="Rectangle 7"/>
+              <a:rPr sz="1100" b="0" i="0">
+                <a:solidFill>
+                  <a:srgbClr val="595959"/>
+                </a:solidFill>
+                <a:latin typeface="Calibri"/>
+              </a:rPr>
+              <a:t>invoices / month</a:t>
+            </a:r>
+          </a:p>
+        </p:txBody>
+      </p:sp>
+      <p:sp>
+        <p:nvSpPr>
+          <p:cNvPr id="9" name="Rectangle 8"/>
           <p:cNvSpPr/>
           <p:nvPr/>
         </p:nvSpPr>
         <p:spPr>
           <a:xfrm>
-            <a:off x="3108960" y="1188720"/>
+            <a:off x="3291840" y="1188720"/>
             <a:ext cx="2560320" cy="1280160"/>
           </a:xfrm>
           <a:prstGeom prst="rect">
             <a:avLst/>
           </a:prstGeom>
           <a:solidFill>
-            <a:srgbClr val="36454F"/>
+            <a:srgbClr val="DDEBF7"/>
           </a:solidFill>
           <a:ln w="12700">
             <a:solidFill>
-              <a:srgbClr val="028090"/>
+              <a:srgbClr val="CCCCCC"/>
             </a:solidFill>
           </a:ln>
         </p:spPr>
@@ -6434,14 +6568,14 @@
       </p:sp>
       <p:sp>
         <p:nvSpPr>
-          <p:cNvPr id="9" name="TextBox 8"/>
+          <p:cNvPr id="10" name="TextBox 9"/>
           <p:cNvSpPr txBox="1"/>
           <p:nvPr/>
         </p:nvSpPr>
         <p:spPr>
           <a:xfrm>
-            <a:off x="3200400" y="1280160"/>
-            <a:ext cx="2377440" cy="640080"/>
+            <a:off x="3383280" y="1280160"/>
+            <a:ext cx="2377440" cy="594360"/>
           </a:xfrm>
           <a:prstGeom prst="rect">
             <a:avLst/>
@@ -6456,27 +6590,27 @@
           <a:p>
             <a:pPr algn="ctr"/>
             <a:r>
-              <a:rPr sz="2800" b="1">
-                <a:solidFill>
-                  <a:srgbClr val="02C39A"/>
-                </a:solidFill>
-                <a:latin typeface="Calibri"/>
-              </a:rPr>
-              <a:t>3-5 days</a:t>
-            </a:r>
-          </a:p>
-        </p:txBody>
-      </p:sp>
-      <p:sp>
-        <p:nvSpPr>
-          <p:cNvPr id="10" name="TextBox 9"/>
+              <a:rPr sz="2800" b="1" i="0">
+                <a:solidFill>
+                  <a:srgbClr val="2E75B6"/>
+                </a:solidFill>
+                <a:latin typeface="Calibri"/>
+              </a:rPr>
+              <a:t>3–5 days</a:t>
+            </a:r>
+          </a:p>
+        </p:txBody>
+      </p:sp>
+      <p:sp>
+        <p:nvSpPr>
+          <p:cNvPr id="11" name="TextBox 10"/>
           <p:cNvSpPr txBox="1"/>
           <p:nvPr/>
         </p:nvSpPr>
         <p:spPr>
           <a:xfrm>
-            <a:off x="3200400" y="1874519"/>
-            <a:ext cx="2377440" cy="457200"/>
+            <a:off x="3383280" y="1874519"/>
+            <a:ext cx="2377440" cy="411480"/>
           </a:xfrm>
           <a:prstGeom prst="rect">
             <a:avLst/>
@@ -6491,37 +6625,37 @@
           <a:p>
             <a:pPr algn="ctr"/>
             <a:r>
-              <a:rPr sz="1100" b="0">
-                <a:solidFill>
-                  <a:srgbClr val="E2E8F0"/>
-                </a:solidFill>
-                <a:latin typeface="Calibri"/>
-              </a:rPr>
-              <a:t>Manual cycle time</a:t>
-            </a:r>
-          </a:p>
-        </p:txBody>
-      </p:sp>
-      <p:sp>
-        <p:nvSpPr>
-          <p:cNvPr id="11" name="Rectangle 10"/>
+              <a:rPr sz="1100" b="0" i="0">
+                <a:solidFill>
+                  <a:srgbClr val="595959"/>
+                </a:solidFill>
+                <a:latin typeface="Calibri"/>
+              </a:rPr>
+              <a:t>manual cycle time</a:t>
+            </a:r>
+          </a:p>
+        </p:txBody>
+      </p:sp>
+      <p:sp>
+        <p:nvSpPr>
+          <p:cNvPr id="12" name="Rectangle 11"/>
           <p:cNvSpPr/>
           <p:nvPr/>
         </p:nvSpPr>
         <p:spPr>
           <a:xfrm>
-            <a:off x="5852160" y="1188720"/>
+            <a:off x="6126480" y="1188720"/>
             <a:ext cx="2560320" cy="1280160"/>
           </a:xfrm>
           <a:prstGeom prst="rect">
             <a:avLst/>
           </a:prstGeom>
           <a:solidFill>
-            <a:srgbClr val="36454F"/>
+            <a:srgbClr val="FFE8E8"/>
           </a:solidFill>
           <a:ln w="12700">
             <a:solidFill>
-              <a:srgbClr val="028090"/>
+              <a:srgbClr val="CCCCCC"/>
             </a:solidFill>
           </a:ln>
         </p:spPr>
@@ -6549,14 +6683,14 @@
       </p:sp>
       <p:sp>
         <p:nvSpPr>
-          <p:cNvPr id="12" name="TextBox 11"/>
+          <p:cNvPr id="13" name="TextBox 12"/>
           <p:cNvSpPr txBox="1"/>
           <p:nvPr/>
         </p:nvSpPr>
         <p:spPr>
           <a:xfrm>
-            <a:off x="5943600" y="1280160"/>
-            <a:ext cx="2377440" cy="640080"/>
+            <a:off x="6217920" y="1280160"/>
+            <a:ext cx="2377440" cy="594360"/>
           </a:xfrm>
           <a:prstGeom prst="rect">
             <a:avLst/>
@@ -6571,27 +6705,27 @@
           <a:p>
             <a:pPr algn="ctr"/>
             <a:r>
-              <a:rPr sz="2800" b="1">
-                <a:solidFill>
-                  <a:srgbClr val="02C39A"/>
-                </a:solidFill>
-                <a:latin typeface="Calibri"/>
-              </a:rPr>
-              <a:t>2-3%</a:t>
-            </a:r>
-          </a:p>
-        </p:txBody>
-      </p:sp>
-      <p:sp>
-        <p:nvSpPr>
-          <p:cNvPr id="13" name="TextBox 12"/>
+              <a:rPr sz="2800" b="1" i="0">
+                <a:solidFill>
+                  <a:srgbClr val="2E75B6"/>
+                </a:solidFill>
+                <a:latin typeface="Calibri"/>
+              </a:rPr>
+              <a:t>2–3%</a:t>
+            </a:r>
+          </a:p>
+        </p:txBody>
+      </p:sp>
+      <p:sp>
+        <p:nvSpPr>
+          <p:cNvPr id="14" name="TextBox 13"/>
           <p:cNvSpPr txBox="1"/>
           <p:nvPr/>
         </p:nvSpPr>
         <p:spPr>
           <a:xfrm>
-            <a:off x="5943600" y="1874519"/>
-            <a:ext cx="2377440" cy="457200"/>
+            <a:off x="6217920" y="1874519"/>
+            <a:ext cx="2377440" cy="411480"/>
           </a:xfrm>
           <a:prstGeom prst="rect">
             <a:avLst/>
@@ -6606,37 +6740,37 @@
           <a:p>
             <a:pPr algn="ctr"/>
             <a:r>
-              <a:rPr sz="1100" b="0">
-                <a:solidFill>
-                  <a:srgbClr val="E2E8F0"/>
-                </a:solidFill>
-                <a:latin typeface="Calibri"/>
-              </a:rPr>
-              <a:t>Error rate</a:t>
-            </a:r>
-          </a:p>
-        </p:txBody>
-      </p:sp>
-      <p:sp>
-        <p:nvSpPr>
-          <p:cNvPr id="14" name="Rectangle 13"/>
+              <a:rPr sz="1100" b="0" i="0">
+                <a:solidFill>
+                  <a:srgbClr val="595959"/>
+                </a:solidFill>
+                <a:latin typeface="Calibri"/>
+              </a:rPr>
+              <a:t>error rate</a:t>
+            </a:r>
+          </a:p>
+        </p:txBody>
+      </p:sp>
+      <p:sp>
+        <p:nvSpPr>
+          <p:cNvPr id="15" name="Rectangle 14"/>
           <p:cNvSpPr/>
           <p:nvPr/>
         </p:nvSpPr>
         <p:spPr>
           <a:xfrm>
-            <a:off x="8595360" y="1188720"/>
+            <a:off x="8961120" y="1188720"/>
             <a:ext cx="2560320" cy="1280160"/>
           </a:xfrm>
           <a:prstGeom prst="rect">
             <a:avLst/>
           </a:prstGeom>
           <a:solidFill>
-            <a:srgbClr val="36454F"/>
+            <a:srgbClr val="FFE8E8"/>
           </a:solidFill>
           <a:ln w="12700">
             <a:solidFill>
-              <a:srgbClr val="028090"/>
+              <a:srgbClr val="CCCCCC"/>
             </a:solidFill>
           </a:ln>
         </p:spPr>
@@ -6664,14 +6798,14 @@
       </p:sp>
       <p:sp>
         <p:nvSpPr>
-          <p:cNvPr id="15" name="TextBox 14"/>
+          <p:cNvPr id="16" name="TextBox 15"/>
           <p:cNvSpPr txBox="1"/>
           <p:nvPr/>
         </p:nvSpPr>
         <p:spPr>
           <a:xfrm>
-            <a:off x="8686800" y="1280160"/>
-            <a:ext cx="2377440" cy="640080"/>
+            <a:off x="9052560" y="1280160"/>
+            <a:ext cx="2377440" cy="594360"/>
           </a:xfrm>
           <a:prstGeom prst="rect">
             <a:avLst/>
@@ -6686,9 +6820,9 @@
           <a:p>
             <a:pPr algn="ctr"/>
             <a:r>
-              <a:rPr sz="2800" b="1">
-                <a:solidFill>
-                  <a:srgbClr val="02C39A"/>
+              <a:rPr sz="2800" b="1" i="0">
+                <a:solidFill>
+                  <a:srgbClr val="2E75B6"/>
                 </a:solidFill>
                 <a:latin typeface="Calibri"/>
               </a:rPr>
@@ -6699,14 +6833,14 @@
       </p:sp>
       <p:sp>
         <p:nvSpPr>
-          <p:cNvPr id="16" name="TextBox 15"/>
+          <p:cNvPr id="17" name="TextBox 16"/>
           <p:cNvSpPr txBox="1"/>
           <p:nvPr/>
         </p:nvSpPr>
         <p:spPr>
           <a:xfrm>
-            <a:off x="8686800" y="1874519"/>
-            <a:ext cx="2377440" cy="457200"/>
+            <a:off x="9052560" y="1874519"/>
+            <a:ext cx="2377440" cy="411480"/>
           </a:xfrm>
           <a:prstGeom prst="rect">
             <a:avLst/>
@@ -6721,37 +6855,37 @@
           <a:p>
             <a:pPr algn="ctr"/>
             <a:r>
-              <a:rPr sz="1100" b="0">
-                <a:solidFill>
-                  <a:srgbClr val="E2E8F0"/>
-                </a:solidFill>
-                <a:latin typeface="Calibri"/>
-              </a:rPr>
-              <a:t>Monthly exposure</a:t>
-            </a:r>
-          </a:p>
-        </p:txBody>
-      </p:sp>
-      <p:sp>
-        <p:nvSpPr>
-          <p:cNvPr id="17" name="Rectangle 16"/>
+              <a:rPr sz="1100" b="0" i="0">
+                <a:solidFill>
+                  <a:srgbClr val="595959"/>
+                </a:solidFill>
+                <a:latin typeface="Calibri"/>
+              </a:rPr>
+              <a:t>monthly exposure</a:t>
+            </a:r>
+          </a:p>
+        </p:txBody>
+      </p:sp>
+      <p:sp>
+        <p:nvSpPr>
+          <p:cNvPr id="18" name="Rectangle 17"/>
           <p:cNvSpPr/>
           <p:nvPr/>
         </p:nvSpPr>
         <p:spPr>
           <a:xfrm>
-            <a:off x="365760" y="2743200"/>
-            <a:ext cx="5303520" cy="3474720"/>
+            <a:off x="457200" y="2743200"/>
+            <a:ext cx="5394960" cy="3474720"/>
           </a:xfrm>
           <a:prstGeom prst="rect">
             <a:avLst/>
           </a:prstGeom>
           <a:solidFill>
-            <a:srgbClr val="36454F"/>
+            <a:srgbClr val="F2F2F2"/>
           </a:solidFill>
           <a:ln w="12700">
             <a:solidFill>
-              <a:srgbClr val="028090"/>
+              <a:srgbClr val="CCCCCC"/>
             </a:solidFill>
           </a:ln>
         </p:spPr>
@@ -6779,14 +6913,14 @@
       </p:sp>
       <p:sp>
         <p:nvSpPr>
-          <p:cNvPr id="18" name="TextBox 17"/>
+          <p:cNvPr id="19" name="TextBox 18"/>
           <p:cNvSpPr txBox="1"/>
           <p:nvPr/>
         </p:nvSpPr>
         <p:spPr>
           <a:xfrm>
-            <a:off x="548640" y="2834640"/>
-            <a:ext cx="4937760" cy="3200400"/>
+            <a:off x="594360" y="2788920"/>
+            <a:ext cx="5120640" cy="365760"/>
           </a:xfrm>
           <a:prstGeom prst="rect">
             <a:avLst/>
@@ -6799,118 +6933,126 @@
           </a:bodyPr>
           <a:lstStyle/>
           <a:p>
-            <a:r>
-              <a:rPr sz="1300" b="1">
-                <a:solidFill>
-                  <a:srgbClr val="02C39A"/>
-                </a:solidFill>
-                <a:latin typeface="Calibri"/>
-              </a:rPr>
-              <a:t>Current State — Manual Process</a:t>
-            </a:r>
-          </a:p>
+            <a:pPr algn="l"/>
+            <a:r>
+              <a:rPr sz="1300" b="1" i="0">
+                <a:solidFill>
+                  <a:srgbClr val="2E75B6"/>
+                </a:solidFill>
+                <a:latin typeface="Calibri"/>
+              </a:rPr>
+              <a:t>Current State</a:t>
+            </a:r>
+          </a:p>
+        </p:txBody>
+      </p:sp>
+      <p:sp>
+        <p:nvSpPr>
+          <p:cNvPr id="20" name="TextBox 19"/>
+          <p:cNvSpPr txBox="1"/>
+          <p:nvPr/>
+        </p:nvSpPr>
+        <p:spPr>
+          <a:xfrm>
+            <a:off x="594360" y="3200400"/>
+            <a:ext cx="5120640" cy="3200400"/>
+          </a:xfrm>
+          <a:prstGeom prst="rect">
+            <a:avLst/>
+          </a:prstGeom>
+          <a:noFill/>
+        </p:spPr>
+        <p:txBody>
+          <a:bodyPr wrap="square">
+            <a:spAutoFit/>
+          </a:bodyPr>
+          <a:lstStyle/>
           <a:p>
             <a:pPr>
               <a:spcBef>
-                <a:spcPts val="400"/>
+                <a:spcPts val="300"/>
               </a:spcBef>
             </a:pPr>
             <a:r>
               <a:rPr sz="1200">
                 <a:solidFill>
-                  <a:srgbClr val="FFFFFF"/>
-                </a:solidFill>
-                <a:latin typeface="Calibri"/>
-              </a:rPr>
-              <a:t>  Finance team manually checks every invoice against POs and GRNs</a:t>
+                  <a:srgbClr val="1A1A2E"/>
+                </a:solidFill>
+                <a:latin typeface="Calibri"/>
+              </a:rPr>
+              <a:t>• Finance manually checks every invoice vs PO and GRN</a:t>
             </a:r>
           </a:p>
           <a:p>
             <a:pPr>
               <a:spcBef>
-                <a:spcPts val="400"/>
+                <a:spcPts val="300"/>
               </a:spcBef>
             </a:pPr>
             <a:r>
               <a:rPr sz="1200">
                 <a:solidFill>
-                  <a:srgbClr val="FFFFFF"/>
-                </a:solidFill>
-                <a:latin typeface="Calibri"/>
-              </a:rPr>
-              <a:t>  Takes 3–5 days per invoice cycle — suppliers complain about delays</a:t>
+                  <a:srgbClr val="1A1A2E"/>
+                </a:solidFill>
+                <a:latin typeface="Calibri"/>
+              </a:rPr>
+              <a:t>• No pattern detection — same vendor errors repeat monthly</a:t>
             </a:r>
           </a:p>
           <a:p>
             <a:pPr>
               <a:spcBef>
-                <a:spcPts val="400"/>
+                <a:spcPts val="300"/>
               </a:spcBef>
             </a:pPr>
             <a:r>
               <a:rPr sz="1200">
                 <a:solidFill>
-                  <a:srgbClr val="FFFFFF"/>
-                </a:solidFill>
-                <a:latin typeface="Calibri"/>
-              </a:rPr>
-              <a:t>  No pattern detection across vendors — same errors repeated monthly</a:t>
+                  <a:srgbClr val="1A1A2E"/>
+                </a:solidFill>
+                <a:latin typeface="Calibri"/>
+              </a:rPr>
+              <a:t>• 25 countries, 4 currencies, 2 ERPs — no unified view</a:t>
             </a:r>
           </a:p>
           <a:p>
             <a:pPr>
               <a:spcBef>
-                <a:spcPts val="400"/>
+                <a:spcPts val="300"/>
               </a:spcBef>
             </a:pPr>
             <a:r>
               <a:rPr sz="1200">
                 <a:solidFill>
-                  <a:srgbClr val="FFFFFF"/>
-                </a:solidFill>
-                <a:latin typeface="Calibri"/>
-              </a:rPr>
-              <a:t>  25 countries, 4 currencies, 2 ERPs (SAP + Oracle) — no unified view</a:t>
-            </a:r>
-          </a:p>
-          <a:p>
-            <a:pPr>
-              <a:spcBef>
-                <a:spcPts val="400"/>
-              </a:spcBef>
-            </a:pPr>
-            <a:r>
-              <a:rPr sz="1200">
-                <a:solidFill>
-                  <a:srgbClr val="FFFFFF"/>
-                </a:solidFill>
-                <a:latin typeface="Calibri"/>
-              </a:rPr>
-              <a:t>  Regulatory risk: GDPR compliance not enforced at data ingestion</a:t>
-            </a:r>
-          </a:p>
-        </p:txBody>
-      </p:sp>
-      <p:sp>
-        <p:nvSpPr>
-          <p:cNvPr id="19" name="Rectangle 18"/>
+                  <a:srgbClr val="1A1A2E"/>
+                </a:solidFill>
+                <a:latin typeface="Calibri"/>
+              </a:rPr>
+              <a:t>• GDPR compliance not enforced at data ingestion</a:t>
+            </a:r>
+          </a:p>
+        </p:txBody>
+      </p:sp>
+      <p:sp>
+        <p:nvSpPr>
+          <p:cNvPr id="21" name="Rectangle 20"/>
           <p:cNvSpPr/>
           <p:nvPr/>
         </p:nvSpPr>
         <p:spPr>
           <a:xfrm>
-            <a:off x="5943600" y="2743200"/>
-            <a:ext cx="5852160" cy="3474720"/>
+            <a:off x="6126480" y="2743200"/>
+            <a:ext cx="5669280" cy="3474720"/>
           </a:xfrm>
           <a:prstGeom prst="rect">
             <a:avLst/>
           </a:prstGeom>
           <a:solidFill>
-            <a:srgbClr val="36454F"/>
+            <a:srgbClr val="E8F4E8"/>
           </a:solidFill>
           <a:ln w="12700">
             <a:solidFill>
-              <a:srgbClr val="028090"/>
+              <a:srgbClr val="CCCCCC"/>
             </a:solidFill>
           </a:ln>
         </p:spPr>
@@ -6938,14 +7080,14 @@
       </p:sp>
       <p:sp>
         <p:nvSpPr>
-          <p:cNvPr id="20" name="TextBox 19"/>
+          <p:cNvPr id="22" name="TextBox 21"/>
           <p:cNvSpPr txBox="1"/>
           <p:nvPr/>
         </p:nvSpPr>
         <p:spPr>
           <a:xfrm>
-            <a:off x="6126480" y="2834640"/>
-            <a:ext cx="5486400" cy="3200400"/>
+            <a:off x="6263640" y="2788920"/>
+            <a:ext cx="5394960" cy="365760"/>
           </a:xfrm>
           <a:prstGeom prst="rect">
             <a:avLst/>
@@ -6958,94 +7100,102 @@
           </a:bodyPr>
           <a:lstStyle/>
           <a:p>
-            <a:r>
-              <a:rPr sz="1300" b="1">
-                <a:solidFill>
-                  <a:srgbClr val="02C39A"/>
-                </a:solidFill>
-                <a:latin typeface="Calibri"/>
-              </a:rPr>
-              <a:t>What SmartPay AP Delivers</a:t>
-            </a:r>
-          </a:p>
+            <a:pPr algn="l"/>
+            <a:r>
+              <a:rPr sz="1300" b="1" i="0">
+                <a:solidFill>
+                  <a:srgbClr val="37864F"/>
+                </a:solidFill>
+                <a:latin typeface="Calibri"/>
+              </a:rPr>
+              <a:t>SmartPay AP Delivers</a:t>
+            </a:r>
+          </a:p>
+        </p:txBody>
+      </p:sp>
+      <p:sp>
+        <p:nvSpPr>
+          <p:cNvPr id="23" name="TextBox 22"/>
+          <p:cNvSpPr txBox="1"/>
+          <p:nvPr/>
+        </p:nvSpPr>
+        <p:spPr>
+          <a:xfrm>
+            <a:off x="6263640" y="3200400"/>
+            <a:ext cx="5394960" cy="3200400"/>
+          </a:xfrm>
+          <a:prstGeom prst="rect">
+            <a:avLst/>
+          </a:prstGeom>
+          <a:noFill/>
+        </p:spPr>
+        <p:txBody>
+          <a:bodyPr wrap="square">
+            <a:spAutoFit/>
+          </a:bodyPr>
+          <a:lstStyle/>
           <a:p>
             <a:pPr>
               <a:spcBef>
-                <a:spcPts val="400"/>
+                <a:spcPts val="300"/>
               </a:spcBef>
             </a:pPr>
             <a:r>
               <a:rPr sz="1200">
                 <a:solidFill>
-                  <a:srgbClr val="FFFFFF"/>
-                </a:solidFill>
-                <a:latin typeface="Calibri"/>
-              </a:rPr>
-              <a:t>  Automated invoice-to-PO-to-GRN reconciliation</a:t>
+                  <a:srgbClr val="1A1A2E"/>
+                </a:solidFill>
+                <a:latin typeface="Calibri"/>
+              </a:rPr>
+              <a:t>• Automated invoice-to-PO-to-GRN reconciliation</a:t>
             </a:r>
           </a:p>
           <a:p>
             <a:pPr>
               <a:spcBef>
-                <a:spcPts val="400"/>
+                <a:spcPts val="300"/>
               </a:spcBef>
             </a:pPr>
             <a:r>
               <a:rPr sz="1200">
                 <a:solidFill>
-                  <a:srgbClr val="FFFFFF"/>
-                </a:solidFill>
-                <a:latin typeface="Calibri"/>
-              </a:rPr>
-              <a:t>  Real-time mismatch detection with explainable reasons</a:t>
+                  <a:srgbClr val="1A1A2E"/>
+                </a:solidFill>
+                <a:latin typeface="Calibri"/>
+              </a:rPr>
+              <a:t>• Real-time mismatch detection with explainable reasons</a:t>
             </a:r>
           </a:p>
           <a:p>
             <a:pPr>
               <a:spcBef>
-                <a:spcPts val="400"/>
+                <a:spcPts val="300"/>
               </a:spcBef>
             </a:pPr>
             <a:r>
               <a:rPr sz="1200">
                 <a:solidFill>
-                  <a:srgbClr val="FFFFFF"/>
-                </a:solidFill>
-                <a:latin typeface="Calibri"/>
-              </a:rPr>
-              <a:t>  Auto-draft vendor dispute emails with LLM</a:t>
+                  <a:srgbClr val="1A1A2E"/>
+                </a:solidFill>
+                <a:latin typeface="Calibri"/>
+              </a:rPr>
+              <a:t>• LLM drafts vendor dispute emails via MCP tools</a:t>
             </a:r>
           </a:p>
           <a:p>
             <a:pPr>
               <a:spcBef>
-                <a:spcPts val="400"/>
+                <a:spcPts val="300"/>
               </a:spcBef>
             </a:pPr>
             <a:r>
               <a:rPr sz="1200">
                 <a:solidFill>
-                  <a:srgbClr val="FFFFFF"/>
-                </a:solidFill>
-                <a:latin typeface="Calibri"/>
-              </a:rPr>
-              <a:t>  Human-in-the-loop before any payment action</a:t>
-            </a:r>
-          </a:p>
-          <a:p>
-            <a:pPr>
-              <a:spcBef>
-                <a:spcPts val="400"/>
-              </a:spcBef>
-            </a:pPr>
-            <a:r>
-              <a:rPr sz="1200">
-                <a:solidFill>
-                  <a:srgbClr val="FFFFFF"/>
-                </a:solidFill>
-                <a:latin typeface="Calibri"/>
-              </a:rPr>
-              <a:t>  Multi-cloud (Azure + AWS), GDPR-compliant, auditable</a:t>
+                  <a:srgbClr val="1A1A2E"/>
+                </a:solidFill>
+                <a:latin typeface="Calibri"/>
+              </a:rPr>
+              <a:t>• Human approves every action — no autonomous payments</a:t>
             </a:r>
           </a:p>
         </p:txBody>
@@ -7083,7 +7233,7 @@
             <a:avLst/>
           </a:prstGeom>
           <a:solidFill>
-            <a:srgbClr val="1E2761"/>
+            <a:srgbClr val="FFFFFF"/>
           </a:solidFill>
           <a:ln>
             <a:noFill/>
@@ -7119,8 +7269,8 @@
         </p:nvSpPr>
         <p:spPr>
           <a:xfrm>
-            <a:off x="548640" y="274320"/>
-            <a:ext cx="10972800" cy="731520"/>
+            <a:off x="548640" y="228600"/>
+            <a:ext cx="10972800" cy="640080"/>
           </a:xfrm>
           <a:prstGeom prst="rect">
             <a:avLst/>
@@ -7128,20 +7278,20 @@
           <a:noFill/>
         </p:spPr>
         <p:txBody>
-          <a:bodyPr wrap="none">
+          <a:bodyPr wrap="square">
             <a:spAutoFit/>
           </a:bodyPr>
           <a:lstStyle/>
           <a:p>
             <a:pPr algn="l"/>
             <a:r>
-              <a:rPr sz="3200" b="1">
-                <a:solidFill>
-                  <a:srgbClr val="FFFFFF"/>
-                </a:solidFill>
-                <a:latin typeface="Calibri"/>
-              </a:rPr>
-              <a:t>Solution Architecture — SmartPay AP</a:t>
+              <a:rPr sz="2800" b="1" i="0">
+                <a:solidFill>
+                  <a:srgbClr val="1A1A2E"/>
+                </a:solidFill>
+                <a:latin typeface="Calibri"/>
+              </a:rPr>
+              <a:t>End-to-End Data Flow</a:t>
             </a:r>
           </a:p>
         </p:txBody>
@@ -7154,14 +7304,14 @@
         </p:nvSpPr>
         <p:spPr>
           <a:xfrm>
-            <a:off x="548640" y="868680"/>
-            <a:ext cx="2286000" cy="45720"/>
+            <a:off x="548640" y="822960"/>
+            <a:ext cx="11064240" cy="36576"/>
           </a:xfrm>
           <a:prstGeom prst="rect">
             <a:avLst/>
           </a:prstGeom>
           <a:solidFill>
-            <a:srgbClr val="028090"/>
+            <a:srgbClr val="2E75B6"/>
           </a:solidFill>
           <a:ln>
             <a:noFill/>
@@ -7191,59 +7341,14 @@
       </p:sp>
       <p:sp>
         <p:nvSpPr>
-          <p:cNvPr id="5" name="Rectangle 4"/>
-          <p:cNvSpPr/>
-          <p:nvPr/>
-        </p:nvSpPr>
-        <p:spPr>
-          <a:xfrm>
-            <a:off x="457200" y="1143000"/>
-            <a:ext cx="11247120" cy="822960"/>
-          </a:xfrm>
-          <a:prstGeom prst="rect">
-            <a:avLst/>
-          </a:prstGeom>
-          <a:solidFill>
-            <a:srgbClr val="1B4F72"/>
-          </a:solidFill>
-          <a:ln w="12700">
-            <a:solidFill>
-              <a:srgbClr val="028090"/>
-            </a:solidFill>
-          </a:ln>
-        </p:spPr>
-        <p:style>
-          <a:lnRef idx="1">
-            <a:schemeClr val="accent1"/>
-          </a:lnRef>
-          <a:fillRef idx="3">
-            <a:schemeClr val="accent1"/>
-          </a:fillRef>
-          <a:effectRef idx="2">
-            <a:schemeClr val="accent1"/>
-          </a:effectRef>
-          <a:fontRef idx="minor">
-            <a:schemeClr val="lt1"/>
-          </a:fontRef>
-        </p:style>
-        <p:txBody>
-          <a:bodyPr rtlCol="0" anchor="ctr"/>
-          <a:lstStyle/>
-          <a:p>
-            <a:pPr algn="ctr"/>
-          </a:p>
-        </p:txBody>
-      </p:sp>
-      <p:sp>
-        <p:nvSpPr>
-          <p:cNvPr id="6" name="TextBox 5"/>
+          <p:cNvPr id="5" name="TextBox 4"/>
           <p:cNvSpPr txBox="1"/>
           <p:nvPr/>
         </p:nvSpPr>
         <p:spPr>
           <a:xfrm>
-            <a:off x="594360" y="1188720"/>
-            <a:ext cx="5029200" cy="411480"/>
+            <a:off x="548640" y="868680"/>
+            <a:ext cx="10972800" cy="365760"/>
           </a:xfrm>
           <a:prstGeom prst="rect">
             <a:avLst/>
@@ -7258,512 +7363,41 @@
           <a:p>
             <a:pPr algn="l"/>
             <a:r>
-              <a:rPr sz="1300" b="1">
-                <a:solidFill>
-                  <a:srgbClr val="FFFFFF"/>
-                </a:solidFill>
-                <a:latin typeface="Calibri"/>
-              </a:rPr>
-              <a:t>Layer 5  —  Security &amp; Compliance</a:t>
-            </a:r>
-          </a:p>
-        </p:txBody>
-      </p:sp>
-      <p:sp>
-        <p:nvSpPr>
-          <p:cNvPr id="7" name="TextBox 6"/>
-          <p:cNvSpPr txBox="1"/>
-          <p:nvPr/>
-        </p:nvSpPr>
-        <p:spPr>
-          <a:xfrm>
-            <a:off x="5760720" y="1188720"/>
-            <a:ext cx="5760720" cy="411480"/>
-          </a:xfrm>
-          <a:prstGeom prst="rect">
-            <a:avLst/>
-          </a:prstGeom>
-          <a:noFill/>
-        </p:spPr>
-        <p:txBody>
-          <a:bodyPr wrap="square">
-            <a:spAutoFit/>
-          </a:bodyPr>
-          <a:lstStyle/>
-          <a:p>
-            <a:pPr algn="l"/>
-            <a:r>
-              <a:rPr sz="1200" b="0">
-                <a:solidFill>
-                  <a:srgbClr val="E2E8F0"/>
-                </a:solidFill>
-                <a:latin typeface="Calibri"/>
-              </a:rPr>
-              <a:t>GDPR, Azure Key Vault, Audit Trail, RBAC</a:t>
-            </a:r>
-          </a:p>
-        </p:txBody>
-      </p:sp>
-      <p:sp>
-        <p:nvSpPr>
-          <p:cNvPr id="8" name="Rectangle 7"/>
-          <p:cNvSpPr/>
-          <p:nvPr/>
-        </p:nvSpPr>
-        <p:spPr>
-          <a:xfrm>
-            <a:off x="457200" y="2148840"/>
-            <a:ext cx="11247120" cy="822960"/>
-          </a:xfrm>
-          <a:prstGeom prst="rect">
-            <a:avLst/>
-          </a:prstGeom>
-          <a:solidFill>
-            <a:srgbClr val="0E6655"/>
-          </a:solidFill>
-          <a:ln w="12700">
-            <a:solidFill>
-              <a:srgbClr val="028090"/>
-            </a:solidFill>
-          </a:ln>
-        </p:spPr>
-        <p:style>
-          <a:lnRef idx="1">
-            <a:schemeClr val="accent1"/>
-          </a:lnRef>
-          <a:fillRef idx="3">
-            <a:schemeClr val="accent1"/>
-          </a:fillRef>
-          <a:effectRef idx="2">
-            <a:schemeClr val="accent1"/>
-          </a:effectRef>
-          <a:fontRef idx="minor">
-            <a:schemeClr val="lt1"/>
-          </a:fontRef>
-        </p:style>
-        <p:txBody>
-          <a:bodyPr rtlCol="0" anchor="ctr"/>
-          <a:lstStyle/>
-          <a:p>
-            <a:pPr algn="ctr"/>
-          </a:p>
-        </p:txBody>
-      </p:sp>
-      <p:sp>
-        <p:nvSpPr>
-          <p:cNvPr id="9" name="TextBox 8"/>
-          <p:cNvSpPr txBox="1"/>
-          <p:nvPr/>
-        </p:nvSpPr>
-        <p:spPr>
-          <a:xfrm>
-            <a:off x="594360" y="2194560"/>
-            <a:ext cx="5029200" cy="411480"/>
-          </a:xfrm>
-          <a:prstGeom prst="rect">
-            <a:avLst/>
-          </a:prstGeom>
-          <a:noFill/>
-        </p:spPr>
-        <p:txBody>
-          <a:bodyPr wrap="square">
-            <a:spAutoFit/>
-          </a:bodyPr>
-          <a:lstStyle/>
-          <a:p>
-            <a:pPr algn="l"/>
-            <a:r>
-              <a:rPr sz="1300" b="1">
-                <a:solidFill>
-                  <a:srgbClr val="FFFFFF"/>
-                </a:solidFill>
-                <a:latin typeface="Calibri"/>
-              </a:rPr>
-              <a:t>Layer 4  —  Agent Layer (D3)</a:t>
-            </a:r>
-          </a:p>
-        </p:txBody>
-      </p:sp>
-      <p:sp>
-        <p:nvSpPr>
-          <p:cNvPr id="10" name="TextBox 9"/>
-          <p:cNvSpPr txBox="1"/>
-          <p:nvPr/>
-        </p:nvSpPr>
-        <p:spPr>
-          <a:xfrm>
-            <a:off x="5760720" y="2194560"/>
-            <a:ext cx="5760720" cy="411480"/>
-          </a:xfrm>
-          <a:prstGeom prst="rect">
-            <a:avLst/>
-          </a:prstGeom>
-          <a:noFill/>
-        </p:spPr>
-        <p:txBody>
-          <a:bodyPr wrap="square">
-            <a:spAutoFit/>
-          </a:bodyPr>
-          <a:lstStyle/>
-          <a:p>
-            <a:pPr algn="l"/>
-            <a:r>
-              <a:rPr sz="1200" b="0">
-                <a:solidFill>
-                  <a:srgbClr val="E2E8F0"/>
-                </a:solidFill>
-                <a:latin typeface="Calibri"/>
-              </a:rPr>
-              <a:t>LangGraph Workflow, RAG Lookup, HITL, Guardrails, Email Agent</a:t>
-            </a:r>
-          </a:p>
-        </p:txBody>
-      </p:sp>
-      <p:sp>
-        <p:nvSpPr>
-          <p:cNvPr id="11" name="Rectangle 10"/>
-          <p:cNvSpPr/>
-          <p:nvPr/>
-        </p:nvSpPr>
-        <p:spPr>
-          <a:xfrm>
-            <a:off x="457200" y="3154680"/>
-            <a:ext cx="11247120" cy="822960"/>
-          </a:xfrm>
-          <a:prstGeom prst="rect">
-            <a:avLst/>
-          </a:prstGeom>
-          <a:solidFill>
-            <a:srgbClr val="1A5276"/>
-          </a:solidFill>
-          <a:ln w="12700">
-            <a:solidFill>
-              <a:srgbClr val="028090"/>
-            </a:solidFill>
-          </a:ln>
-        </p:spPr>
-        <p:style>
-          <a:lnRef idx="1">
-            <a:schemeClr val="accent1"/>
-          </a:lnRef>
-          <a:fillRef idx="3">
-            <a:schemeClr val="accent1"/>
-          </a:fillRef>
-          <a:effectRef idx="2">
-            <a:schemeClr val="accent1"/>
-          </a:effectRef>
-          <a:fontRef idx="minor">
-            <a:schemeClr val="lt1"/>
-          </a:fontRef>
-        </p:style>
-        <p:txBody>
-          <a:bodyPr rtlCol="0" anchor="ctr"/>
-          <a:lstStyle/>
-          <a:p>
-            <a:pPr algn="ctr"/>
-          </a:p>
-        </p:txBody>
-      </p:sp>
-      <p:sp>
-        <p:nvSpPr>
-          <p:cNvPr id="12" name="TextBox 11"/>
-          <p:cNvSpPr txBox="1"/>
-          <p:nvPr/>
-        </p:nvSpPr>
-        <p:spPr>
-          <a:xfrm>
-            <a:off x="594360" y="3200400"/>
-            <a:ext cx="5029200" cy="411480"/>
-          </a:xfrm>
-          <a:prstGeom prst="rect">
-            <a:avLst/>
-          </a:prstGeom>
-          <a:noFill/>
-        </p:spPr>
-        <p:txBody>
-          <a:bodyPr wrap="square">
-            <a:spAutoFit/>
-          </a:bodyPr>
-          <a:lstStyle/>
-          <a:p>
-            <a:pPr algn="l"/>
-            <a:r>
-              <a:rPr sz="1300" b="1">
-                <a:solidFill>
-                  <a:srgbClr val="FFFFFF"/>
-                </a:solidFill>
-                <a:latin typeface="Calibri"/>
-              </a:rPr>
-              <a:t>Layer 3  —  AI / ML Layer (D2)</a:t>
-            </a:r>
-          </a:p>
-        </p:txBody>
-      </p:sp>
-      <p:sp>
-        <p:nvSpPr>
-          <p:cNvPr id="13" name="TextBox 12"/>
-          <p:cNvSpPr txBox="1"/>
-          <p:nvPr/>
-        </p:nvSpPr>
-        <p:spPr>
-          <a:xfrm>
-            <a:off x="5760720" y="3200400"/>
-            <a:ext cx="5760720" cy="411480"/>
-          </a:xfrm>
-          <a:prstGeom prst="rect">
-            <a:avLst/>
-          </a:prstGeom>
-          <a:noFill/>
-        </p:spPr>
-        <p:txBody>
-          <a:bodyPr wrap="square">
-            <a:spAutoFit/>
-          </a:bodyPr>
-          <a:lstStyle/>
-          <a:p>
-            <a:pPr algn="l"/>
-            <a:r>
-              <a:rPr sz="1200" b="0">
-                <a:solidFill>
-                  <a:srgbClr val="E2E8F0"/>
-                </a:solidFill>
-                <a:latin typeface="Calibri"/>
-              </a:rPr>
-              <a:t>Rule Engine + Random Forest Matching Model</a:t>
-            </a:r>
-          </a:p>
-        </p:txBody>
-      </p:sp>
-      <p:sp>
-        <p:nvSpPr>
-          <p:cNvPr id="14" name="Rectangle 13"/>
-          <p:cNvSpPr/>
-          <p:nvPr/>
-        </p:nvSpPr>
-        <p:spPr>
-          <a:xfrm>
-            <a:off x="457200" y="4160520"/>
-            <a:ext cx="11247120" cy="822960"/>
-          </a:xfrm>
-          <a:prstGeom prst="rect">
-            <a:avLst/>
-          </a:prstGeom>
-          <a:solidFill>
-            <a:srgbClr val="4A235A"/>
-          </a:solidFill>
-          <a:ln w="12700">
-            <a:solidFill>
-              <a:srgbClr val="028090"/>
-            </a:solidFill>
-          </a:ln>
-        </p:spPr>
-        <p:style>
-          <a:lnRef idx="1">
-            <a:schemeClr val="accent1"/>
-          </a:lnRef>
-          <a:fillRef idx="3">
-            <a:schemeClr val="accent1"/>
-          </a:fillRef>
-          <a:effectRef idx="2">
-            <a:schemeClr val="accent1"/>
-          </a:effectRef>
-          <a:fontRef idx="minor">
-            <a:schemeClr val="lt1"/>
-          </a:fontRef>
-        </p:style>
-        <p:txBody>
-          <a:bodyPr rtlCol="0" anchor="ctr"/>
-          <a:lstStyle/>
-          <a:p>
-            <a:pPr algn="ctr"/>
-          </a:p>
-        </p:txBody>
-      </p:sp>
-      <p:sp>
-        <p:nvSpPr>
-          <p:cNvPr id="15" name="TextBox 14"/>
-          <p:cNvSpPr txBox="1"/>
-          <p:nvPr/>
-        </p:nvSpPr>
-        <p:spPr>
-          <a:xfrm>
-            <a:off x="594360" y="4206240"/>
-            <a:ext cx="5029200" cy="411480"/>
-          </a:xfrm>
-          <a:prstGeom prst="rect">
-            <a:avLst/>
-          </a:prstGeom>
-          <a:noFill/>
-        </p:spPr>
-        <p:txBody>
-          <a:bodyPr wrap="square">
-            <a:spAutoFit/>
-          </a:bodyPr>
-          <a:lstStyle/>
-          <a:p>
-            <a:pPr algn="l"/>
-            <a:r>
-              <a:rPr sz="1300" b="1">
-                <a:solidFill>
-                  <a:srgbClr val="FFFFFF"/>
-                </a:solidFill>
-                <a:latin typeface="Calibri"/>
-              </a:rPr>
-              <a:t>Layer 2  —  Integration Layer</a:t>
-            </a:r>
-          </a:p>
-        </p:txBody>
-      </p:sp>
-      <p:sp>
-        <p:nvSpPr>
-          <p:cNvPr id="16" name="TextBox 15"/>
-          <p:cNvSpPr txBox="1"/>
-          <p:nvPr/>
-        </p:nvSpPr>
-        <p:spPr>
-          <a:xfrm>
-            <a:off x="5760720" y="4206240"/>
-            <a:ext cx="5760720" cy="411480"/>
-          </a:xfrm>
-          <a:prstGeom prst="rect">
-            <a:avLst/>
-          </a:prstGeom>
-          <a:noFill/>
-        </p:spPr>
-        <p:txBody>
-          <a:bodyPr wrap="square">
-            <a:spAutoFit/>
-          </a:bodyPr>
-          <a:lstStyle/>
-          <a:p>
-            <a:pPr algn="l"/>
-            <a:r>
-              <a:rPr sz="1200" b="0">
-                <a:solidFill>
-                  <a:srgbClr val="E2E8F0"/>
-                </a:solidFill>
-                <a:latin typeface="Calibri"/>
-              </a:rPr>
-              <a:t>SAP BAPI, Oracle REST, Kafka Event Bus</a:t>
-            </a:r>
-          </a:p>
-        </p:txBody>
-      </p:sp>
-      <p:sp>
-        <p:nvSpPr>
-          <p:cNvPr id="17" name="Rectangle 16"/>
-          <p:cNvSpPr/>
-          <p:nvPr/>
-        </p:nvSpPr>
-        <p:spPr>
-          <a:xfrm>
-            <a:off x="457200" y="5166360"/>
-            <a:ext cx="11247120" cy="822960"/>
-          </a:xfrm>
-          <a:prstGeom prst="rect">
-            <a:avLst/>
-          </a:prstGeom>
-          <a:solidFill>
-            <a:srgbClr val="784212"/>
-          </a:solidFill>
-          <a:ln w="12700">
-            <a:solidFill>
-              <a:srgbClr val="028090"/>
-            </a:solidFill>
-          </a:ln>
-        </p:spPr>
-        <p:style>
-          <a:lnRef idx="1">
-            <a:schemeClr val="accent1"/>
-          </a:lnRef>
-          <a:fillRef idx="3">
-            <a:schemeClr val="accent1"/>
-          </a:fillRef>
-          <a:effectRef idx="2">
-            <a:schemeClr val="accent1"/>
-          </a:effectRef>
-          <a:fontRef idx="minor">
-            <a:schemeClr val="lt1"/>
-          </a:fontRef>
-        </p:style>
-        <p:txBody>
-          <a:bodyPr rtlCol="0" anchor="ctr"/>
-          <a:lstStyle/>
-          <a:p>
-            <a:pPr algn="ctr"/>
-          </a:p>
-        </p:txBody>
-      </p:sp>
-      <p:sp>
-        <p:nvSpPr>
-          <p:cNvPr id="18" name="TextBox 17"/>
-          <p:cNvSpPr txBox="1"/>
-          <p:nvPr/>
-        </p:nvSpPr>
-        <p:spPr>
-          <a:xfrm>
-            <a:off x="594360" y="5212080"/>
-            <a:ext cx="5029200" cy="411480"/>
-          </a:xfrm>
-          <a:prstGeom prst="rect">
-            <a:avLst/>
-          </a:prstGeom>
-          <a:noFill/>
-        </p:spPr>
-        <p:txBody>
-          <a:bodyPr wrap="square">
-            <a:spAutoFit/>
-          </a:bodyPr>
-          <a:lstStyle/>
-          <a:p>
-            <a:pPr algn="l"/>
-            <a:r>
-              <a:rPr sz="1300" b="1">
-                <a:solidFill>
-                  <a:srgbClr val="FFFFFF"/>
-                </a:solidFill>
-                <a:latin typeface="Calibri"/>
-              </a:rPr>
-              <a:t>Layer 1  —  Data Ingestion</a:t>
-            </a:r>
-          </a:p>
-        </p:txBody>
-      </p:sp>
-      <p:sp>
-        <p:nvSpPr>
-          <p:cNvPr id="19" name="TextBox 18"/>
-          <p:cNvSpPr txBox="1"/>
-          <p:nvPr/>
-        </p:nvSpPr>
-        <p:spPr>
-          <a:xfrm>
-            <a:off x="5760720" y="5212080"/>
-            <a:ext cx="5760720" cy="411480"/>
-          </a:xfrm>
-          <a:prstGeom prst="rect">
-            <a:avLst/>
-          </a:prstGeom>
-          <a:noFill/>
-        </p:spPr>
-        <p:txBody>
-          <a:bodyPr wrap="square">
-            <a:spAutoFit/>
-          </a:bodyPr>
-          <a:lstStyle/>
-          <a:p>
-            <a:pPr algn="l"/>
-            <a:r>
-              <a:rPr sz="1200" b="0">
-                <a:solidFill>
-                  <a:srgbClr val="E2E8F0"/>
-                </a:solidFill>
-                <a:latin typeface="Calibri"/>
-              </a:rPr>
-              <a:t>Azure Form Recognizer, PDF/Email/EDI, Azure Data Factory</a:t>
-            </a:r>
-          </a:p>
-        </p:txBody>
-      </p:sp>
+              <a:rPr sz="1200" b="0" i="1">
+                <a:solidFill>
+                  <a:srgbClr val="595959"/>
+                </a:solidFill>
+                <a:latin typeface="Calibri"/>
+              </a:rPr>
+              <a:t>From invoice arrival to payment or dispute — every step shown</a:t>
+            </a:r>
+          </a:p>
+        </p:txBody>
+      </p:sp>
+      <p:pic>
+        <p:nvPicPr>
+          <p:cNvPr id="6" name="Picture 5" descr="diagram_data_flow.png"/>
+          <p:cNvPicPr>
+            <a:picLocks noChangeAspect="1"/>
+          </p:cNvPicPr>
+          <p:nvPr/>
+        </p:nvPicPr>
+        <p:blipFill>
+          <a:blip r:embed="rId2"/>
+          <a:stretch>
+            <a:fillRect/>
+          </a:stretch>
+        </p:blipFill>
+        <p:spPr>
+          <a:xfrm>
+            <a:off x="182880" y="1005840"/>
+            <a:ext cx="11795760" cy="5577840"/>
+          </a:xfrm>
+          <a:prstGeom prst="rect">
+            <a:avLst/>
+          </a:prstGeom>
+        </p:spPr>
+      </p:pic>
     </p:spTree>
   </p:cSld>
   <p:clrMapOvr>
@@ -7797,7 +7431,7 @@
             <a:avLst/>
           </a:prstGeom>
           <a:solidFill>
-            <a:srgbClr val="1E2761"/>
+            <a:srgbClr val="FFFFFF"/>
           </a:solidFill>
           <a:ln>
             <a:noFill/>
@@ -7833,8 +7467,8 @@
         </p:nvSpPr>
         <p:spPr>
           <a:xfrm>
-            <a:off x="548640" y="274320"/>
-            <a:ext cx="10972800" cy="731520"/>
+            <a:off x="548640" y="228600"/>
+            <a:ext cx="10972800" cy="640080"/>
           </a:xfrm>
           <a:prstGeom prst="rect">
             <a:avLst/>
@@ -7842,20 +7476,20 @@
           <a:noFill/>
         </p:spPr>
         <p:txBody>
-          <a:bodyPr wrap="none">
+          <a:bodyPr wrap="square">
             <a:spAutoFit/>
           </a:bodyPr>
           <a:lstStyle/>
           <a:p>
             <a:pPr algn="l"/>
             <a:r>
-              <a:rPr sz="3200" b="1">
-                <a:solidFill>
-                  <a:srgbClr val="FFFFFF"/>
-                </a:solidFill>
-                <a:latin typeface="Calibri"/>
-              </a:rPr>
-              <a:t>Data Ingestion Layer</a:t>
+              <a:rPr sz="2800" b="1" i="0">
+                <a:solidFill>
+                  <a:srgbClr val="1A1A2E"/>
+                </a:solidFill>
+                <a:latin typeface="Calibri"/>
+              </a:rPr>
+              <a:t>Solution Architecture — 5 Layers</a:t>
             </a:r>
           </a:p>
         </p:txBody>
@@ -7868,14 +7502,14 @@
         </p:nvSpPr>
         <p:spPr>
           <a:xfrm>
-            <a:off x="548640" y="868680"/>
-            <a:ext cx="2286000" cy="45720"/>
+            <a:off x="548640" y="822960"/>
+            <a:ext cx="11064240" cy="36576"/>
           </a:xfrm>
           <a:prstGeom prst="rect">
             <a:avLst/>
           </a:prstGeom>
           <a:solidFill>
-            <a:srgbClr val="028090"/>
+            <a:srgbClr val="2E75B6"/>
           </a:solidFill>
           <a:ln>
             <a:noFill/>
@@ -7903,510 +7537,30 @@
           </a:p>
         </p:txBody>
       </p:sp>
-      <p:sp>
-        <p:nvSpPr>
-          <p:cNvPr id="5" name="Rectangle 4"/>
-          <p:cNvSpPr/>
-          <p:nvPr/>
-        </p:nvSpPr>
-        <p:spPr>
-          <a:xfrm>
-            <a:off x="365760" y="1097280"/>
-            <a:ext cx="3657600" cy="2011680"/>
-          </a:xfrm>
-          <a:prstGeom prst="rect">
-            <a:avLst/>
-          </a:prstGeom>
-          <a:solidFill>
-            <a:srgbClr val="36454F"/>
-          </a:solidFill>
-          <a:ln w="12700">
-            <a:solidFill>
-              <a:srgbClr val="028090"/>
-            </a:solidFill>
-          </a:ln>
-        </p:spPr>
-        <p:style>
-          <a:lnRef idx="1">
-            <a:schemeClr val="accent1"/>
-          </a:lnRef>
-          <a:fillRef idx="3">
-            <a:schemeClr val="accent1"/>
-          </a:fillRef>
-          <a:effectRef idx="2">
-            <a:schemeClr val="accent1"/>
-          </a:effectRef>
-          <a:fontRef idx="minor">
-            <a:schemeClr val="lt1"/>
-          </a:fontRef>
-        </p:style>
-        <p:txBody>
-          <a:bodyPr rtlCol="0" anchor="ctr"/>
-          <a:lstStyle/>
-          <a:p>
-            <a:pPr algn="ctr"/>
-          </a:p>
-        </p:txBody>
-      </p:sp>
-      <p:sp>
-        <p:nvSpPr>
-          <p:cNvPr id="6" name="TextBox 5"/>
-          <p:cNvSpPr txBox="1"/>
-          <p:nvPr/>
-        </p:nvSpPr>
-        <p:spPr>
-          <a:xfrm>
-            <a:off x="502920" y="1234440"/>
-            <a:ext cx="3383280" cy="457200"/>
-          </a:xfrm>
-          <a:prstGeom prst="rect">
-            <a:avLst/>
-          </a:prstGeom>
-          <a:noFill/>
-        </p:spPr>
-        <p:txBody>
-          <a:bodyPr wrap="square">
-            <a:spAutoFit/>
-          </a:bodyPr>
-          <a:lstStyle/>
-          <a:p>
-            <a:pPr algn="l"/>
-            <a:r>
-              <a:rPr sz="1500" b="1">
-                <a:solidFill>
-                  <a:srgbClr val="02C39A"/>
-                </a:solidFill>
-                <a:latin typeface="Calibri"/>
-              </a:rPr>
-              <a:t>PDF Invoices</a:t>
-            </a:r>
-          </a:p>
-        </p:txBody>
-      </p:sp>
-      <p:sp>
-        <p:nvSpPr>
-          <p:cNvPr id="7" name="TextBox 6"/>
-          <p:cNvSpPr txBox="1"/>
-          <p:nvPr/>
-        </p:nvSpPr>
-        <p:spPr>
-          <a:xfrm>
-            <a:off x="502920" y="1691640"/>
-            <a:ext cx="3383280" cy="1280160"/>
-          </a:xfrm>
-          <a:prstGeom prst="rect">
-            <a:avLst/>
-          </a:prstGeom>
-          <a:noFill/>
-        </p:spPr>
-        <p:txBody>
-          <a:bodyPr wrap="square">
-            <a:spAutoFit/>
-          </a:bodyPr>
-          <a:lstStyle/>
-          <a:p>
-            <a:pPr algn="l"/>
-            <a:r>
-              <a:rPr sz="1200" b="0">
-                <a:solidFill>
-                  <a:srgbClr val="FFFFFF"/>
-                </a:solidFill>
-                <a:latin typeface="Calibri"/>
-              </a:rPr>
-              <a:t>Azure Form Recognizer extracts structured fields — vendor, amount, line items, PO reference</a:t>
-            </a:r>
-          </a:p>
-        </p:txBody>
-      </p:sp>
-      <p:sp>
-        <p:nvSpPr>
-          <p:cNvPr id="8" name="Rectangle 7"/>
-          <p:cNvSpPr/>
-          <p:nvPr/>
-        </p:nvSpPr>
-        <p:spPr>
-          <a:xfrm>
-            <a:off x="4297680" y="1097280"/>
-            <a:ext cx="3657600" cy="2011680"/>
-          </a:xfrm>
-          <a:prstGeom prst="rect">
-            <a:avLst/>
-          </a:prstGeom>
-          <a:solidFill>
-            <a:srgbClr val="36454F"/>
-          </a:solidFill>
-          <a:ln w="12700">
-            <a:solidFill>
-              <a:srgbClr val="028090"/>
-            </a:solidFill>
-          </a:ln>
-        </p:spPr>
-        <p:style>
-          <a:lnRef idx="1">
-            <a:schemeClr val="accent1"/>
-          </a:lnRef>
-          <a:fillRef idx="3">
-            <a:schemeClr val="accent1"/>
-          </a:fillRef>
-          <a:effectRef idx="2">
-            <a:schemeClr val="accent1"/>
-          </a:effectRef>
-          <a:fontRef idx="minor">
-            <a:schemeClr val="lt1"/>
-          </a:fontRef>
-        </p:style>
-        <p:txBody>
-          <a:bodyPr rtlCol="0" anchor="ctr"/>
-          <a:lstStyle/>
-          <a:p>
-            <a:pPr algn="ctr"/>
-          </a:p>
-        </p:txBody>
-      </p:sp>
-      <p:sp>
-        <p:nvSpPr>
-          <p:cNvPr id="9" name="TextBox 8"/>
-          <p:cNvSpPr txBox="1"/>
-          <p:nvPr/>
-        </p:nvSpPr>
-        <p:spPr>
-          <a:xfrm>
-            <a:off x="4434840" y="1234440"/>
-            <a:ext cx="3383280" cy="457200"/>
-          </a:xfrm>
-          <a:prstGeom prst="rect">
-            <a:avLst/>
-          </a:prstGeom>
-          <a:noFill/>
-        </p:spPr>
-        <p:txBody>
-          <a:bodyPr wrap="square">
-            <a:spAutoFit/>
-          </a:bodyPr>
-          <a:lstStyle/>
-          <a:p>
-            <a:pPr algn="l"/>
-            <a:r>
-              <a:rPr sz="1500" b="1">
-                <a:solidFill>
-                  <a:srgbClr val="02C39A"/>
-                </a:solidFill>
-                <a:latin typeface="Calibri"/>
-              </a:rPr>
-              <a:t>Email Feeds</a:t>
-            </a:r>
-          </a:p>
-        </p:txBody>
-      </p:sp>
-      <p:sp>
-        <p:nvSpPr>
-          <p:cNvPr id="10" name="TextBox 9"/>
-          <p:cNvSpPr txBox="1"/>
-          <p:nvPr/>
-        </p:nvSpPr>
-        <p:spPr>
-          <a:xfrm>
-            <a:off x="4434840" y="1691640"/>
-            <a:ext cx="3383280" cy="1280160"/>
-          </a:xfrm>
-          <a:prstGeom prst="rect">
-            <a:avLst/>
-          </a:prstGeom>
-          <a:noFill/>
-        </p:spPr>
-        <p:txBody>
-          <a:bodyPr wrap="square">
-            <a:spAutoFit/>
-          </a:bodyPr>
-          <a:lstStyle/>
-          <a:p>
-            <a:pPr algn="l"/>
-            <a:r>
-              <a:rPr sz="1200" b="0">
-                <a:solidFill>
-                  <a:srgbClr val="FFFFFF"/>
-                </a:solidFill>
-                <a:latin typeface="Calibri"/>
-              </a:rPr>
-              <a:t>Microsoft Graph API monitors AP inbox. Attachments parsed automatically</a:t>
-            </a:r>
-          </a:p>
-        </p:txBody>
-      </p:sp>
-      <p:sp>
-        <p:nvSpPr>
-          <p:cNvPr id="11" name="Rectangle 10"/>
-          <p:cNvSpPr/>
-          <p:nvPr/>
-        </p:nvSpPr>
-        <p:spPr>
-          <a:xfrm>
-            <a:off x="8229600" y="1097280"/>
-            <a:ext cx="3657600" cy="2011680"/>
-          </a:xfrm>
-          <a:prstGeom prst="rect">
-            <a:avLst/>
-          </a:prstGeom>
-          <a:solidFill>
-            <a:srgbClr val="36454F"/>
-          </a:solidFill>
-          <a:ln w="12700">
-            <a:solidFill>
-              <a:srgbClr val="028090"/>
-            </a:solidFill>
-          </a:ln>
-        </p:spPr>
-        <p:style>
-          <a:lnRef idx="1">
-            <a:schemeClr val="accent1"/>
-          </a:lnRef>
-          <a:fillRef idx="3">
-            <a:schemeClr val="accent1"/>
-          </a:fillRef>
-          <a:effectRef idx="2">
-            <a:schemeClr val="accent1"/>
-          </a:effectRef>
-          <a:fontRef idx="minor">
-            <a:schemeClr val="lt1"/>
-          </a:fontRef>
-        </p:style>
-        <p:txBody>
-          <a:bodyPr rtlCol="0" anchor="ctr"/>
-          <a:lstStyle/>
-          <a:p>
-            <a:pPr algn="ctr"/>
-          </a:p>
-        </p:txBody>
-      </p:sp>
-      <p:sp>
-        <p:nvSpPr>
-          <p:cNvPr id="12" name="TextBox 11"/>
-          <p:cNvSpPr txBox="1"/>
-          <p:nvPr/>
-        </p:nvSpPr>
-        <p:spPr>
-          <a:xfrm>
-            <a:off x="8366760" y="1234440"/>
-            <a:ext cx="3383280" cy="457200"/>
-          </a:xfrm>
-          <a:prstGeom prst="rect">
-            <a:avLst/>
-          </a:prstGeom>
-          <a:noFill/>
-        </p:spPr>
-        <p:txBody>
-          <a:bodyPr wrap="square">
-            <a:spAutoFit/>
-          </a:bodyPr>
-          <a:lstStyle/>
-          <a:p>
-            <a:pPr algn="l"/>
-            <a:r>
-              <a:rPr sz="1500" b="1">
-                <a:solidFill>
-                  <a:srgbClr val="02C39A"/>
-                </a:solidFill>
-                <a:latin typeface="Calibri"/>
-              </a:rPr>
-              <a:t>EDI Feeds</a:t>
-            </a:r>
-          </a:p>
-        </p:txBody>
-      </p:sp>
-      <p:sp>
-        <p:nvSpPr>
-          <p:cNvPr id="13" name="TextBox 12"/>
-          <p:cNvSpPr txBox="1"/>
-          <p:nvPr/>
-        </p:nvSpPr>
-        <p:spPr>
-          <a:xfrm>
-            <a:off x="8366760" y="1691640"/>
-            <a:ext cx="3383280" cy="1280160"/>
-          </a:xfrm>
-          <a:prstGeom prst="rect">
-            <a:avLst/>
-          </a:prstGeom>
-          <a:noFill/>
-        </p:spPr>
-        <p:txBody>
-          <a:bodyPr wrap="square">
-            <a:spAutoFit/>
-          </a:bodyPr>
-          <a:lstStyle/>
-          <a:p>
-            <a:pPr algn="l"/>
-            <a:r>
-              <a:rPr sz="1200" b="0">
-                <a:solidFill>
-                  <a:srgbClr val="FFFFFF"/>
-                </a:solidFill>
-                <a:latin typeface="Calibri"/>
-              </a:rPr>
-              <a:t>X12/EDIFACT EDI messages ingested via Azure Logic Apps and normalized to common schema</a:t>
-            </a:r>
-          </a:p>
-        </p:txBody>
-      </p:sp>
-      <p:sp>
-        <p:nvSpPr>
-          <p:cNvPr id="14" name="Rectangle 13"/>
-          <p:cNvSpPr/>
-          <p:nvPr/>
-        </p:nvSpPr>
-        <p:spPr>
-          <a:xfrm>
-            <a:off x="365760" y="3383280"/>
-            <a:ext cx="11430000" cy="2651760"/>
-          </a:xfrm>
-          <a:prstGeom prst="rect">
-            <a:avLst/>
-          </a:prstGeom>
-          <a:solidFill>
-            <a:srgbClr val="36454F"/>
-          </a:solidFill>
-          <a:ln w="12700">
-            <a:solidFill>
-              <a:srgbClr val="028090"/>
-            </a:solidFill>
-          </a:ln>
-        </p:spPr>
-        <p:style>
-          <a:lnRef idx="1">
-            <a:schemeClr val="accent1"/>
-          </a:lnRef>
-          <a:fillRef idx="3">
-            <a:schemeClr val="accent1"/>
-          </a:fillRef>
-          <a:effectRef idx="2">
-            <a:schemeClr val="accent1"/>
-          </a:effectRef>
-          <a:fontRef idx="minor">
-            <a:schemeClr val="lt1"/>
-          </a:fontRef>
-        </p:style>
-        <p:txBody>
-          <a:bodyPr rtlCol="0" anchor="ctr"/>
-          <a:lstStyle/>
-          <a:p>
-            <a:pPr algn="ctr"/>
-          </a:p>
-        </p:txBody>
-      </p:sp>
-      <p:sp>
-        <p:nvSpPr>
-          <p:cNvPr id="15" name="TextBox 14"/>
-          <p:cNvSpPr txBox="1"/>
-          <p:nvPr/>
-        </p:nvSpPr>
-        <p:spPr>
-          <a:xfrm>
-            <a:off x="548640" y="3520440"/>
-            <a:ext cx="10972800" cy="2377440"/>
-          </a:xfrm>
-          <a:prstGeom prst="rect">
-            <a:avLst/>
-          </a:prstGeom>
-          <a:noFill/>
-        </p:spPr>
-        <p:txBody>
-          <a:bodyPr wrap="square">
-            <a:spAutoFit/>
-          </a:bodyPr>
-          <a:lstStyle/>
-          <a:p>
-            <a:r>
-              <a:rPr sz="1300" b="1">
-                <a:solidFill>
-                  <a:srgbClr val="02C39A"/>
-                </a:solidFill>
-                <a:latin typeface="Calibri"/>
-              </a:rPr>
-              <a:t>Pipeline Design Decisions</a:t>
-            </a:r>
-          </a:p>
-          <a:p>
-            <a:pPr>
-              <a:spcBef>
-                <a:spcPts val="400"/>
-              </a:spcBef>
-            </a:pPr>
-            <a:r>
-              <a:rPr sz="1200">
-                <a:solidFill>
-                  <a:srgbClr val="FFFFFF"/>
-                </a:solidFill>
-                <a:latin typeface="Calibri"/>
-              </a:rPr>
-              <a:t>  All ingested data normalized to a common Invoice schema before processing</a:t>
-            </a:r>
-          </a:p>
-          <a:p>
-            <a:pPr>
-              <a:spcBef>
-                <a:spcPts val="400"/>
-              </a:spcBef>
-            </a:pPr>
-            <a:r>
-              <a:rPr sz="1200">
-                <a:solidFill>
-                  <a:srgbClr val="FFFFFF"/>
-                </a:solidFill>
-                <a:latin typeface="Calibri"/>
-              </a:rPr>
-              <a:t>  Azure Data Factory orchestrates batch + streaming ingestion pipelines</a:t>
-            </a:r>
-          </a:p>
-          <a:p>
-            <a:pPr>
-              <a:spcBef>
-                <a:spcPts val="400"/>
-              </a:spcBef>
-            </a:pPr>
-            <a:r>
-              <a:rPr sz="1200">
-                <a:solidFill>
-                  <a:srgbClr val="FFFFFF"/>
-                </a:solidFill>
-                <a:latin typeface="Calibri"/>
-              </a:rPr>
-              <a:t>  Raw files stored in AWS S3 (immutable) for audit trail and reprocessing</a:t>
-            </a:r>
-          </a:p>
-          <a:p>
-            <a:pPr>
-              <a:spcBef>
-                <a:spcPts val="400"/>
-              </a:spcBef>
-            </a:pPr>
-            <a:r>
-              <a:rPr sz="1200">
-                <a:solidFill>
-                  <a:srgbClr val="FFFFFF"/>
-                </a:solidFill>
-                <a:latin typeface="Calibri"/>
-              </a:rPr>
-              <a:t>  PII fields (vendor names, bank details) encrypted at rest — GDPR Article 32</a:t>
-            </a:r>
-          </a:p>
-          <a:p>
-            <a:pPr>
-              <a:spcBef>
-                <a:spcPts val="400"/>
-              </a:spcBef>
-            </a:pPr>
-            <a:r>
-              <a:rPr sz="1200">
-                <a:solidFill>
-                  <a:srgbClr val="FFFFFF"/>
-                </a:solidFill>
-                <a:latin typeface="Calibri"/>
-              </a:rPr>
-              <a:t>  Schema validation rejects malformed invoices before they enter the pipeline</a:t>
-            </a:r>
-          </a:p>
-        </p:txBody>
-      </p:sp>
+      <p:pic>
+        <p:nvPicPr>
+          <p:cNvPr id="5" name="Picture 4" descr="diagram_architecture_layers.png"/>
+          <p:cNvPicPr>
+            <a:picLocks noChangeAspect="1"/>
+          </p:cNvPicPr>
+          <p:nvPr/>
+        </p:nvPicPr>
+        <p:blipFill>
+          <a:blip r:embed="rId2"/>
+          <a:stretch>
+            <a:fillRect/>
+          </a:stretch>
+        </p:blipFill>
+        <p:spPr>
+          <a:xfrm>
+            <a:off x="274320" y="1005840"/>
+            <a:ext cx="11612880" cy="5577840"/>
+          </a:xfrm>
+          <a:prstGeom prst="rect">
+            <a:avLst/>
+          </a:prstGeom>
+        </p:spPr>
+      </p:pic>
     </p:spTree>
   </p:cSld>
   <p:clrMapOvr>
@@ -8440,7 +7594,7 @@
             <a:avLst/>
           </a:prstGeom>
           <a:solidFill>
-            <a:srgbClr val="1E2761"/>
+            <a:srgbClr val="FFFFFF"/>
           </a:solidFill>
           <a:ln>
             <a:noFill/>
@@ -8476,8 +7630,8 @@
         </p:nvSpPr>
         <p:spPr>
           <a:xfrm>
-            <a:off x="548640" y="274320"/>
-            <a:ext cx="10972800" cy="731520"/>
+            <a:off x="548640" y="228600"/>
+            <a:ext cx="10972800" cy="640080"/>
           </a:xfrm>
           <a:prstGeom prst="rect">
             <a:avLst/>
@@ -8485,20 +7639,20 @@
           <a:noFill/>
         </p:spPr>
         <p:txBody>
-          <a:bodyPr wrap="none">
+          <a:bodyPr wrap="square">
             <a:spAutoFit/>
           </a:bodyPr>
           <a:lstStyle/>
           <a:p>
             <a:pPr algn="l"/>
             <a:r>
-              <a:rPr sz="3200" b="1">
-                <a:solidFill>
-                  <a:srgbClr val="FFFFFF"/>
-                </a:solidFill>
-                <a:latin typeface="Calibri"/>
-              </a:rPr>
-              <a:t>ML Matching Model — D2</a:t>
+              <a:rPr sz="2800" b="1" i="0">
+                <a:solidFill>
+                  <a:srgbClr val="1A1A2E"/>
+                </a:solidFill>
+                <a:latin typeface="Calibri"/>
+              </a:rPr>
+              <a:t>Data Ingestion Layer</a:t>
             </a:r>
           </a:p>
         </p:txBody>
@@ -8511,14 +7665,14 @@
         </p:nvSpPr>
         <p:spPr>
           <a:xfrm>
-            <a:off x="548640" y="868680"/>
-            <a:ext cx="2286000" cy="45720"/>
+            <a:off x="548640" y="822960"/>
+            <a:ext cx="11064240" cy="36576"/>
           </a:xfrm>
           <a:prstGeom prst="rect">
             <a:avLst/>
           </a:prstGeom>
           <a:solidFill>
-            <a:srgbClr val="028090"/>
+            <a:srgbClr val="2E75B6"/>
           </a:solidFill>
           <a:ln>
             <a:noFill/>
@@ -8548,24 +7702,59 @@
       </p:sp>
       <p:sp>
         <p:nvSpPr>
-          <p:cNvPr id="5" name="Rectangle 4"/>
+          <p:cNvPr id="5" name="TextBox 4"/>
+          <p:cNvSpPr txBox="1"/>
+          <p:nvPr/>
+        </p:nvSpPr>
+        <p:spPr>
+          <a:xfrm>
+            <a:off x="548640" y="868680"/>
+            <a:ext cx="10972800" cy="365760"/>
+          </a:xfrm>
+          <a:prstGeom prst="rect">
+            <a:avLst/>
+          </a:prstGeom>
+          <a:noFill/>
+        </p:spPr>
+        <p:txBody>
+          <a:bodyPr wrap="square">
+            <a:spAutoFit/>
+          </a:bodyPr>
+          <a:lstStyle/>
+          <a:p>
+            <a:pPr algn="l"/>
+            <a:r>
+              <a:rPr sz="1200" b="0" i="1">
+                <a:solidFill>
+                  <a:srgbClr val="595959"/>
+                </a:solidFill>
+                <a:latin typeface="Calibri"/>
+              </a:rPr>
+              <a:t>Three input channels — all normalised to common schema before processing</a:t>
+            </a:r>
+          </a:p>
+        </p:txBody>
+      </p:sp>
+      <p:sp>
+        <p:nvSpPr>
+          <p:cNvPr id="6" name="Rectangle 5"/>
           <p:cNvSpPr/>
           <p:nvPr/>
         </p:nvSpPr>
         <p:spPr>
           <a:xfrm>
-            <a:off x="365760" y="1097280"/>
-            <a:ext cx="5303520" cy="5120640"/>
+            <a:off x="457200" y="1188720"/>
+            <a:ext cx="3657600" cy="5029200"/>
           </a:xfrm>
           <a:prstGeom prst="rect">
             <a:avLst/>
           </a:prstGeom>
           <a:solidFill>
-            <a:srgbClr val="36454F"/>
+            <a:srgbClr val="F2F2F2"/>
           </a:solidFill>
           <a:ln w="12700">
             <a:solidFill>
-              <a:srgbClr val="028090"/>
+              <a:srgbClr val="CCCCCC"/>
             </a:solidFill>
           </a:ln>
         </p:spPr>
@@ -8593,14 +7782,14 @@
       </p:sp>
       <p:sp>
         <p:nvSpPr>
-          <p:cNvPr id="6" name="TextBox 5"/>
+          <p:cNvPr id="7" name="TextBox 6"/>
           <p:cNvSpPr txBox="1"/>
           <p:nvPr/>
         </p:nvSpPr>
         <p:spPr>
           <a:xfrm>
-            <a:off x="548640" y="1188720"/>
-            <a:ext cx="4937760" cy="2194560"/>
+            <a:off x="594360" y="1280160"/>
+            <a:ext cx="3383280" cy="457200"/>
           </a:xfrm>
           <a:prstGeom prst="rect">
             <a:avLst/>
@@ -8613,224 +7802,15 @@
           </a:bodyPr>
           <a:lstStyle/>
           <a:p>
-            <a:r>
-              <a:rPr sz="1300" b="1">
-                <a:solidFill>
-                  <a:srgbClr val="02C39A"/>
-                </a:solidFill>
-                <a:latin typeface="Calibri"/>
-              </a:rPr>
-              <a:t>Layer 1 — Rule-Based Engine</a:t>
-            </a:r>
-          </a:p>
-          <a:p>
-            <a:pPr>
-              <a:spcBef>
-                <a:spcPts val="400"/>
-              </a:spcBef>
-            </a:pPr>
-            <a:r>
-              <a:rPr sz="1200">
-                <a:solidFill>
-                  <a:srgbClr val="FFFFFF"/>
-                </a:solidFill>
-                <a:latin typeface="Calibri"/>
-              </a:rPr>
-              <a:t>  Quantity mismatch: invoice qty != PO qty</a:t>
-            </a:r>
-          </a:p>
-          <a:p>
-            <a:pPr>
-              <a:spcBef>
-                <a:spcPts val="400"/>
-              </a:spcBef>
-            </a:pPr>
-            <a:r>
-              <a:rPr sz="1200">
-                <a:solidFill>
-                  <a:srgbClr val="FFFFFF"/>
-                </a:solidFill>
-                <a:latin typeface="Calibri"/>
-              </a:rPr>
-              <a:t>  Price mismatch: deviation &gt; 1% from agreed PO price</a:t>
-            </a:r>
-          </a:p>
-          <a:p>
-            <a:pPr>
-              <a:spcBef>
-                <a:spcPts val="400"/>
-              </a:spcBef>
-            </a:pPr>
-            <a:r>
-              <a:rPr sz="1200">
-                <a:solidFill>
-                  <a:srgbClr val="FFFFFF"/>
-                </a:solidFill>
-                <a:latin typeface="Calibri"/>
-              </a:rPr>
-              <a:t>  GRN not received: goods receipt qty = 0</a:t>
-            </a:r>
-          </a:p>
-          <a:p>
-            <a:pPr>
-              <a:spcBef>
-                <a:spcPts val="400"/>
-              </a:spcBef>
-            </a:pPr>
-            <a:r>
-              <a:rPr sz="1200">
-                <a:solidFill>
-                  <a:srgbClr val="FFFFFF"/>
-                </a:solidFill>
-                <a:latin typeface="Calibri"/>
-              </a:rPr>
-              <a:t>  Duplicate invoice: same invoice_id submitted twice</a:t>
-            </a:r>
-          </a:p>
-          <a:p>
-            <a:pPr>
-              <a:spcBef>
-                <a:spcPts val="400"/>
-              </a:spcBef>
-            </a:pPr>
-            <a:r>
-              <a:rPr sz="1200">
-                <a:solidFill>
-                  <a:srgbClr val="FFFFFF"/>
-                </a:solidFill>
-                <a:latin typeface="Calibri"/>
-              </a:rPr>
-              <a:t>  Item not in PO: item code not on purchase order</a:t>
-            </a:r>
-          </a:p>
-          <a:p>
-            <a:pPr>
-              <a:spcBef>
-                <a:spcPts val="400"/>
-              </a:spcBef>
-            </a:pPr>
-            <a:r>
-              <a:rPr sz="1200">
-                <a:solidFill>
-                  <a:srgbClr val="FFFFFF"/>
-                </a:solidFill>
-                <a:latin typeface="Calibri"/>
-              </a:rPr>
-              <a:t>  Currency mismatch: invoice currency != PO currency</a:t>
-            </a:r>
-          </a:p>
-        </p:txBody>
-      </p:sp>
-      <p:sp>
-        <p:nvSpPr>
-          <p:cNvPr id="7" name="TextBox 6"/>
-          <p:cNvSpPr txBox="1"/>
-          <p:nvPr/>
-        </p:nvSpPr>
-        <p:spPr>
-          <a:xfrm>
-            <a:off x="548640" y="3566160"/>
-            <a:ext cx="4937760" cy="2468880"/>
-          </a:xfrm>
-          <a:prstGeom prst="rect">
-            <a:avLst/>
-          </a:prstGeom>
-          <a:noFill/>
-        </p:spPr>
-        <p:txBody>
-          <a:bodyPr wrap="square">
-            <a:spAutoFit/>
-          </a:bodyPr>
-          <a:lstStyle/>
-          <a:p>
-            <a:r>
-              <a:rPr sz="1300" b="1">
-                <a:solidFill>
-                  <a:srgbClr val="02C39A"/>
-                </a:solidFill>
-                <a:latin typeface="Calibri"/>
-              </a:rPr>
-              <a:t>Layer 2 — Random Forest ML</a:t>
-            </a:r>
-          </a:p>
-          <a:p>
-            <a:pPr>
-              <a:spcBef>
-                <a:spcPts val="400"/>
-              </a:spcBef>
-            </a:pPr>
-            <a:r>
-              <a:rPr sz="1200">
-                <a:solidFill>
-                  <a:srgbClr val="FFFFFF"/>
-                </a:solidFill>
-                <a:latin typeface="Calibri"/>
-              </a:rPr>
-              <a:t>  13 engineered features: qty delta %, price delta %, GRN gap</a:t>
-            </a:r>
-          </a:p>
-          <a:p>
-            <a:pPr>
-              <a:spcBef>
-                <a:spcPts val="400"/>
-              </a:spcBef>
-            </a:pPr>
-            <a:r>
-              <a:rPr sz="1200">
-                <a:solidFill>
-                  <a:srgbClr val="FFFFFF"/>
-                </a:solidFill>
-                <a:latin typeface="Calibri"/>
-              </a:rPr>
-              <a:t>  Random Forest — 100 trees, balanced class weights</a:t>
-            </a:r>
-          </a:p>
-          <a:p>
-            <a:pPr>
-              <a:spcBef>
-                <a:spcPts val="400"/>
-              </a:spcBef>
-            </a:pPr>
-            <a:r>
-              <a:rPr sz="1200">
-                <a:solidFill>
-                  <a:srgbClr val="FFFFFF"/>
-                </a:solidFill>
-                <a:latin typeface="Calibri"/>
-              </a:rPr>
-              <a:t>  Trained on 1,200 labeled examples (80/20 split)</a:t>
-            </a:r>
-          </a:p>
-          <a:p>
-            <a:pPr>
-              <a:spcBef>
-                <a:spcPts val="400"/>
-              </a:spcBef>
-            </a:pPr>
-            <a:r>
-              <a:rPr sz="1200">
-                <a:solidFill>
-                  <a:srgbClr val="FFFFFF"/>
-                </a:solidFill>
-                <a:latin typeface="Calibri"/>
-              </a:rPr>
-              <a:t>  Why Random Forest: interpretable, fast, handles class imbalance</a:t>
-            </a:r>
-          </a:p>
-          <a:p>
-            <a:pPr>
-              <a:spcBef>
-                <a:spcPts val="400"/>
-              </a:spcBef>
-            </a:pPr>
-            <a:r>
-              <a:rPr sz="1200">
-                <a:solidFill>
-                  <a:srgbClr val="FFFFFF"/>
-                </a:solidFill>
-                <a:latin typeface="Calibri"/>
-              </a:rPr>
-              <a:t>  Not XGBoost: RF gives feature importance out-of-box for audit</a:t>
+            <a:pPr algn="l"/>
+            <a:r>
+              <a:rPr sz="1300" b="1" i="0">
+                <a:solidFill>
+                  <a:srgbClr val="2E75B6"/>
+                </a:solidFill>
+                <a:latin typeface="Calibri"/>
+              </a:rPr>
+              <a:t>Email (MS Graph API)</a:t>
             </a:r>
           </a:p>
         </p:txBody>
@@ -8843,19 +7823,17 @@
         </p:nvSpPr>
         <p:spPr>
           <a:xfrm>
-            <a:off x="5943600" y="1097280"/>
-            <a:ext cx="5852160" cy="5120640"/>
+            <a:off x="594360" y="1737360"/>
+            <a:ext cx="3200400" cy="36576"/>
           </a:xfrm>
           <a:prstGeom prst="rect">
             <a:avLst/>
           </a:prstGeom>
           <a:solidFill>
-            <a:srgbClr val="36454F"/>
+            <a:srgbClr val="CCCCCC"/>
           </a:solidFill>
-          <a:ln w="12700">
-            <a:solidFill>
-              <a:srgbClr val="028090"/>
-            </a:solidFill>
+          <a:ln>
+            <a:noFill/>
           </a:ln>
         </p:spPr>
         <p:style>
@@ -8888,8 +7866,8 @@
         </p:nvSpPr>
         <p:spPr>
           <a:xfrm>
-            <a:off x="6126480" y="1188720"/>
-            <a:ext cx="5486400" cy="411480"/>
+            <a:off x="594360" y="1828800"/>
+            <a:ext cx="3383280" cy="3200400"/>
           </a:xfrm>
           <a:prstGeom prst="rect">
             <a:avLst/>
@@ -8902,15 +7880,67 @@
           </a:bodyPr>
           <a:lstStyle/>
           <a:p>
-            <a:pPr algn="l"/>
-            <a:r>
-              <a:rPr sz="1500" b="1">
-                <a:solidFill>
-                  <a:srgbClr val="02C39A"/>
-                </a:solidFill>
-                <a:latin typeface="Calibri"/>
-              </a:rPr>
-              <a:t>Evaluation Results</a:t>
+            <a:pPr>
+              <a:spcBef>
+                <a:spcPts val="300"/>
+              </a:spcBef>
+            </a:pPr>
+            <a:r>
+              <a:rPr sz="1200">
+                <a:solidFill>
+                  <a:srgbClr val="1A1A2E"/>
+                </a:solidFill>
+                <a:latin typeface="Calibri"/>
+              </a:rPr>
+              <a:t>• Graph API monitors AP inbox 24/7</a:t>
+            </a:r>
+          </a:p>
+          <a:p>
+            <a:pPr>
+              <a:spcBef>
+                <a:spcPts val="300"/>
+              </a:spcBef>
+            </a:pPr>
+            <a:r>
+              <a:rPr sz="1200">
+                <a:solidFill>
+                  <a:srgbClr val="1A1A2E"/>
+                </a:solidFill>
+                <a:latin typeface="Calibri"/>
+              </a:rPr>
+              <a:t>• New email triggers event automatically</a:t>
+            </a:r>
+          </a:p>
+          <a:p>
+            <a:pPr>
+              <a:spcBef>
+                <a:spcPts val="300"/>
+              </a:spcBef>
+            </a:pPr>
+            <a:r>
+              <a:rPr sz="1200">
+                <a:solidFill>
+                  <a:srgbClr val="1A1A2E"/>
+                </a:solidFill>
+                <a:latin typeface="Calibri"/>
+              </a:rPr>
+              <a:t>• PDF attachment saved to Azure Blob</a:t>
+            </a:r>
+          </a:p>
+          <a:p>
+            <a:pPr>
+              <a:spcBef>
+                <a:spcPts val="300"/>
+              </a:spcBef>
+            </a:pPr>
+            <a:r>
+              <a:rPr sz="1200">
+                <a:solidFill>
+                  <a:srgbClr val="1A1A2E"/>
+                </a:solidFill>
+                <a:latin typeface="Calibri"/>
+              </a:rPr>
+              <a:t>• Form Recognizer extracts structured data</a:t>
             </a:r>
           </a:p>
         </p:txBody>
@@ -8923,18 +7953,18 @@
         </p:nvSpPr>
         <p:spPr>
           <a:xfrm>
-            <a:off x="6035040" y="1737360"/>
-            <a:ext cx="5577840" cy="594360"/>
+            <a:off x="4343400" y="1188720"/>
+            <a:ext cx="3657600" cy="5029200"/>
           </a:xfrm>
           <a:prstGeom prst="rect">
             <a:avLst/>
           </a:prstGeom>
           <a:solidFill>
-            <a:srgbClr val="1E2761"/>
+            <a:srgbClr val="F2F2F2"/>
           </a:solidFill>
           <a:ln w="12700">
             <a:solidFill>
-              <a:srgbClr val="028090"/>
+              <a:srgbClr val="CCCCCC"/>
             </a:solidFill>
           </a:ln>
         </p:spPr>
@@ -8968,8 +7998,8 @@
         </p:nvSpPr>
         <p:spPr>
           <a:xfrm>
-            <a:off x="6172200" y="1810512"/>
-            <a:ext cx="3657600" cy="411480"/>
+            <a:off x="4480560" y="1280160"/>
+            <a:ext cx="3383280" cy="457200"/>
           </a:xfrm>
           <a:prstGeom prst="rect">
             <a:avLst/>
@@ -8984,73 +8014,36 @@
           <a:p>
             <a:pPr algn="l"/>
             <a:r>
-              <a:rPr sz="1300" b="0">
-                <a:solidFill>
-                  <a:srgbClr val="E2E8F0"/>
-                </a:solidFill>
-                <a:latin typeface="Calibri"/>
-              </a:rPr>
-              <a:t>Overall Accuracy</a:t>
-            </a:r>
-          </a:p>
-        </p:txBody>
-      </p:sp>
-      <p:sp>
-        <p:nvSpPr>
-          <p:cNvPr id="12" name="TextBox 11"/>
-          <p:cNvSpPr txBox="1"/>
-          <p:nvPr/>
-        </p:nvSpPr>
-        <p:spPr>
-          <a:xfrm>
-            <a:off x="9875520" y="1810512"/>
-            <a:ext cx="1554480" cy="411480"/>
-          </a:xfrm>
-          <a:prstGeom prst="rect">
-            <a:avLst/>
-          </a:prstGeom>
-          <a:noFill/>
-        </p:spPr>
-        <p:txBody>
-          <a:bodyPr wrap="square">
-            <a:spAutoFit/>
-          </a:bodyPr>
-          <a:lstStyle/>
-          <a:p>
-            <a:pPr algn="r"/>
-            <a:r>
-              <a:rPr sz="1400" b="1">
-                <a:solidFill>
-                  <a:srgbClr val="02C39A"/>
-                </a:solidFill>
-                <a:latin typeface="Calibri"/>
-              </a:rPr>
-              <a:t>89%</a:t>
-            </a:r>
-          </a:p>
-        </p:txBody>
-      </p:sp>
-      <p:sp>
-        <p:nvSpPr>
-          <p:cNvPr id="13" name="Rectangle 12"/>
+              <a:rPr sz="1300" b="1" i="0">
+                <a:solidFill>
+                  <a:srgbClr val="2E75B6"/>
+                </a:solidFill>
+                <a:latin typeface="Calibri"/>
+              </a:rPr>
+              <a:t>PDF (Azure Blob / SFTP)</a:t>
+            </a:r>
+          </a:p>
+        </p:txBody>
+      </p:sp>
+      <p:sp>
+        <p:nvSpPr>
+          <p:cNvPr id="12" name="Rectangle 11"/>
           <p:cNvSpPr/>
           <p:nvPr/>
         </p:nvSpPr>
         <p:spPr>
           <a:xfrm>
-            <a:off x="6035040" y="2468880"/>
-            <a:ext cx="5577840" cy="594360"/>
+            <a:off x="4480560" y="1737360"/>
+            <a:ext cx="3200400" cy="36576"/>
           </a:xfrm>
           <a:prstGeom prst="rect">
             <a:avLst/>
           </a:prstGeom>
           <a:solidFill>
-            <a:srgbClr val="1E2761"/>
+            <a:srgbClr val="CCCCCC"/>
           </a:solidFill>
-          <a:ln w="12700">
-            <a:solidFill>
-              <a:srgbClr val="028090"/>
-            </a:solidFill>
+          <a:ln>
+            <a:noFill/>
           </a:ln>
         </p:spPr>
         <p:style>
@@ -9077,14 +8070,14 @@
       </p:sp>
       <p:sp>
         <p:nvSpPr>
-          <p:cNvPr id="14" name="TextBox 13"/>
+          <p:cNvPr id="13" name="TextBox 12"/>
           <p:cNvSpPr txBox="1"/>
           <p:nvPr/>
         </p:nvSpPr>
         <p:spPr>
           <a:xfrm>
-            <a:off x="6172200" y="2542032"/>
-            <a:ext cx="3657600" cy="411480"/>
+            <a:off x="4480560" y="1828800"/>
+            <a:ext cx="3383280" cy="3200400"/>
           </a:xfrm>
           <a:prstGeom prst="rect">
             <a:avLst/>
@@ -9097,74 +8090,91 @@
           </a:bodyPr>
           <a:lstStyle/>
           <a:p>
-            <a:pPr algn="l"/>
-            <a:r>
-              <a:rPr sz="1300" b="0">
-                <a:solidFill>
-                  <a:srgbClr val="E2E8F0"/>
-                </a:solidFill>
-                <a:latin typeface="Calibri"/>
-              </a:rPr>
-              <a:t>Precision (MISMATCH)</a:t>
-            </a:r>
-          </a:p>
-        </p:txBody>
-      </p:sp>
-      <p:sp>
-        <p:nvSpPr>
-          <p:cNvPr id="15" name="TextBox 14"/>
-          <p:cNvSpPr txBox="1"/>
-          <p:nvPr/>
-        </p:nvSpPr>
-        <p:spPr>
-          <a:xfrm>
-            <a:off x="9875520" y="2542032"/>
-            <a:ext cx="1554480" cy="411480"/>
-          </a:xfrm>
-          <a:prstGeom prst="rect">
-            <a:avLst/>
-          </a:prstGeom>
-          <a:noFill/>
-        </p:spPr>
-        <p:txBody>
-          <a:bodyPr wrap="square">
-            <a:spAutoFit/>
-          </a:bodyPr>
-          <a:lstStyle/>
-          <a:p>
-            <a:pPr algn="r"/>
-            <a:r>
-              <a:rPr sz="1400" b="1">
-                <a:solidFill>
-                  <a:srgbClr val="02C39A"/>
-                </a:solidFill>
-                <a:latin typeface="Calibri"/>
-              </a:rPr>
-              <a:t>100%</a:t>
-            </a:r>
-          </a:p>
-        </p:txBody>
-      </p:sp>
-      <p:sp>
-        <p:nvSpPr>
-          <p:cNvPr id="16" name="Rectangle 15"/>
+            <a:pPr>
+              <a:spcBef>
+                <a:spcPts val="300"/>
+              </a:spcBef>
+            </a:pPr>
+            <a:r>
+              <a:rPr sz="1200">
+                <a:solidFill>
+                  <a:srgbClr val="1A1A2E"/>
+                </a:solidFill>
+                <a:latin typeface="Calibri"/>
+              </a:rPr>
+              <a:t>• Vendor uploads PDF to supplier portal</a:t>
+            </a:r>
+          </a:p>
+          <a:p>
+            <a:pPr>
+              <a:spcBef>
+                <a:spcPts val="300"/>
+              </a:spcBef>
+            </a:pPr>
+            <a:r>
+              <a:rPr sz="1200">
+                <a:solidFill>
+                  <a:srgbClr val="1A1A2E"/>
+                </a:solidFill>
+                <a:latin typeface="Calibri"/>
+              </a:rPr>
+              <a:t>• Azure Data Factory detects new file</a:t>
+            </a:r>
+          </a:p>
+          <a:p>
+            <a:pPr>
+              <a:spcBef>
+                <a:spcPts val="300"/>
+              </a:spcBef>
+            </a:pPr>
+            <a:r>
+              <a:rPr sz="1200">
+                <a:solidFill>
+                  <a:srgbClr val="1A1A2E"/>
+                </a:solidFill>
+                <a:latin typeface="Calibri"/>
+              </a:rPr>
+              <a:t>• Form Recognizer reads and extracts fields</a:t>
+            </a:r>
+          </a:p>
+          <a:p>
+            <a:pPr>
+              <a:spcBef>
+                <a:spcPts val="300"/>
+              </a:spcBef>
+            </a:pPr>
+            <a:r>
+              <a:rPr sz="1200">
+                <a:solidFill>
+                  <a:srgbClr val="1A1A2E"/>
+                </a:solidFill>
+                <a:latin typeface="Calibri"/>
+              </a:rPr>
+              <a:t>• Data normalised to common invoice schema</a:t>
+            </a:r>
+          </a:p>
+        </p:txBody>
+      </p:sp>
+      <p:sp>
+        <p:nvSpPr>
+          <p:cNvPr id="14" name="Rectangle 13"/>
           <p:cNvSpPr/>
           <p:nvPr/>
         </p:nvSpPr>
         <p:spPr>
           <a:xfrm>
-            <a:off x="6035040" y="3200400"/>
-            <a:ext cx="5577840" cy="594360"/>
+            <a:off x="8229600" y="1188720"/>
+            <a:ext cx="3657600" cy="5029200"/>
           </a:xfrm>
           <a:prstGeom prst="rect">
             <a:avLst/>
           </a:prstGeom>
           <a:solidFill>
-            <a:srgbClr val="1E2761"/>
+            <a:srgbClr val="F2F2F2"/>
           </a:solidFill>
           <a:ln w="12700">
             <a:solidFill>
-              <a:srgbClr val="028090"/>
+              <a:srgbClr val="CCCCCC"/>
             </a:solidFill>
           </a:ln>
         </p:spPr>
@@ -9192,14 +8202,14 @@
       </p:sp>
       <p:sp>
         <p:nvSpPr>
-          <p:cNvPr id="17" name="TextBox 16"/>
+          <p:cNvPr id="15" name="TextBox 14"/>
           <p:cNvSpPr txBox="1"/>
           <p:nvPr/>
         </p:nvSpPr>
         <p:spPr>
           <a:xfrm>
-            <a:off x="6172200" y="3273552"/>
-            <a:ext cx="3657600" cy="411480"/>
+            <a:off x="8366760" y="1280160"/>
+            <a:ext cx="3383280" cy="457200"/>
           </a:xfrm>
           <a:prstGeom prst="rect">
             <a:avLst/>
@@ -9214,73 +8224,36 @@
           <a:p>
             <a:pPr algn="l"/>
             <a:r>
-              <a:rPr sz="1300" b="0">
-                <a:solidFill>
-                  <a:srgbClr val="E2E8F0"/>
-                </a:solidFill>
-                <a:latin typeface="Calibri"/>
-              </a:rPr>
-              <a:t>Recall (MISMATCH)</a:t>
-            </a:r>
-          </a:p>
-        </p:txBody>
-      </p:sp>
-      <p:sp>
-        <p:nvSpPr>
-          <p:cNvPr id="18" name="TextBox 17"/>
-          <p:cNvSpPr txBox="1"/>
-          <p:nvPr/>
-        </p:nvSpPr>
-        <p:spPr>
-          <a:xfrm>
-            <a:off x="9875520" y="3273552"/>
-            <a:ext cx="1554480" cy="411480"/>
-          </a:xfrm>
-          <a:prstGeom prst="rect">
-            <a:avLst/>
-          </a:prstGeom>
-          <a:noFill/>
-        </p:spPr>
-        <p:txBody>
-          <a:bodyPr wrap="square">
-            <a:spAutoFit/>
-          </a:bodyPr>
-          <a:lstStyle/>
-          <a:p>
-            <a:pPr algn="r"/>
-            <a:r>
-              <a:rPr sz="1400" b="1">
-                <a:solidFill>
-                  <a:srgbClr val="02C39A"/>
-                </a:solidFill>
-                <a:latin typeface="Calibri"/>
-              </a:rPr>
-              <a:t>57%</a:t>
-            </a:r>
-          </a:p>
-        </p:txBody>
-      </p:sp>
-      <p:sp>
-        <p:nvSpPr>
-          <p:cNvPr id="19" name="Rectangle 18"/>
+              <a:rPr sz="1300" b="1" i="0">
+                <a:solidFill>
+                  <a:srgbClr val="2E75B6"/>
+                </a:solidFill>
+                <a:latin typeface="Calibri"/>
+              </a:rPr>
+              <a:t>EDI (Azure Logic Apps)</a:t>
+            </a:r>
+          </a:p>
+        </p:txBody>
+      </p:sp>
+      <p:sp>
+        <p:nvSpPr>
+          <p:cNvPr id="16" name="Rectangle 15"/>
           <p:cNvSpPr/>
           <p:nvPr/>
         </p:nvSpPr>
         <p:spPr>
           <a:xfrm>
-            <a:off x="6035040" y="3931920"/>
-            <a:ext cx="5577840" cy="594360"/>
+            <a:off x="8366760" y="1737360"/>
+            <a:ext cx="3200400" cy="36576"/>
           </a:xfrm>
           <a:prstGeom prst="rect">
             <a:avLst/>
           </a:prstGeom>
           <a:solidFill>
-            <a:srgbClr val="1E2761"/>
+            <a:srgbClr val="CCCCCC"/>
           </a:solidFill>
-          <a:ln w="12700">
-            <a:solidFill>
-              <a:srgbClr val="028090"/>
-            </a:solidFill>
+          <a:ln>
+            <a:noFill/>
           </a:ln>
         </p:spPr>
         <p:style>
@@ -9307,14 +8280,14 @@
       </p:sp>
       <p:sp>
         <p:nvSpPr>
-          <p:cNvPr id="20" name="TextBox 19"/>
+          <p:cNvPr id="17" name="TextBox 16"/>
           <p:cNvSpPr txBox="1"/>
           <p:nvPr/>
         </p:nvSpPr>
         <p:spPr>
           <a:xfrm>
-            <a:off x="6172200" y="4005072"/>
-            <a:ext cx="3657600" cy="411480"/>
+            <a:off x="8366760" y="1828800"/>
+            <a:ext cx="3383280" cy="3200400"/>
           </a:xfrm>
           <a:prstGeom prst="rect">
             <a:avLst/>
@@ -9327,29 +8300,81 @@
           </a:bodyPr>
           <a:lstStyle/>
           <a:p>
-            <a:pPr algn="l"/>
-            <a:r>
-              <a:rPr sz="1300" b="0">
-                <a:solidFill>
-                  <a:srgbClr val="E2E8F0"/>
-                </a:solidFill>
-                <a:latin typeface="Calibri"/>
-              </a:rPr>
-              <a:t>False Positive Rate</a:t>
-            </a:r>
-          </a:p>
-        </p:txBody>
-      </p:sp>
-      <p:sp>
-        <p:nvSpPr>
-          <p:cNvPr id="21" name="TextBox 20"/>
+            <a:pPr>
+              <a:spcBef>
+                <a:spcPts val="300"/>
+              </a:spcBef>
+            </a:pPr>
+            <a:r>
+              <a:rPr sz="1200">
+                <a:solidFill>
+                  <a:srgbClr val="1A1A2E"/>
+                </a:solidFill>
+                <a:latin typeface="Calibri"/>
+              </a:rPr>
+              <a:t>• Vendor ERP sends X12/EDIFACT directly</a:t>
+            </a:r>
+          </a:p>
+          <a:p>
+            <a:pPr>
+              <a:spcBef>
+                <a:spcPts val="300"/>
+              </a:spcBef>
+            </a:pPr>
+            <a:r>
+              <a:rPr sz="1200">
+                <a:solidFill>
+                  <a:srgbClr val="1A1A2E"/>
+                </a:solidFill>
+                <a:latin typeface="Calibri"/>
+              </a:rPr>
+              <a:t>• Logic Apps receives at EDI endpoint</a:t>
+            </a:r>
+          </a:p>
+          <a:p>
+            <a:pPr>
+              <a:spcBef>
+                <a:spcPts val="300"/>
+              </a:spcBef>
+            </a:pPr>
+            <a:r>
+              <a:rPr sz="1200">
+                <a:solidFill>
+                  <a:srgbClr val="1A1A2E"/>
+                </a:solidFill>
+                <a:latin typeface="Calibri"/>
+              </a:rPr>
+              <a:t>• Fields mapped to common schema</a:t>
+            </a:r>
+          </a:p>
+          <a:p>
+            <a:pPr>
+              <a:spcBef>
+                <a:spcPts val="300"/>
+              </a:spcBef>
+            </a:pPr>
+            <a:r>
+              <a:rPr sz="1200">
+                <a:solidFill>
+                  <a:srgbClr val="1A1A2E"/>
+                </a:solidFill>
+                <a:latin typeface="Calibri"/>
+              </a:rPr>
+              <a:t>• No Form Recognizer needed — already structured</a:t>
+            </a:r>
+          </a:p>
+        </p:txBody>
+      </p:sp>
+      <p:sp>
+        <p:nvSpPr>
+          <p:cNvPr id="18" name="TextBox 17"/>
           <p:cNvSpPr txBox="1"/>
           <p:nvPr/>
         </p:nvSpPr>
         <p:spPr>
           <a:xfrm>
-            <a:off x="9875520" y="4005072"/>
-            <a:ext cx="1554480" cy="411480"/>
+            <a:off x="457200" y="6355080"/>
+            <a:ext cx="11247120" cy="365760"/>
           </a:xfrm>
           <a:prstGeom prst="rect">
             <a:avLst/>
@@ -9362,52 +8387,15 @@
           </a:bodyPr>
           <a:lstStyle/>
           <a:p>
-            <a:pPr algn="r"/>
-            <a:r>
-              <a:rPr sz="1400" b="1">
-                <a:solidFill>
-                  <a:srgbClr val="02C39A"/>
-                </a:solidFill>
-                <a:latin typeface="Calibri"/>
-              </a:rPr>
-              <a:t>0%</a:t>
-            </a:r>
-          </a:p>
-        </p:txBody>
-      </p:sp>
-      <p:sp>
-        <p:nvSpPr>
-          <p:cNvPr id="22" name="TextBox 21"/>
-          <p:cNvSpPr txBox="1"/>
-          <p:nvPr/>
-        </p:nvSpPr>
-        <p:spPr>
-          <a:xfrm>
-            <a:off x="6035040" y="4846320"/>
-            <a:ext cx="5669280" cy="1280160"/>
-          </a:xfrm>
-          <a:prstGeom prst="rect">
-            <a:avLst/>
-          </a:prstGeom>
-          <a:noFill/>
-        </p:spPr>
-        <p:txBody>
-          <a:bodyPr wrap="square">
-            <a:spAutoFit/>
-          </a:bodyPr>
-          <a:lstStyle/>
-          <a:p>
             <a:pPr algn="l"/>
             <a:r>
-              <a:rPr sz="1100" b="0">
-                <a:solidFill>
-                  <a:srgbClr val="E2E8F0"/>
-                </a:solidFill>
-                <a:latin typeface="Calibri"/>
-              </a:rPr>
-              <a:t>Design decision: 100% precision means every flag raised is actionable.
-57% recall is acceptable — missed mismatches caught in finance audit.
-False positives (blocking good invoices) are more costly than false negatives.</a:t>
+              <a:rPr sz="1100" b="0" i="1">
+                <a:solidFill>
+                  <a:srgbClr val="595959"/>
+                </a:solidFill>
+                <a:latin typeface="Calibri"/>
+              </a:rPr>
+              <a:t>All three channels produce same output: normalised invoice → Azure Event Hubs → LangGraph agent</a:t>
             </a:r>
           </a:p>
         </p:txBody>
@@ -9445,7 +8433,7 @@
             <a:avLst/>
           </a:prstGeom>
           <a:solidFill>
-            <a:srgbClr val="1E2761"/>
+            <a:srgbClr val="FFFFFF"/>
           </a:solidFill>
           <a:ln>
             <a:noFill/>
@@ -9481,8 +8469,8 @@
         </p:nvSpPr>
         <p:spPr>
           <a:xfrm>
-            <a:off x="548640" y="274320"/>
-            <a:ext cx="10972800" cy="731520"/>
+            <a:off x="548640" y="228600"/>
+            <a:ext cx="10972800" cy="640080"/>
           </a:xfrm>
           <a:prstGeom prst="rect">
             <a:avLst/>
@@ -9490,20 +8478,20 @@
           <a:noFill/>
         </p:spPr>
         <p:txBody>
-          <a:bodyPr wrap="none">
+          <a:bodyPr wrap="square">
             <a:spAutoFit/>
           </a:bodyPr>
           <a:lstStyle/>
           <a:p>
             <a:pPr algn="l"/>
             <a:r>
-              <a:rPr sz="3200" b="1">
-                <a:solidFill>
-                  <a:srgbClr val="FFFFFF"/>
-                </a:solidFill>
-                <a:latin typeface="Calibri"/>
-              </a:rPr>
-              <a:t>Agentic Workflow — D3 (LangGraph)</a:t>
+              <a:rPr sz="2800" b="1" i="0">
+                <a:solidFill>
+                  <a:srgbClr val="1A1A2E"/>
+                </a:solidFill>
+                <a:latin typeface="Calibri"/>
+              </a:rPr>
+              <a:t>Matching Model — D2</a:t>
             </a:r>
           </a:p>
         </p:txBody>
@@ -9516,14 +8504,14 @@
         </p:nvSpPr>
         <p:spPr>
           <a:xfrm>
-            <a:off x="548640" y="868680"/>
-            <a:ext cx="2286000" cy="45720"/>
+            <a:off x="548640" y="822960"/>
+            <a:ext cx="11064240" cy="36576"/>
           </a:xfrm>
           <a:prstGeom prst="rect">
             <a:avLst/>
           </a:prstGeom>
           <a:solidFill>
-            <a:srgbClr val="028090"/>
+            <a:srgbClr val="2E75B6"/>
           </a:solidFill>
           <a:ln>
             <a:noFill/>
@@ -9553,24 +8541,59 @@
       </p:sp>
       <p:sp>
         <p:nvSpPr>
-          <p:cNvPr id="5" name="Rectangle 4"/>
+          <p:cNvPr id="5" name="TextBox 4"/>
+          <p:cNvSpPr txBox="1"/>
+          <p:nvPr/>
+        </p:nvSpPr>
+        <p:spPr>
+          <a:xfrm>
+            <a:off x="548640" y="868680"/>
+            <a:ext cx="10972800" cy="365760"/>
+          </a:xfrm>
+          <a:prstGeom prst="rect">
+            <a:avLst/>
+          </a:prstGeom>
+          <a:noFill/>
+        </p:spPr>
+        <p:txBody>
+          <a:bodyPr wrap="square">
+            <a:spAutoFit/>
+          </a:bodyPr>
+          <a:lstStyle/>
+          <a:p>
+            <a:pPr algn="l"/>
+            <a:r>
+              <a:rPr sz="1200" b="0" i="1">
+                <a:solidFill>
+                  <a:srgbClr val="595959"/>
+                </a:solidFill>
+                <a:latin typeface="Calibri"/>
+              </a:rPr>
+              <a:t>Two-layer design: rules for explainability, ML for edge cases</a:t>
+            </a:r>
+          </a:p>
+        </p:txBody>
+      </p:sp>
+      <p:sp>
+        <p:nvSpPr>
+          <p:cNvPr id="6" name="Rectangle 5"/>
           <p:cNvSpPr/>
           <p:nvPr/>
         </p:nvSpPr>
         <p:spPr>
           <a:xfrm>
-            <a:off x="365760" y="1097280"/>
-            <a:ext cx="5486400" cy="1463040"/>
+            <a:off x="457200" y="1188720"/>
+            <a:ext cx="5394960" cy="4572000"/>
           </a:xfrm>
           <a:prstGeom prst="rect">
             <a:avLst/>
           </a:prstGeom>
           <a:solidFill>
-            <a:srgbClr val="36454F"/>
+            <a:srgbClr val="F2F2F2"/>
           </a:solidFill>
-          <a:ln w="19050">
+          <a:ln w="12700">
             <a:solidFill>
-              <a:srgbClr val="028090"/>
+              <a:srgbClr val="CCCCCC"/>
             </a:solidFill>
           </a:ln>
         </p:spPr>
@@ -9598,14 +8621,14 @@
       </p:sp>
       <p:sp>
         <p:nvSpPr>
-          <p:cNvPr id="6" name="TextBox 5"/>
+          <p:cNvPr id="7" name="TextBox 6"/>
           <p:cNvSpPr txBox="1"/>
           <p:nvPr/>
         </p:nvSpPr>
         <p:spPr>
           <a:xfrm>
-            <a:off x="502920" y="1188720"/>
-            <a:ext cx="5212080" cy="411480"/>
+            <a:off x="594360" y="1234440"/>
+            <a:ext cx="5120640" cy="365760"/>
           </a:xfrm>
           <a:prstGeom prst="rect">
             <a:avLst/>
@@ -9620,27 +8643,27 @@
           <a:p>
             <a:pPr algn="l"/>
             <a:r>
-              <a:rPr sz="1400" b="1">
-                <a:solidFill>
-                  <a:srgbClr val="02C39A"/>
-                </a:solidFill>
-                <a:latin typeface="Calibri"/>
-              </a:rPr>
-              <a:t>1  Load Invoice</a:t>
-            </a:r>
-          </a:p>
-        </p:txBody>
-      </p:sp>
-      <p:sp>
-        <p:nvSpPr>
-          <p:cNvPr id="7" name="TextBox 6"/>
+              <a:rPr sz="1300" b="1" i="0">
+                <a:solidFill>
+                  <a:srgbClr val="2E75B6"/>
+                </a:solidFill>
+                <a:latin typeface="Calibri"/>
+              </a:rPr>
+              <a:t>Layer 1 — Rule-Based Engine</a:t>
+            </a:r>
+          </a:p>
+        </p:txBody>
+      </p:sp>
+      <p:sp>
+        <p:nvSpPr>
+          <p:cNvPr id="8" name="TextBox 7"/>
           <p:cNvSpPr txBox="1"/>
           <p:nvPr/>
         </p:nvSpPr>
         <p:spPr>
           <a:xfrm>
-            <a:off x="502920" y="1645919"/>
-            <a:ext cx="5212080" cy="777240"/>
+            <a:off x="594360" y="1645920"/>
+            <a:ext cx="5120640" cy="4297680"/>
           </a:xfrm>
           <a:prstGeom prst="rect">
             <a:avLst/>
@@ -9653,39 +8676,123 @@
           </a:bodyPr>
           <a:lstStyle/>
           <a:p>
-            <a:pPr algn="l"/>
-            <a:r>
-              <a:rPr sz="1200" b="0">
-                <a:solidFill>
-                  <a:srgbClr val="FFFFFF"/>
-                </a:solidFill>
-                <a:latin typeface="Calibri"/>
-              </a:rPr>
-              <a:t>Fetch invoice lines, vendor, total from dataset / ERP</a:t>
-            </a:r>
-          </a:p>
-        </p:txBody>
-      </p:sp>
-      <p:sp>
-        <p:nvSpPr>
-          <p:cNvPr id="8" name="Rectangle 7"/>
+            <a:pPr>
+              <a:spcBef>
+                <a:spcPts val="300"/>
+              </a:spcBef>
+            </a:pPr>
+            <a:r>
+              <a:rPr sz="1200">
+                <a:solidFill>
+                  <a:srgbClr val="1A1A2E"/>
+                </a:solidFill>
+                <a:latin typeface="Calibri"/>
+              </a:rPr>
+              <a:t>• Quantity mismatch: invoice qty != PO qty</a:t>
+            </a:r>
+          </a:p>
+          <a:p>
+            <a:pPr>
+              <a:spcBef>
+                <a:spcPts val="300"/>
+              </a:spcBef>
+            </a:pPr>
+            <a:r>
+              <a:rPr sz="1200">
+                <a:solidFill>
+                  <a:srgbClr val="1A1A2E"/>
+                </a:solidFill>
+                <a:latin typeface="Calibri"/>
+              </a:rPr>
+              <a:t>• Price mismatch: deviation &gt; 1% from PO price</a:t>
+            </a:r>
+          </a:p>
+          <a:p>
+            <a:pPr>
+              <a:spcBef>
+                <a:spcPts val="300"/>
+              </a:spcBef>
+            </a:pPr>
+            <a:r>
+              <a:rPr sz="1200">
+                <a:solidFill>
+                  <a:srgbClr val="1A1A2E"/>
+                </a:solidFill>
+                <a:latin typeface="Calibri"/>
+              </a:rPr>
+              <a:t>• GRN not received: goods receipt qty = 0</a:t>
+            </a:r>
+          </a:p>
+          <a:p>
+            <a:pPr>
+              <a:spcBef>
+                <a:spcPts val="300"/>
+              </a:spcBef>
+            </a:pPr>
+            <a:r>
+              <a:rPr sz="1200">
+                <a:solidFill>
+                  <a:srgbClr val="1A1A2E"/>
+                </a:solidFill>
+                <a:latin typeface="Calibri"/>
+              </a:rPr>
+              <a:t>• Duplicate invoice: same ID submitted twice</a:t>
+            </a:r>
+          </a:p>
+          <a:p>
+            <a:pPr>
+              <a:spcBef>
+                <a:spcPts val="300"/>
+              </a:spcBef>
+            </a:pPr>
+            <a:r>
+              <a:rPr sz="1200">
+                <a:solidFill>
+                  <a:srgbClr val="1A1A2E"/>
+                </a:solidFill>
+                <a:latin typeface="Calibri"/>
+              </a:rPr>
+              <a:t>• Item not in PO: item code not on order</a:t>
+            </a:r>
+          </a:p>
+          <a:p>
+            <a:pPr>
+              <a:spcBef>
+                <a:spcPts val="300"/>
+              </a:spcBef>
+            </a:pPr>
+            <a:r>
+              <a:rPr sz="1200">
+                <a:solidFill>
+                  <a:srgbClr val="1A1A2E"/>
+                </a:solidFill>
+                <a:latin typeface="Calibri"/>
+              </a:rPr>
+              <a:t>• Currency mismatch: invoice != PO currency</a:t>
+            </a:r>
+          </a:p>
+        </p:txBody>
+      </p:sp>
+      <p:sp>
+        <p:nvSpPr>
+          <p:cNvPr id="9" name="Rectangle 8"/>
           <p:cNvSpPr/>
           <p:nvPr/>
         </p:nvSpPr>
         <p:spPr>
           <a:xfrm>
-            <a:off x="6309360" y="1097280"/>
-            <a:ext cx="5486400" cy="1463040"/>
+            <a:off x="6126480" y="1188720"/>
+            <a:ext cx="5669280" cy="4572000"/>
           </a:xfrm>
           <a:prstGeom prst="rect">
             <a:avLst/>
           </a:prstGeom>
           <a:solidFill>
-            <a:srgbClr val="36454F"/>
+            <a:srgbClr val="F2F2F2"/>
           </a:solidFill>
-          <a:ln w="19050">
+          <a:ln w="12700">
             <a:solidFill>
-              <a:srgbClr val="028090"/>
+              <a:srgbClr val="CCCCCC"/>
             </a:solidFill>
           </a:ln>
         </p:spPr>
@@ -9713,14 +8820,14 @@
       </p:sp>
       <p:sp>
         <p:nvSpPr>
-          <p:cNvPr id="9" name="TextBox 8"/>
+          <p:cNvPr id="10" name="TextBox 9"/>
           <p:cNvSpPr txBox="1"/>
           <p:nvPr/>
         </p:nvSpPr>
         <p:spPr>
           <a:xfrm>
-            <a:off x="6446520" y="1188720"/>
-            <a:ext cx="5212080" cy="411480"/>
+            <a:off x="6263640" y="1234440"/>
+            <a:ext cx="5394960" cy="365760"/>
           </a:xfrm>
           <a:prstGeom prst="rect">
             <a:avLst/>
@@ -9735,27 +8842,27 @@
           <a:p>
             <a:pPr algn="l"/>
             <a:r>
-              <a:rPr sz="1400" b="1">
-                <a:solidFill>
-                  <a:srgbClr val="02C39A"/>
-                </a:solidFill>
-                <a:latin typeface="Calibri"/>
-              </a:rPr>
-              <a:t>2  Guardrail Check</a:t>
-            </a:r>
-          </a:p>
-        </p:txBody>
-      </p:sp>
-      <p:sp>
-        <p:nvSpPr>
-          <p:cNvPr id="10" name="TextBox 9"/>
+              <a:rPr sz="1300" b="1" i="0">
+                <a:solidFill>
+                  <a:srgbClr val="2E75B6"/>
+                </a:solidFill>
+                <a:latin typeface="Calibri"/>
+              </a:rPr>
+              <a:t>Layer 2 — Random Forest (scikit-learn)</a:t>
+            </a:r>
+          </a:p>
+        </p:txBody>
+      </p:sp>
+      <p:sp>
+        <p:nvSpPr>
+          <p:cNvPr id="11" name="TextBox 10"/>
           <p:cNvSpPr txBox="1"/>
           <p:nvPr/>
         </p:nvSpPr>
         <p:spPr>
           <a:xfrm>
-            <a:off x="6446520" y="1645919"/>
-            <a:ext cx="5212080" cy="777240"/>
+            <a:off x="6263640" y="1645920"/>
+            <a:ext cx="5394960" cy="2560320"/>
           </a:xfrm>
           <a:prstGeom prst="rect">
             <a:avLst/>
@@ -9768,39 +8875,107 @@
           </a:bodyPr>
           <a:lstStyle/>
           <a:p>
-            <a:pPr algn="l"/>
-            <a:r>
-              <a:rPr sz="1200" b="0">
-                <a:solidFill>
-                  <a:srgbClr val="FFFFFF"/>
-                </a:solidFill>
-                <a:latin typeface="Calibri"/>
-              </a:rPr>
-              <a:t>Block invoices &gt; $50K from auto-processing — route to manual review</a:t>
-            </a:r>
-          </a:p>
-        </p:txBody>
-      </p:sp>
-      <p:sp>
-        <p:nvSpPr>
-          <p:cNvPr id="11" name="Rectangle 10"/>
+            <a:pPr>
+              <a:spcBef>
+                <a:spcPts val="300"/>
+              </a:spcBef>
+            </a:pPr>
+            <a:r>
+              <a:rPr sz="1200">
+                <a:solidFill>
+                  <a:srgbClr val="1A1A2E"/>
+                </a:solidFill>
+                <a:latin typeface="Calibri"/>
+              </a:rPr>
+              <a:t>• 13 features: qty delta %, price delta %, GRN gap</a:t>
+            </a:r>
+          </a:p>
+          <a:p>
+            <a:pPr>
+              <a:spcBef>
+                <a:spcPts val="300"/>
+              </a:spcBef>
+            </a:pPr>
+            <a:r>
+              <a:rPr sz="1200">
+                <a:solidFill>
+                  <a:srgbClr val="1A1A2E"/>
+                </a:solidFill>
+                <a:latin typeface="Calibri"/>
+              </a:rPr>
+              <a:t>• Random Forest — 100 trees, balanced class weights</a:t>
+            </a:r>
+          </a:p>
+          <a:p>
+            <a:pPr>
+              <a:spcBef>
+                <a:spcPts val="300"/>
+              </a:spcBef>
+            </a:pPr>
+            <a:r>
+              <a:rPr sz="1200">
+                <a:solidFill>
+                  <a:srgbClr val="1A1A2E"/>
+                </a:solidFill>
+                <a:latin typeface="Calibri"/>
+              </a:rPr>
+              <a:t>• Trained on 1,200 labeled examples (80/20 split)</a:t>
+            </a:r>
+          </a:p>
+          <a:p>
+            <a:pPr>
+              <a:spcBef>
+                <a:spcPts val="300"/>
+              </a:spcBef>
+            </a:pPr>
+            <a:r>
+              <a:rPr sz="1200">
+                <a:solidFill>
+                  <a:srgbClr val="1A1A2E"/>
+                </a:solidFill>
+                <a:latin typeface="Calibri"/>
+              </a:rPr>
+              <a:t>• Why RF: interpretable, fast, feature importance for audit</a:t>
+            </a:r>
+          </a:p>
+          <a:p>
+            <a:pPr>
+              <a:spcBef>
+                <a:spcPts val="300"/>
+              </a:spcBef>
+            </a:pPr>
+            <a:r>
+              <a:rPr sz="1200">
+                <a:solidFill>
+                  <a:srgbClr val="1A1A2E"/>
+                </a:solidFill>
+                <a:latin typeface="Calibri"/>
+              </a:rPr>
+              <a:t>• Why not XGBoost: RF gives cleaner audit trail</a:t>
+            </a:r>
+          </a:p>
+        </p:txBody>
+      </p:sp>
+      <p:sp>
+        <p:nvSpPr>
+          <p:cNvPr id="12" name="Rectangle 11"/>
           <p:cNvSpPr/>
           <p:nvPr/>
         </p:nvSpPr>
         <p:spPr>
           <a:xfrm>
-            <a:off x="365760" y="2834639"/>
-            <a:ext cx="5486400" cy="1463040"/>
+            <a:off x="6126480" y="4023360"/>
+            <a:ext cx="4114800" cy="438912"/>
           </a:xfrm>
           <a:prstGeom prst="rect">
             <a:avLst/>
           </a:prstGeom>
           <a:solidFill>
-            <a:srgbClr val="36454F"/>
+            <a:srgbClr val="DDEBF7"/>
           </a:solidFill>
-          <a:ln w="19050">
+          <a:ln w="12700">
             <a:solidFill>
-              <a:srgbClr val="028090"/>
+              <a:srgbClr val="CCCCCC"/>
             </a:solidFill>
           </a:ln>
         </p:spPr>
@@ -9828,14 +9003,14 @@
       </p:sp>
       <p:sp>
         <p:nvSpPr>
-          <p:cNvPr id="12" name="TextBox 11"/>
+          <p:cNvPr id="13" name="TextBox 12"/>
           <p:cNvSpPr txBox="1"/>
           <p:nvPr/>
         </p:nvSpPr>
         <p:spPr>
           <a:xfrm>
-            <a:off x="502920" y="2926079"/>
-            <a:ext cx="5212080" cy="411480"/>
+            <a:off x="6263640" y="4078224"/>
+            <a:ext cx="2926080" cy="320040"/>
           </a:xfrm>
           <a:prstGeom prst="rect">
             <a:avLst/>
@@ -9850,27 +9025,27 @@
           <a:p>
             <a:pPr algn="l"/>
             <a:r>
-              <a:rPr sz="1400" b="1">
-                <a:solidFill>
-                  <a:srgbClr val="02C39A"/>
-                </a:solidFill>
-                <a:latin typeface="Calibri"/>
-              </a:rPr>
-              <a:t>3  Matching Tool</a:t>
-            </a:r>
-          </a:p>
-        </p:txBody>
-      </p:sp>
-      <p:sp>
-        <p:nvSpPr>
-          <p:cNvPr id="13" name="TextBox 12"/>
+              <a:rPr sz="1200" b="0" i="0">
+                <a:solidFill>
+                  <a:srgbClr val="1A1A2E"/>
+                </a:solidFill>
+                <a:latin typeface="Calibri"/>
+              </a:rPr>
+              <a:t>Accuracy</a:t>
+            </a:r>
+          </a:p>
+        </p:txBody>
+      </p:sp>
+      <p:sp>
+        <p:nvSpPr>
+          <p:cNvPr id="14" name="TextBox 13"/>
           <p:cNvSpPr txBox="1"/>
           <p:nvPr/>
         </p:nvSpPr>
         <p:spPr>
           <a:xfrm>
-            <a:off x="502920" y="3383279"/>
-            <a:ext cx="5212080" cy="777240"/>
+            <a:off x="9601200" y="4078224"/>
+            <a:ext cx="1920240" cy="320040"/>
           </a:xfrm>
           <a:prstGeom prst="rect">
             <a:avLst/>
@@ -9883,39 +9058,39 @@
           </a:bodyPr>
           <a:lstStyle/>
           <a:p>
-            <a:pPr algn="l"/>
-            <a:r>
-              <a:rPr sz="1200" b="0">
-                <a:solidFill>
-                  <a:srgbClr val="FFFFFF"/>
-                </a:solidFill>
-                <a:latin typeface="Calibri"/>
-              </a:rPr>
-              <a:t>Call D2 model as tool — returns MATCH or MISMATCH with details</a:t>
-            </a:r>
-          </a:p>
-        </p:txBody>
-      </p:sp>
-      <p:sp>
-        <p:nvSpPr>
-          <p:cNvPr id="14" name="Rectangle 13"/>
+            <a:pPr algn="r"/>
+            <a:r>
+              <a:rPr sz="1300" b="1" i="0">
+                <a:solidFill>
+                  <a:srgbClr val="1A1A2E"/>
+                </a:solidFill>
+                <a:latin typeface="Calibri"/>
+              </a:rPr>
+              <a:t>89%</a:t>
+            </a:r>
+          </a:p>
+        </p:txBody>
+      </p:sp>
+      <p:sp>
+        <p:nvSpPr>
+          <p:cNvPr id="15" name="Rectangle 14"/>
           <p:cNvSpPr/>
           <p:nvPr/>
         </p:nvSpPr>
         <p:spPr>
           <a:xfrm>
-            <a:off x="6309360" y="2834639"/>
-            <a:ext cx="5486400" cy="1463040"/>
+            <a:off x="6126480" y="4526280"/>
+            <a:ext cx="4114800" cy="438912"/>
           </a:xfrm>
           <a:prstGeom prst="rect">
             <a:avLst/>
           </a:prstGeom>
           <a:solidFill>
-            <a:srgbClr val="36454F"/>
+            <a:srgbClr val="FFFFFF"/>
           </a:solidFill>
-          <a:ln w="19050">
+          <a:ln w="12700">
             <a:solidFill>
-              <a:srgbClr val="028090"/>
+              <a:srgbClr val="CCCCCC"/>
             </a:solidFill>
           </a:ln>
         </p:spPr>
@@ -9943,14 +9118,14 @@
       </p:sp>
       <p:sp>
         <p:nvSpPr>
-          <p:cNvPr id="15" name="TextBox 14"/>
+          <p:cNvPr id="16" name="TextBox 15"/>
           <p:cNvSpPr txBox="1"/>
           <p:nvPr/>
         </p:nvSpPr>
         <p:spPr>
           <a:xfrm>
-            <a:off x="6446520" y="2926079"/>
-            <a:ext cx="5212080" cy="411480"/>
+            <a:off x="6263640" y="4581144"/>
+            <a:ext cx="2926080" cy="320040"/>
           </a:xfrm>
           <a:prstGeom prst="rect">
             <a:avLst/>
@@ -9965,27 +9140,27 @@
           <a:p>
             <a:pPr algn="l"/>
             <a:r>
-              <a:rPr sz="1400" b="1">
-                <a:solidFill>
-                  <a:srgbClr val="02C39A"/>
-                </a:solidFill>
-                <a:latin typeface="Calibri"/>
-              </a:rPr>
-              <a:t>4  RAG Lookup</a:t>
-            </a:r>
-          </a:p>
-        </p:txBody>
-      </p:sp>
-      <p:sp>
-        <p:nvSpPr>
-          <p:cNvPr id="16" name="TextBox 15"/>
+              <a:rPr sz="1200" b="0" i="0">
+                <a:solidFill>
+                  <a:srgbClr val="1A1A2E"/>
+                </a:solidFill>
+                <a:latin typeface="Calibri"/>
+              </a:rPr>
+              <a:t>Precision (MISMATCH)</a:t>
+            </a:r>
+          </a:p>
+        </p:txBody>
+      </p:sp>
+      <p:sp>
+        <p:nvSpPr>
+          <p:cNvPr id="17" name="TextBox 16"/>
           <p:cNvSpPr txBox="1"/>
           <p:nvPr/>
         </p:nvSpPr>
         <p:spPr>
           <a:xfrm>
-            <a:off x="6446520" y="3383279"/>
-            <a:ext cx="5212080" cy="777240"/>
+            <a:off x="9601200" y="4581144"/>
+            <a:ext cx="1920240" cy="320040"/>
           </a:xfrm>
           <a:prstGeom prst="rect">
             <a:avLst/>
@@ -9998,39 +9173,39 @@
           </a:bodyPr>
           <a:lstStyle/>
           <a:p>
-            <a:pPr algn="l"/>
-            <a:r>
-              <a:rPr sz="1200" b="0">
-                <a:solidFill>
-                  <a:srgbClr val="FFFFFF"/>
-                </a:solidFill>
-                <a:latin typeface="Calibri"/>
-              </a:rPr>
-              <a:t>Retrieve vendor contract terms, dispute history, AP policy from knowledge base</a:t>
-            </a:r>
-          </a:p>
-        </p:txBody>
-      </p:sp>
-      <p:sp>
-        <p:nvSpPr>
-          <p:cNvPr id="17" name="Rectangle 16"/>
+            <a:pPr algn="r"/>
+            <a:r>
+              <a:rPr sz="1300" b="1" i="0">
+                <a:solidFill>
+                  <a:srgbClr val="37864F"/>
+                </a:solidFill>
+                <a:latin typeface="Calibri"/>
+              </a:rPr>
+              <a:t>100%</a:t>
+            </a:r>
+          </a:p>
+        </p:txBody>
+      </p:sp>
+      <p:sp>
+        <p:nvSpPr>
+          <p:cNvPr id="18" name="Rectangle 17"/>
           <p:cNvSpPr/>
           <p:nvPr/>
         </p:nvSpPr>
         <p:spPr>
           <a:xfrm>
-            <a:off x="365760" y="4572000"/>
-            <a:ext cx="5486400" cy="1463040"/>
+            <a:off x="6126480" y="5029200"/>
+            <a:ext cx="4114800" cy="438912"/>
           </a:xfrm>
           <a:prstGeom prst="rect">
             <a:avLst/>
           </a:prstGeom>
           <a:solidFill>
-            <a:srgbClr val="36454F"/>
+            <a:srgbClr val="DDEBF7"/>
           </a:solidFill>
-          <a:ln w="19050">
+          <a:ln w="12700">
             <a:solidFill>
-              <a:srgbClr val="028090"/>
+              <a:srgbClr val="CCCCCC"/>
             </a:solidFill>
           </a:ln>
         </p:spPr>
@@ -10058,14 +9233,14 @@
       </p:sp>
       <p:sp>
         <p:nvSpPr>
-          <p:cNvPr id="18" name="TextBox 17"/>
+          <p:cNvPr id="19" name="TextBox 18"/>
           <p:cNvSpPr txBox="1"/>
           <p:nvPr/>
         </p:nvSpPr>
         <p:spPr>
           <a:xfrm>
-            <a:off x="502920" y="4663440"/>
-            <a:ext cx="5212080" cy="411480"/>
+            <a:off x="6263640" y="5084064"/>
+            <a:ext cx="2926080" cy="320040"/>
           </a:xfrm>
           <a:prstGeom prst="rect">
             <a:avLst/>
@@ -10080,27 +9255,27 @@
           <a:p>
             <a:pPr algn="l"/>
             <a:r>
-              <a:rPr sz="1400" b="1">
-                <a:solidFill>
-                  <a:srgbClr val="02C39A"/>
-                </a:solidFill>
-                <a:latin typeface="Calibri"/>
-              </a:rPr>
-              <a:t>5  Draft Email</a:t>
-            </a:r>
-          </a:p>
-        </p:txBody>
-      </p:sp>
-      <p:sp>
-        <p:nvSpPr>
-          <p:cNvPr id="19" name="TextBox 18"/>
+              <a:rPr sz="1200" b="0" i="0">
+                <a:solidFill>
+                  <a:srgbClr val="1A1A2E"/>
+                </a:solidFill>
+                <a:latin typeface="Calibri"/>
+              </a:rPr>
+              <a:t>Recall (MISMATCH)</a:t>
+            </a:r>
+          </a:p>
+        </p:txBody>
+      </p:sp>
+      <p:sp>
+        <p:nvSpPr>
+          <p:cNvPr id="20" name="TextBox 19"/>
           <p:cNvSpPr txBox="1"/>
           <p:nvPr/>
         </p:nvSpPr>
         <p:spPr>
           <a:xfrm>
-            <a:off x="502920" y="5120640"/>
-            <a:ext cx="5212080" cy="777240"/>
+            <a:off x="9601200" y="5084064"/>
+            <a:ext cx="1920240" cy="320040"/>
           </a:xfrm>
           <a:prstGeom prst="rect">
             <a:avLst/>
@@ -10113,39 +9288,39 @@
           </a:bodyPr>
           <a:lstStyle/>
           <a:p>
-            <a:pPr algn="l"/>
-            <a:r>
-              <a:rPr sz="1200" b="0">
-                <a:solidFill>
-                  <a:srgbClr val="FFFFFF"/>
-                </a:solidFill>
-                <a:latin typeface="Calibri"/>
-              </a:rPr>
-              <a:t>LLM generates dispute email grounded in RAG context (GPT-4 / mock)</a:t>
-            </a:r>
-          </a:p>
-        </p:txBody>
-      </p:sp>
-      <p:sp>
-        <p:nvSpPr>
-          <p:cNvPr id="20" name="Rectangle 19"/>
+            <a:pPr algn="r"/>
+            <a:r>
+              <a:rPr sz="1300" b="1" i="0">
+                <a:solidFill>
+                  <a:srgbClr val="1A1A2E"/>
+                </a:solidFill>
+                <a:latin typeface="Calibri"/>
+              </a:rPr>
+              <a:t>57%</a:t>
+            </a:r>
+          </a:p>
+        </p:txBody>
+      </p:sp>
+      <p:sp>
+        <p:nvSpPr>
+          <p:cNvPr id="21" name="Rectangle 20"/>
           <p:cNvSpPr/>
           <p:nvPr/>
         </p:nvSpPr>
         <p:spPr>
           <a:xfrm>
-            <a:off x="6309360" y="4572000"/>
-            <a:ext cx="5486400" cy="1463040"/>
+            <a:off x="6126480" y="5532120"/>
+            <a:ext cx="4114800" cy="438912"/>
           </a:xfrm>
           <a:prstGeom prst="rect">
             <a:avLst/>
           </a:prstGeom>
           <a:solidFill>
-            <a:srgbClr val="36454F"/>
+            <a:srgbClr val="FFFFFF"/>
           </a:solidFill>
-          <a:ln w="19050">
+          <a:ln w="12700">
             <a:solidFill>
-              <a:srgbClr val="028090"/>
+              <a:srgbClr val="CCCCCC"/>
             </a:solidFill>
           </a:ln>
         </p:spPr>
@@ -10173,14 +9348,14 @@
       </p:sp>
       <p:sp>
         <p:nvSpPr>
-          <p:cNvPr id="21" name="TextBox 20"/>
+          <p:cNvPr id="22" name="TextBox 21"/>
           <p:cNvSpPr txBox="1"/>
           <p:nvPr/>
         </p:nvSpPr>
         <p:spPr>
           <a:xfrm>
-            <a:off x="6446520" y="4663440"/>
-            <a:ext cx="5212080" cy="411480"/>
+            <a:off x="6263640" y="5586984"/>
+            <a:ext cx="2926080" cy="320040"/>
           </a:xfrm>
           <a:prstGeom prst="rect">
             <a:avLst/>
@@ -10195,27 +9370,27 @@
           <a:p>
             <a:pPr algn="l"/>
             <a:r>
-              <a:rPr sz="1400" b="1">
-                <a:solidFill>
-                  <a:srgbClr val="02C39A"/>
-                </a:solidFill>
-                <a:latin typeface="Calibri"/>
-              </a:rPr>
-              <a:t>6  Human Approval</a:t>
-            </a:r>
-          </a:p>
-        </p:txBody>
-      </p:sp>
-      <p:sp>
-        <p:nvSpPr>
-          <p:cNvPr id="22" name="TextBox 21"/>
+              <a:rPr sz="1200" b="0" i="0">
+                <a:solidFill>
+                  <a:srgbClr val="1A1A2E"/>
+                </a:solidFill>
+                <a:latin typeface="Calibri"/>
+              </a:rPr>
+              <a:t>False Positive Rate</a:t>
+            </a:r>
+          </a:p>
+        </p:txBody>
+      </p:sp>
+      <p:sp>
+        <p:nvSpPr>
+          <p:cNvPr id="23" name="TextBox 22"/>
           <p:cNvSpPr txBox="1"/>
           <p:nvPr/>
         </p:nvSpPr>
         <p:spPr>
           <a:xfrm>
-            <a:off x="6446520" y="5120640"/>
-            <a:ext cx="5212080" cy="777240"/>
+            <a:off x="9601200" y="5586984"/>
+            <a:ext cx="1920240" cy="320040"/>
           </a:xfrm>
           <a:prstGeom prst="rect">
             <a:avLst/>
@@ -10228,61 +9403,16 @@
           </a:bodyPr>
           <a:lstStyle/>
           <a:p>
-            <a:pPr algn="l"/>
-            <a:r>
-              <a:rPr sz="1200" b="0">
-                <a:solidFill>
-                  <a:srgbClr val="FFFFFF"/>
-                </a:solidFill>
-                <a:latin typeface="Calibri"/>
-              </a:rPr>
-              <a:t>HITL pause — finance team reviews email before sending</a:t>
-            </a:r>
-          </a:p>
-        </p:txBody>
-      </p:sp>
-      <p:sp>
-        <p:nvSpPr>
-          <p:cNvPr id="23" name="Rectangle 22"/>
-          <p:cNvSpPr/>
-          <p:nvPr/>
-        </p:nvSpPr>
-        <p:spPr>
-          <a:xfrm>
-            <a:off x="365760" y="6309359"/>
-            <a:ext cx="5486400" cy="1463040"/>
-          </a:xfrm>
-          <a:prstGeom prst="rect">
-            <a:avLst/>
-          </a:prstGeom>
-          <a:solidFill>
-            <a:srgbClr val="36454F"/>
-          </a:solidFill>
-          <a:ln w="19050">
-            <a:solidFill>
-              <a:srgbClr val="028090"/>
-            </a:solidFill>
-          </a:ln>
-        </p:spPr>
-        <p:style>
-          <a:lnRef idx="1">
-            <a:schemeClr val="accent1"/>
-          </a:lnRef>
-          <a:fillRef idx="3">
-            <a:schemeClr val="accent1"/>
-          </a:fillRef>
-          <a:effectRef idx="2">
-            <a:schemeClr val="accent1"/>
-          </a:effectRef>
-          <a:fontRef idx="minor">
-            <a:schemeClr val="lt1"/>
-          </a:fontRef>
-        </p:style>
-        <p:txBody>
-          <a:bodyPr rtlCol="0" anchor="ctr"/>
-          <a:lstStyle/>
-          <a:p>
-            <a:pPr algn="ctr"/>
+            <a:pPr algn="r"/>
+            <a:r>
+              <a:rPr sz="1300" b="1" i="0">
+                <a:solidFill>
+                  <a:srgbClr val="37864F"/>
+                </a:solidFill>
+                <a:latin typeface="Calibri"/>
+              </a:rPr>
+              <a:t>0%</a:t>
+            </a:r>
           </a:p>
         </p:txBody>
       </p:sp>
@@ -10294,8 +9424,8 @@
         </p:nvSpPr>
         <p:spPr>
           <a:xfrm>
-            <a:off x="502920" y="6400799"/>
-            <a:ext cx="5212080" cy="411480"/>
+            <a:off x="457200" y="5852160"/>
+            <a:ext cx="11247120" cy="731520"/>
           </a:xfrm>
           <a:prstGeom prst="rect">
             <a:avLst/>
@@ -10310,83 +9440,13 @@
           <a:p>
             <a:pPr algn="l"/>
             <a:r>
-              <a:rPr sz="1400" b="1">
-                <a:solidFill>
-                  <a:srgbClr val="02C39A"/>
-                </a:solidFill>
-                <a:latin typeface="Calibri"/>
-              </a:rPr>
-              <a:t>7  Execute Action</a:t>
-            </a:r>
-          </a:p>
-        </p:txBody>
-      </p:sp>
-      <p:sp>
-        <p:nvSpPr>
-          <p:cNvPr id="25" name="TextBox 24"/>
-          <p:cNvSpPr txBox="1"/>
-          <p:nvPr/>
-        </p:nvSpPr>
-        <p:spPr>
-          <a:xfrm>
-            <a:off x="502920" y="6857999"/>
-            <a:ext cx="5212080" cy="777240"/>
-          </a:xfrm>
-          <a:prstGeom prst="rect">
-            <a:avLst/>
-          </a:prstGeom>
-          <a:noFill/>
-        </p:spPr>
-        <p:txBody>
-          <a:bodyPr wrap="square">
-            <a:spAutoFit/>
-          </a:bodyPr>
-          <a:lstStyle/>
-          <a:p>
-            <a:pPr algn="l"/>
-            <a:r>
-              <a:rPr sz="1200" b="0">
-                <a:solidFill>
-                  <a:srgbClr val="FFFFFF"/>
-                </a:solidFill>
-                <a:latin typeface="Calibri"/>
-              </a:rPr>
-              <a:t>Send email to vendor OR escalate to AP Manager</a:t>
-            </a:r>
-          </a:p>
-        </p:txBody>
-      </p:sp>
-      <p:sp>
-        <p:nvSpPr>
-          <p:cNvPr id="26" name="TextBox 25"/>
-          <p:cNvSpPr txBox="1"/>
-          <p:nvPr/>
-        </p:nvSpPr>
-        <p:spPr>
-          <a:xfrm>
-            <a:off x="365760" y="6355080"/>
-            <a:ext cx="11430000" cy="411480"/>
-          </a:xfrm>
-          <a:prstGeom prst="rect">
-            <a:avLst/>
-          </a:prstGeom>
-          <a:noFill/>
-        </p:spPr>
-        <p:txBody>
-          <a:bodyPr wrap="square">
-            <a:spAutoFit/>
-          </a:bodyPr>
-          <a:lstStyle/>
-          <a:p>
-            <a:pPr algn="l"/>
-            <a:r>
-              <a:rPr sz="1100" b="0">
-                <a:solidFill>
-                  <a:srgbClr val="E2E8F0"/>
-                </a:solidFill>
-                <a:latin typeface="Calibri"/>
-              </a:rPr>
-              <a:t>Why LangGraph over CrewAI/Autogen: Deterministic flow, native HITL support, auditable step execution. CrewAI is better for multi-agent collaboration tasks. AP reconciliation is a fixed sequential workflow — LangGraph is the right fit.</a:t>
+              <a:rPr sz="1100" b="0" i="1">
+                <a:solidFill>
+                  <a:srgbClr val="595959"/>
+                </a:solidFill>
+                <a:latin typeface="Calibri"/>
+              </a:rPr>
+              <a:t>Design choice: 100% precision — every flag is actionable. 57% recall is intentional — false positives cost more in AP.</a:t>
             </a:r>
           </a:p>
         </p:txBody>
@@ -10424,7 +9484,7 @@
             <a:avLst/>
           </a:prstGeom>
           <a:solidFill>
-            <a:srgbClr val="1E2761"/>
+            <a:srgbClr val="FFFFFF"/>
           </a:solidFill>
           <a:ln>
             <a:noFill/>
@@ -10460,8 +9520,8 @@
         </p:nvSpPr>
         <p:spPr>
           <a:xfrm>
-            <a:off x="548640" y="274320"/>
-            <a:ext cx="10972800" cy="731520"/>
+            <a:off x="548640" y="228600"/>
+            <a:ext cx="10972800" cy="640080"/>
           </a:xfrm>
           <a:prstGeom prst="rect">
             <a:avLst/>
@@ -10469,20 +9529,20 @@
           <a:noFill/>
         </p:spPr>
         <p:txBody>
-          <a:bodyPr wrap="none">
+          <a:bodyPr wrap="square">
             <a:spAutoFit/>
           </a:bodyPr>
           <a:lstStyle/>
           <a:p>
             <a:pPr algn="l"/>
             <a:r>
-              <a:rPr sz="3200" b="1">
-                <a:solidFill>
-                  <a:srgbClr val="FFFFFF"/>
-                </a:solidFill>
-                <a:latin typeface="Calibri"/>
-              </a:rPr>
-              <a:t>ERP Integration — SAP &amp; Oracle</a:t>
+              <a:rPr sz="2800" b="1" i="0">
+                <a:solidFill>
+                  <a:srgbClr val="1A1A2E"/>
+                </a:solidFill>
+                <a:latin typeface="Calibri"/>
+              </a:rPr>
+              <a:t>Agentic Workflow — D3 (LangGraph)</a:t>
             </a:r>
           </a:p>
         </p:txBody>
@@ -10495,14 +9555,14 @@
         </p:nvSpPr>
         <p:spPr>
           <a:xfrm>
-            <a:off x="548640" y="868680"/>
-            <a:ext cx="2286000" cy="45720"/>
+            <a:off x="548640" y="822960"/>
+            <a:ext cx="11064240" cy="36576"/>
           </a:xfrm>
           <a:prstGeom prst="rect">
             <a:avLst/>
           </a:prstGeom>
           <a:solidFill>
-            <a:srgbClr val="028090"/>
+            <a:srgbClr val="2E75B6"/>
           </a:solidFill>
           <a:ln>
             <a:noFill/>
@@ -10532,59 +9592,14 @@
       </p:sp>
       <p:sp>
         <p:nvSpPr>
-          <p:cNvPr id="5" name="Rectangle 4"/>
-          <p:cNvSpPr/>
-          <p:nvPr/>
-        </p:nvSpPr>
-        <p:spPr>
-          <a:xfrm>
-            <a:off x="365760" y="1097280"/>
-            <a:ext cx="5394960" cy="5120640"/>
-          </a:xfrm>
-          <a:prstGeom prst="rect">
-            <a:avLst/>
-          </a:prstGeom>
-          <a:solidFill>
-            <a:srgbClr val="36454F"/>
-          </a:solidFill>
-          <a:ln w="12700">
-            <a:solidFill>
-              <a:srgbClr val="028090"/>
-            </a:solidFill>
-          </a:ln>
-        </p:spPr>
-        <p:style>
-          <a:lnRef idx="1">
-            <a:schemeClr val="accent1"/>
-          </a:lnRef>
-          <a:fillRef idx="3">
-            <a:schemeClr val="accent1"/>
-          </a:fillRef>
-          <a:effectRef idx="2">
-            <a:schemeClr val="accent1"/>
-          </a:effectRef>
-          <a:fontRef idx="minor">
-            <a:schemeClr val="lt1"/>
-          </a:fontRef>
-        </p:style>
-        <p:txBody>
-          <a:bodyPr rtlCol="0" anchor="ctr"/>
-          <a:lstStyle/>
-          <a:p>
-            <a:pPr algn="ctr"/>
-          </a:p>
-        </p:txBody>
-      </p:sp>
-      <p:sp>
-        <p:nvSpPr>
-          <p:cNvPr id="6" name="TextBox 5"/>
+          <p:cNvPr id="5" name="TextBox 4"/>
           <p:cNvSpPr txBox="1"/>
           <p:nvPr/>
         </p:nvSpPr>
         <p:spPr>
           <a:xfrm>
-            <a:off x="548640" y="1188720"/>
-            <a:ext cx="5029200" cy="4846320"/>
+            <a:off x="548640" y="868680"/>
+            <a:ext cx="10972800" cy="365760"/>
           </a:xfrm>
           <a:prstGeom prst="rect">
             <a:avLst/>
@@ -10597,169 +9612,53 @@
           </a:bodyPr>
           <a:lstStyle/>
           <a:p>
-            <a:r>
-              <a:rPr sz="1300" b="1">
-                <a:solidFill>
-                  <a:srgbClr val="02C39A"/>
-                </a:solidFill>
-                <a:latin typeface="Calibri"/>
-              </a:rPr>
-              <a:t>SAP Integration</a:t>
-            </a:r>
-          </a:p>
-          <a:p>
-            <a:pPr>
-              <a:spcBef>
-                <a:spcPts val="400"/>
-              </a:spcBef>
-            </a:pPr>
-            <a:r>
-              <a:rPr sz="1200">
-                <a:solidFill>
-                  <a:srgbClr val="FFFFFF"/>
-                </a:solidFill>
-                <a:latin typeface="Calibri"/>
-              </a:rPr>
-              <a:t>  SAP BAPI/RFC calls to fetch PO data (ME23N transaction)</a:t>
-            </a:r>
-          </a:p>
-          <a:p>
-            <a:pPr>
-              <a:spcBef>
-                <a:spcPts val="400"/>
-              </a:spcBef>
-            </a:pPr>
-            <a:r>
-              <a:rPr sz="1200">
-                <a:solidFill>
-                  <a:srgbClr val="FFFFFF"/>
-                </a:solidFill>
-                <a:latin typeface="Calibri"/>
-              </a:rPr>
-              <a:t>  GRN data via SAP MIGO/MIRO transaction BAPIs</a:t>
-            </a:r>
-          </a:p>
-          <a:p>
-            <a:pPr>
-              <a:spcBef>
-                <a:spcPts val="400"/>
-              </a:spcBef>
-            </a:pPr>
-            <a:r>
-              <a:rPr sz="1200">
-                <a:solidFill>
-                  <a:srgbClr val="FFFFFF"/>
-                </a:solidFill>
-                <a:latin typeface="Calibri"/>
-              </a:rPr>
-              <a:t>  Vendor master data from SAP LFA1 table</a:t>
-            </a:r>
-          </a:p>
-          <a:p>
-            <a:pPr>
-              <a:spcBef>
-                <a:spcPts val="400"/>
-              </a:spcBef>
-            </a:pPr>
-            <a:r>
-              <a:rPr sz="1200">
-                <a:solidFill>
-                  <a:srgbClr val="FFFFFF"/>
-                </a:solidFill>
-                <a:latin typeface="Calibri"/>
-              </a:rPr>
-              <a:t>  Payment trigger via SAP FI module (F-53 posting)</a:t>
-            </a:r>
-          </a:p>
-          <a:p>
-            <a:pPr>
-              <a:spcBef>
-                <a:spcPts val="400"/>
-              </a:spcBef>
-            </a:pPr>
-            <a:r>
-              <a:rPr sz="1200">
-                <a:solidFill>
-                  <a:srgbClr val="FFFFFF"/>
-                </a:solidFill>
-                <a:latin typeface="Calibri"/>
-              </a:rPr>
-              <a:t>  Connection via SAP JCo connector (Java Connector)</a:t>
-            </a:r>
-          </a:p>
-          <a:p>
-            <a:pPr>
-              <a:spcBef>
-                <a:spcPts val="400"/>
-              </a:spcBef>
-            </a:pPr>
-            <a:r>
-              <a:rPr sz="1200">
-                <a:solidFill>
-                  <a:srgbClr val="FFFFFF"/>
-                </a:solidFill>
-                <a:latin typeface="Calibri"/>
-              </a:rPr>
-              <a:t>  All calls authenticated via SAP service user with minimal permissions</a:t>
-            </a:r>
-          </a:p>
-        </p:txBody>
-      </p:sp>
-      <p:sp>
-        <p:nvSpPr>
-          <p:cNvPr id="7" name="Rectangle 6"/>
-          <p:cNvSpPr/>
-          <p:nvPr/>
-        </p:nvSpPr>
-        <p:spPr>
-          <a:xfrm>
-            <a:off x="6035040" y="1097280"/>
-            <a:ext cx="5760720" cy="5120640"/>
-          </a:xfrm>
-          <a:prstGeom prst="rect">
-            <a:avLst/>
-          </a:prstGeom>
-          <a:solidFill>
-            <a:srgbClr val="36454F"/>
-          </a:solidFill>
-          <a:ln w="12700">
-            <a:solidFill>
-              <a:srgbClr val="028090"/>
-            </a:solidFill>
-          </a:ln>
-        </p:spPr>
-        <p:style>
-          <a:lnRef idx="1">
-            <a:schemeClr val="accent1"/>
-          </a:lnRef>
-          <a:fillRef idx="3">
-            <a:schemeClr val="accent1"/>
-          </a:fillRef>
-          <a:effectRef idx="2">
-            <a:schemeClr val="accent1"/>
-          </a:effectRef>
-          <a:fontRef idx="minor">
-            <a:schemeClr val="lt1"/>
-          </a:fontRef>
-        </p:style>
-        <p:txBody>
-          <a:bodyPr rtlCol="0" anchor="ctr"/>
-          <a:lstStyle/>
-          <a:p>
-            <a:pPr algn="ctr"/>
-          </a:p>
-        </p:txBody>
-      </p:sp>
-      <p:sp>
-        <p:nvSpPr>
-          <p:cNvPr id="8" name="TextBox 7"/>
+            <a:pPr algn="l"/>
+            <a:r>
+              <a:rPr sz="1200" b="0" i="1">
+                <a:solidFill>
+                  <a:srgbClr val="595959"/>
+                </a:solidFill>
+                <a:latin typeface="Calibri"/>
+              </a:rPr>
+              <a:t>7-node deterministic workflow with RAG, HITL, MCP and guardrails</a:t>
+            </a:r>
+          </a:p>
+        </p:txBody>
+      </p:sp>
+      <p:pic>
+        <p:nvPicPr>
+          <p:cNvPr id="6" name="Picture 5" descr="diagram_agent_workflow.png"/>
+          <p:cNvPicPr>
+            <a:picLocks noChangeAspect="1"/>
+          </p:cNvPicPr>
+          <p:nvPr/>
+        </p:nvPicPr>
+        <p:blipFill>
+          <a:blip r:embed="rId2"/>
+          <a:stretch>
+            <a:fillRect/>
+          </a:stretch>
+        </p:blipFill>
+        <p:spPr>
+          <a:xfrm>
+            <a:off x="274320" y="1005840"/>
+            <a:ext cx="7498079" cy="5577840"/>
+          </a:xfrm>
+          <a:prstGeom prst="rect">
+            <a:avLst/>
+          </a:prstGeom>
+        </p:spPr>
+      </p:pic>
+      <p:sp>
+        <p:nvSpPr>
+          <p:cNvPr id="7" name="TextBox 6"/>
           <p:cNvSpPr txBox="1"/>
           <p:nvPr/>
         </p:nvSpPr>
         <p:spPr>
           <a:xfrm>
-            <a:off x="6217920" y="1188720"/>
-            <a:ext cx="5394960" cy="4846320"/>
+            <a:off x="8046720" y="1188720"/>
+            <a:ext cx="3840480" cy="365760"/>
           </a:xfrm>
           <a:prstGeom prst="rect">
             <a:avLst/>
@@ -10772,110 +9671,224 @@
           </a:bodyPr>
           <a:lstStyle/>
           <a:p>
-            <a:r>
-              <a:rPr sz="1300" b="1">
-                <a:solidFill>
-                  <a:srgbClr val="02C39A"/>
-                </a:solidFill>
-                <a:latin typeface="Calibri"/>
-              </a:rPr>
-              <a:t>Oracle Integration</a:t>
-            </a:r>
-          </a:p>
+            <a:pPr algn="l"/>
+            <a:r>
+              <a:rPr sz="1300" b="1" i="0">
+                <a:solidFill>
+                  <a:srgbClr val="2E75B6"/>
+                </a:solidFill>
+                <a:latin typeface="Calibri"/>
+              </a:rPr>
+              <a:t>Why LangGraph?</a:t>
+            </a:r>
+          </a:p>
+        </p:txBody>
+      </p:sp>
+      <p:sp>
+        <p:nvSpPr>
+          <p:cNvPr id="8" name="TextBox 7"/>
+          <p:cNvSpPr txBox="1"/>
+          <p:nvPr/>
+        </p:nvSpPr>
+        <p:spPr>
+          <a:xfrm>
+            <a:off x="8046720" y="1645920"/>
+            <a:ext cx="3840480" cy="1828800"/>
+          </a:xfrm>
+          <a:prstGeom prst="rect">
+            <a:avLst/>
+          </a:prstGeom>
+          <a:noFill/>
+        </p:spPr>
+        <p:txBody>
+          <a:bodyPr wrap="square">
+            <a:spAutoFit/>
+          </a:bodyPr>
+          <a:lstStyle/>
           <a:p>
             <a:pPr>
               <a:spcBef>
-                <a:spcPts val="400"/>
+                <a:spcPts val="300"/>
               </a:spcBef>
             </a:pPr>
             <a:r>
               <a:rPr sz="1200">
                 <a:solidFill>
-                  <a:srgbClr val="FFFFFF"/>
-                </a:solidFill>
-                <a:latin typeface="Calibri"/>
-              </a:rPr>
-              <a:t>  Oracle REST APIs (Oracle ERP Cloud / Oracle Fusion)</a:t>
+                  <a:srgbClr val="1A1A2E"/>
+                </a:solidFill>
+                <a:latin typeface="Calibri"/>
+              </a:rPr>
+              <a:t>• Deterministic — exact node sequence</a:t>
             </a:r>
           </a:p>
           <a:p>
             <a:pPr>
               <a:spcBef>
-                <a:spcPts val="400"/>
+                <a:spcPts val="300"/>
               </a:spcBef>
             </a:pPr>
             <a:r>
               <a:rPr sz="1200">
                 <a:solidFill>
-                  <a:srgbClr val="FFFFFF"/>
-                </a:solidFill>
-                <a:latin typeface="Calibri"/>
-              </a:rPr>
-              <a:t>  PO lookup via /fscmRestApi/resources/purchaseOrders</a:t>
+                  <a:srgbClr val="1A1A2E"/>
+                </a:solidFill>
+                <a:latin typeface="Calibri"/>
+              </a:rPr>
+              <a:t>• Native HITL — pause built in</a:t>
             </a:r>
           </a:p>
           <a:p>
             <a:pPr>
               <a:spcBef>
-                <a:spcPts val="400"/>
+                <a:spcPts val="300"/>
               </a:spcBef>
             </a:pPr>
             <a:r>
               <a:rPr sz="1200">
                 <a:solidFill>
-                  <a:srgbClr val="FFFFFF"/>
-                </a:solidFill>
-                <a:latin typeface="Calibri"/>
-              </a:rPr>
-              <a:t>  GRN lookup via /fscmRestApi/resources/receivingReceipts</a:t>
+                  <a:srgbClr val="1A1A2E"/>
+                </a:solidFill>
+                <a:latin typeface="Calibri"/>
+              </a:rPr>
+              <a:t>• Auditable — every step logged</a:t>
             </a:r>
           </a:p>
           <a:p>
             <a:pPr>
               <a:spcBef>
-                <a:spcPts val="400"/>
+                <a:spcPts val="300"/>
               </a:spcBef>
             </a:pPr>
             <a:r>
               <a:rPr sz="1200">
                 <a:solidFill>
-                  <a:srgbClr val="FFFFFF"/>
-                </a:solidFill>
-                <a:latin typeface="Calibri"/>
-              </a:rPr>
-              <a:t>  OAuth 2.0 authentication with token refresh</a:t>
-            </a:r>
-          </a:p>
+                  <a:srgbClr val="1A1A2E"/>
+                </a:solidFill>
+                <a:latin typeface="Calibri"/>
+              </a:rPr>
+              <a:t>• Not CrewAI — better for fixed AP workflow</a:t>
+            </a:r>
+          </a:p>
+        </p:txBody>
+      </p:sp>
+      <p:sp>
+        <p:nvSpPr>
+          <p:cNvPr id="9" name="TextBox 8"/>
+          <p:cNvSpPr txBox="1"/>
+          <p:nvPr/>
+        </p:nvSpPr>
+        <p:spPr>
+          <a:xfrm>
+            <a:off x="8046720" y="3657600"/>
+            <a:ext cx="3840480" cy="365760"/>
+          </a:xfrm>
+          <a:prstGeom prst="rect">
+            <a:avLst/>
+          </a:prstGeom>
+          <a:noFill/>
+        </p:spPr>
+        <p:txBody>
+          <a:bodyPr wrap="square">
+            <a:spAutoFit/>
+          </a:bodyPr>
+          <a:lstStyle/>
+          <a:p>
+            <a:pPr algn="l"/>
+            <a:r>
+              <a:rPr sz="1300" b="1" i="0">
+                <a:solidFill>
+                  <a:srgbClr val="2E75B6"/>
+                </a:solidFill>
+                <a:latin typeface="Calibri"/>
+              </a:rPr>
+              <a:t>Key Guardrails</a:t>
+            </a:r>
+          </a:p>
+        </p:txBody>
+      </p:sp>
+      <p:sp>
+        <p:nvSpPr>
+          <p:cNvPr id="10" name="TextBox 9"/>
+          <p:cNvSpPr txBox="1"/>
+          <p:nvPr/>
+        </p:nvSpPr>
+        <p:spPr>
+          <a:xfrm>
+            <a:off x="8046720" y="4114800"/>
+            <a:ext cx="3840480" cy="2011680"/>
+          </a:xfrm>
+          <a:prstGeom prst="rect">
+            <a:avLst/>
+          </a:prstGeom>
+          <a:noFill/>
+        </p:spPr>
+        <p:txBody>
+          <a:bodyPr wrap="square">
+            <a:spAutoFit/>
+          </a:bodyPr>
+          <a:lstStyle/>
           <a:p>
             <a:pPr>
               <a:spcBef>
-                <a:spcPts val="400"/>
+                <a:spcPts val="300"/>
               </a:spcBef>
             </a:pPr>
             <a:r>
               <a:rPr sz="1200">
                 <a:solidFill>
-                  <a:srgbClr val="FFFFFF"/>
-                </a:solidFill>
-                <a:latin typeface="Calibri"/>
-              </a:rPr>
-              <a:t>  All API calls rate-limited and retried with exponential backoff</a:t>
+                  <a:srgbClr val="1A1A2E"/>
+                </a:solidFill>
+                <a:latin typeface="Calibri"/>
+              </a:rPr>
+              <a:t>• Invoices &gt; $50K blocked automatically</a:t>
             </a:r>
           </a:p>
           <a:p>
             <a:pPr>
               <a:spcBef>
-                <a:spcPts val="400"/>
+                <a:spcPts val="300"/>
               </a:spcBef>
             </a:pPr>
             <a:r>
               <a:rPr sz="1200">
                 <a:solidFill>
-                  <a:srgbClr val="FFFFFF"/>
-                </a:solidFill>
-                <a:latin typeface="Calibri"/>
-              </a:rPr>
-              <a:t>  Oracle Fusion middleware acts as integration layer</a:t>
+                  <a:srgbClr val="1A1A2E"/>
+                </a:solidFill>
+                <a:latin typeface="Calibri"/>
+              </a:rPr>
+              <a:t>• Input validation on all tool calls</a:t>
+            </a:r>
+          </a:p>
+          <a:p>
+            <a:pPr>
+              <a:spcBef>
+                <a:spcPts val="300"/>
+              </a:spcBef>
+            </a:pPr>
+            <a:r>
+              <a:rPr sz="1200">
+                <a:solidFill>
+                  <a:srgbClr val="1A1A2E"/>
+                </a:solidFill>
+                <a:latin typeface="Calibri"/>
+              </a:rPr>
+              <a:t>• No autonomous payment actions</a:t>
+            </a:r>
+          </a:p>
+          <a:p>
+            <a:pPr>
+              <a:spcBef>
+                <a:spcPts val="300"/>
+              </a:spcBef>
+            </a:pPr>
+            <a:r>
+              <a:rPr sz="1200">
+                <a:solidFill>
+                  <a:srgbClr val="1A1A2E"/>
+                </a:solidFill>
+                <a:latin typeface="Calibri"/>
+              </a:rPr>
+              <a:t>• Rate limiting on LLM calls</a:t>
             </a:r>
           </a:p>
         </p:txBody>
@@ -10913,7 +9926,7 @@
             <a:avLst/>
           </a:prstGeom>
           <a:solidFill>
-            <a:srgbClr val="1E2761"/>
+            <a:srgbClr val="FFFFFF"/>
           </a:solidFill>
           <a:ln>
             <a:noFill/>
@@ -10949,8 +9962,8 @@
         </p:nvSpPr>
         <p:spPr>
           <a:xfrm>
-            <a:off x="548640" y="274320"/>
-            <a:ext cx="10972800" cy="731520"/>
+            <a:off x="548640" y="228600"/>
+            <a:ext cx="10972800" cy="640080"/>
           </a:xfrm>
           <a:prstGeom prst="rect">
             <a:avLst/>
@@ -10958,20 +9971,20 @@
           <a:noFill/>
         </p:spPr>
         <p:txBody>
-          <a:bodyPr wrap="none">
+          <a:bodyPr wrap="square">
             <a:spAutoFit/>
           </a:bodyPr>
           <a:lstStyle/>
           <a:p>
             <a:pPr algn="l"/>
             <a:r>
-              <a:rPr sz="3200" b="1">
-                <a:solidFill>
-                  <a:srgbClr val="FFFFFF"/>
-                </a:solidFill>
-                <a:latin typeface="Calibri"/>
-              </a:rPr>
-              <a:t>Multi-Cloud Architecture — Azure + AWS</a:t>
+              <a:rPr sz="2800" b="1" i="0">
+                <a:solidFill>
+                  <a:srgbClr val="1A1A2E"/>
+                </a:solidFill>
+                <a:latin typeface="Calibri"/>
+              </a:rPr>
+              <a:t>ERP Integration — SAP &amp; Oracle via MCP</a:t>
             </a:r>
           </a:p>
         </p:txBody>
@@ -10984,14 +9997,14 @@
         </p:nvSpPr>
         <p:spPr>
           <a:xfrm>
-            <a:off x="548640" y="868680"/>
-            <a:ext cx="2286000" cy="45720"/>
+            <a:off x="548640" y="822960"/>
+            <a:ext cx="11064240" cy="36576"/>
           </a:xfrm>
           <a:prstGeom prst="rect">
             <a:avLst/>
           </a:prstGeom>
           <a:solidFill>
-            <a:srgbClr val="028090"/>
+            <a:srgbClr val="2E75B6"/>
           </a:solidFill>
           <a:ln>
             <a:noFill/>
@@ -11027,18 +10040,18 @@
         </p:nvSpPr>
         <p:spPr>
           <a:xfrm>
-            <a:off x="365760" y="1097280"/>
-            <a:ext cx="5394960" cy="4389120"/>
+            <a:off x="457200" y="1188720"/>
+            <a:ext cx="5394960" cy="5029200"/>
           </a:xfrm>
           <a:prstGeom prst="rect">
             <a:avLst/>
           </a:prstGeom>
           <a:solidFill>
-            <a:srgbClr val="36454F"/>
+            <a:srgbClr val="F2F2F2"/>
           </a:solidFill>
           <a:ln w="12700">
             <a:solidFill>
-              <a:srgbClr val="028090"/>
+              <a:srgbClr val="CCCCCC"/>
             </a:solidFill>
           </a:ln>
         </p:spPr>
@@ -11072,8 +10085,8 @@
         </p:nvSpPr>
         <p:spPr>
           <a:xfrm>
-            <a:off x="548640" y="1188720"/>
-            <a:ext cx="5029200" cy="4114800"/>
+            <a:off x="594360" y="1234440"/>
+            <a:ext cx="5120640" cy="365760"/>
           </a:xfrm>
           <a:prstGeom prst="rect">
             <a:avLst/>
@@ -11086,134 +10099,158 @@
           </a:bodyPr>
           <a:lstStyle/>
           <a:p>
-            <a:r>
-              <a:rPr sz="1300" b="1">
-                <a:solidFill>
-                  <a:srgbClr val="02C39A"/>
-                </a:solidFill>
-                <a:latin typeface="Calibri"/>
-              </a:rPr>
-              <a:t>Azure (Primary Processing Cloud)</a:t>
-            </a:r>
-          </a:p>
+            <a:pPr algn="l"/>
+            <a:r>
+              <a:rPr sz="1300" b="1" i="0">
+                <a:solidFill>
+                  <a:srgbClr val="2E75B6"/>
+                </a:solidFill>
+                <a:latin typeface="Calibri"/>
+              </a:rPr>
+              <a:t>SAP Integration</a:t>
+            </a:r>
+          </a:p>
+        </p:txBody>
+      </p:sp>
+      <p:sp>
+        <p:nvSpPr>
+          <p:cNvPr id="7" name="TextBox 6"/>
+          <p:cNvSpPr txBox="1"/>
+          <p:nvPr/>
+        </p:nvSpPr>
+        <p:spPr>
+          <a:xfrm>
+            <a:off x="594360" y="1645920"/>
+            <a:ext cx="5120640" cy="4754880"/>
+          </a:xfrm>
+          <a:prstGeom prst="rect">
+            <a:avLst/>
+          </a:prstGeom>
+          <a:noFill/>
+        </p:spPr>
+        <p:txBody>
+          <a:bodyPr wrap="square">
+            <a:spAutoFit/>
+          </a:bodyPr>
+          <a:lstStyle/>
           <a:p>
             <a:pPr>
               <a:spcBef>
-                <a:spcPts val="400"/>
+                <a:spcPts val="300"/>
               </a:spcBef>
             </a:pPr>
             <a:r>
               <a:rPr sz="1200">
                 <a:solidFill>
-                  <a:srgbClr val="FFFFFF"/>
-                </a:solidFill>
-                <a:latin typeface="Calibri"/>
-              </a:rPr>
-              <a:t>  Azure Form Recognizer — document extraction</a:t>
+                  <a:srgbClr val="1A1A2E"/>
+                </a:solidFill>
+                <a:latin typeface="Calibri"/>
+              </a:rPr>
+              <a:t>• SAP MCP Server exposes BAPI/RFC endpoints</a:t>
             </a:r>
           </a:p>
           <a:p>
             <a:pPr>
               <a:spcBef>
-                <a:spcPts val="400"/>
+                <a:spcPts val="300"/>
               </a:spcBef>
             </a:pPr>
             <a:r>
               <a:rPr sz="1200">
                 <a:solidFill>
-                  <a:srgbClr val="FFFFFF"/>
-                </a:solidFill>
-                <a:latin typeface="Calibri"/>
-              </a:rPr>
-              <a:t>  Azure OpenAI (GPT-4) — dispute email drafting</a:t>
+                  <a:srgbClr val="1A1A2E"/>
+                </a:solidFill>
+                <a:latin typeface="Calibri"/>
+              </a:rPr>
+              <a:t>• PO lookup: ME23N transaction via BAPI</a:t>
             </a:r>
           </a:p>
           <a:p>
             <a:pPr>
               <a:spcBef>
-                <a:spcPts val="400"/>
+                <a:spcPts val="300"/>
               </a:spcBef>
             </a:pPr>
             <a:r>
               <a:rPr sz="1200">
                 <a:solidFill>
-                  <a:srgbClr val="FFFFFF"/>
-                </a:solidFill>
-                <a:latin typeface="Calibri"/>
-              </a:rPr>
-              <a:t>  Azure Data Factory — data pipeline orchestration</a:t>
+                  <a:srgbClr val="1A1A2E"/>
+                </a:solidFill>
+                <a:latin typeface="Calibri"/>
+              </a:rPr>
+              <a:t>• GRN lookup: MIGO/MIRO transaction BAPIs</a:t>
             </a:r>
           </a:p>
           <a:p>
             <a:pPr>
               <a:spcBef>
-                <a:spcPts val="400"/>
+                <a:spcPts val="300"/>
               </a:spcBef>
             </a:pPr>
             <a:r>
               <a:rPr sz="1200">
                 <a:solidFill>
-                  <a:srgbClr val="FFFFFF"/>
-                </a:solidFill>
-                <a:latin typeface="Calibri"/>
-              </a:rPr>
-              <a:t>  Azure Key Vault — secrets management</a:t>
+                  <a:srgbClr val="1A1A2E"/>
+                </a:solidFill>
+                <a:latin typeface="Calibri"/>
+              </a:rPr>
+              <a:t>• Payment trigger: SAP FI module (F-53)</a:t>
             </a:r>
           </a:p>
           <a:p>
             <a:pPr>
               <a:spcBef>
-                <a:spcPts val="400"/>
+                <a:spcPts val="300"/>
               </a:spcBef>
             </a:pPr>
             <a:r>
               <a:rPr sz="1200">
                 <a:solidFill>
-                  <a:srgbClr val="FFFFFF"/>
-                </a:solidFill>
-                <a:latin typeface="Calibri"/>
-              </a:rPr>
-              <a:t>  Azure Monitor — logging, alerts, dashboards</a:t>
+                  <a:srgbClr val="1A1A2E"/>
+                </a:solidFill>
+                <a:latin typeface="Calibri"/>
+              </a:rPr>
+              <a:t>• Auth: SAP service user, minimum permissions</a:t>
             </a:r>
           </a:p>
           <a:p>
             <a:pPr>
               <a:spcBef>
-                <a:spcPts val="400"/>
+                <a:spcPts val="300"/>
               </a:spcBef>
             </a:pPr>
             <a:r>
               <a:rPr sz="1200">
                 <a:solidFill>
-                  <a:srgbClr val="FFFFFF"/>
-                </a:solidFill>
-                <a:latin typeface="Calibri"/>
-              </a:rPr>
-              <a:t>  Azure Container Apps — agent deployment</a:t>
-            </a:r>
-          </a:p>
-        </p:txBody>
-      </p:sp>
-      <p:sp>
-        <p:nvSpPr>
-          <p:cNvPr id="7" name="Rectangle 6"/>
+                  <a:srgbClr val="1A1A2E"/>
+                </a:solidFill>
+                <a:latin typeface="Calibri"/>
+              </a:rPr>
+              <a:t>• Agent calls SAP via MCP — no custom connector</a:t>
+            </a:r>
+          </a:p>
+        </p:txBody>
+      </p:sp>
+      <p:sp>
+        <p:nvSpPr>
+          <p:cNvPr id="8" name="Rectangle 7"/>
           <p:cNvSpPr/>
           <p:nvPr/>
         </p:nvSpPr>
         <p:spPr>
           <a:xfrm>
-            <a:off x="6035040" y="1097280"/>
-            <a:ext cx="5760720" cy="4389120"/>
+            <a:off x="6126480" y="1188720"/>
+            <a:ext cx="5669280" cy="5029200"/>
           </a:xfrm>
           <a:prstGeom prst="rect">
             <a:avLst/>
           </a:prstGeom>
           <a:solidFill>
-            <a:srgbClr val="36454F"/>
+            <a:srgbClr val="F2F2F2"/>
           </a:solidFill>
           <a:ln w="12700">
             <a:solidFill>
-              <a:srgbClr val="028090"/>
+              <a:srgbClr val="CCCCCC"/>
             </a:solidFill>
           </a:ln>
         </p:spPr>
@@ -11241,14 +10278,14 @@
       </p:sp>
       <p:sp>
         <p:nvSpPr>
-          <p:cNvPr id="8" name="TextBox 7"/>
+          <p:cNvPr id="9" name="TextBox 8"/>
           <p:cNvSpPr txBox="1"/>
           <p:nvPr/>
         </p:nvSpPr>
         <p:spPr>
           <a:xfrm>
-            <a:off x="6217920" y="1188720"/>
-            <a:ext cx="5394960" cy="4114800"/>
+            <a:off x="6263640" y="1234440"/>
+            <a:ext cx="5394960" cy="365760"/>
           </a:xfrm>
           <a:prstGeom prst="rect">
             <a:avLst/>
@@ -11261,156 +10298,16 @@
           </a:bodyPr>
           <a:lstStyle/>
           <a:p>
-            <a:r>
-              <a:rPr sz="1300" b="1">
-                <a:solidFill>
-                  <a:srgbClr val="02C39A"/>
-                </a:solidFill>
-                <a:latin typeface="Calibri"/>
-              </a:rPr>
-              <a:t>AWS (ML Training + Storage)</a:t>
-            </a:r>
-          </a:p>
-          <a:p>
-            <a:pPr>
-              <a:spcBef>
-                <a:spcPts val="400"/>
-              </a:spcBef>
-            </a:pPr>
-            <a:r>
-              <a:rPr sz="1200">
-                <a:solidFill>
-                  <a:srgbClr val="FFFFFF"/>
-                </a:solidFill>
-                <a:latin typeface="Calibri"/>
-              </a:rPr>
-              <a:t>  AWS S3 — raw invoice/document archival (immutable)</a:t>
-            </a:r>
-          </a:p>
-          <a:p>
-            <a:pPr>
-              <a:spcBef>
-                <a:spcPts val="400"/>
-              </a:spcBef>
-            </a:pPr>
-            <a:r>
-              <a:rPr sz="1200">
-                <a:solidFill>
-                  <a:srgbClr val="FFFFFF"/>
-                </a:solidFill>
-                <a:latin typeface="Calibri"/>
-              </a:rPr>
-              <a:t>  Amazon SageMaker — ML model training &amp; versioning</a:t>
-            </a:r>
-          </a:p>
-          <a:p>
-            <a:pPr>
-              <a:spcBef>
-                <a:spcPts val="400"/>
-              </a:spcBef>
-            </a:pPr>
-            <a:r>
-              <a:rPr sz="1200">
-                <a:solidFill>
-                  <a:srgbClr val="FFFFFF"/>
-                </a:solidFill>
-                <a:latin typeface="Calibri"/>
-              </a:rPr>
-              <a:t>  AWS Lambda — event-driven invoice triggers</a:t>
-            </a:r>
-          </a:p>
-          <a:p>
-            <a:pPr>
-              <a:spcBef>
-                <a:spcPts val="400"/>
-              </a:spcBef>
-            </a:pPr>
-            <a:r>
-              <a:rPr sz="1200">
-                <a:solidFill>
-                  <a:srgbClr val="FFFFFF"/>
-                </a:solidFill>
-                <a:latin typeface="Calibri"/>
-              </a:rPr>
-              <a:t>  AWS Secrets Manager — AWS-side secrets</a:t>
-            </a:r>
-          </a:p>
-          <a:p>
-            <a:pPr>
-              <a:spcBef>
-                <a:spcPts val="400"/>
-              </a:spcBef>
-            </a:pPr>
-            <a:r>
-              <a:rPr sz="1200">
-                <a:solidFill>
-                  <a:srgbClr val="FFFFFF"/>
-                </a:solidFill>
-                <a:latin typeface="Calibri"/>
-              </a:rPr>
-              <a:t>  Amazon CloudWatch — AWS-side monitoring</a:t>
-            </a:r>
-          </a:p>
-          <a:p>
-            <a:pPr>
-              <a:spcBef>
-                <a:spcPts val="400"/>
-              </a:spcBef>
-            </a:pPr>
-            <a:r>
-              <a:rPr sz="1200">
-                <a:solidFill>
-                  <a:srgbClr val="FFFFFF"/>
-                </a:solidFill>
-                <a:latin typeface="Calibri"/>
-              </a:rPr>
-              <a:t>  AWS EventBridge — cross-cloud event routing</a:t>
-            </a:r>
-          </a:p>
-        </p:txBody>
-      </p:sp>
-      <p:sp>
-        <p:nvSpPr>
-          <p:cNvPr id="9" name="Rectangle 8"/>
-          <p:cNvSpPr/>
-          <p:nvPr/>
-        </p:nvSpPr>
-        <p:spPr>
-          <a:xfrm>
-            <a:off x="365760" y="5669280"/>
-            <a:ext cx="11430000" cy="914400"/>
-          </a:xfrm>
-          <a:prstGeom prst="rect">
-            <a:avLst/>
-          </a:prstGeom>
-          <a:solidFill>
-            <a:srgbClr val="0E6655"/>
-          </a:solidFill>
-          <a:ln w="12700">
-            <a:solidFill>
-              <a:srgbClr val="028090"/>
-            </a:solidFill>
-          </a:ln>
-        </p:spPr>
-        <p:style>
-          <a:lnRef idx="1">
-            <a:schemeClr val="accent1"/>
-          </a:lnRef>
-          <a:fillRef idx="3">
-            <a:schemeClr val="accent1"/>
-          </a:fillRef>
-          <a:effectRef idx="2">
-            <a:schemeClr val="accent1"/>
-          </a:effectRef>
-          <a:fontRef idx="minor">
-            <a:schemeClr val="lt1"/>
-          </a:fontRef>
-        </p:style>
-        <p:txBody>
-          <a:bodyPr rtlCol="0" anchor="ctr"/>
-          <a:lstStyle/>
-          <a:p>
-            <a:pPr algn="ctr"/>
+            <a:pPr algn="l"/>
+            <a:r>
+              <a:rPr sz="1300" b="1" i="0">
+                <a:solidFill>
+                  <a:srgbClr val="2E75B6"/>
+                </a:solidFill>
+                <a:latin typeface="Calibri"/>
+              </a:rPr>
+              <a:t>Oracle Integration</a:t>
+            </a:r>
           </a:p>
         </p:txBody>
       </p:sp>
@@ -11422,8 +10319,8 @@
         </p:nvSpPr>
         <p:spPr>
           <a:xfrm>
-            <a:off x="548640" y="5760720"/>
-            <a:ext cx="11064240" cy="731520"/>
+            <a:off x="6263640" y="1645920"/>
+            <a:ext cx="5394960" cy="4754880"/>
           </a:xfrm>
           <a:prstGeom prst="rect">
             <a:avLst/>
@@ -11436,15 +10333,99 @@
           </a:bodyPr>
           <a:lstStyle/>
           <a:p>
-            <a:pPr algn="l"/>
-            <a:r>
-              <a:rPr sz="1200" b="0">
-                <a:solidFill>
-                  <a:srgbClr val="FFFFFF"/>
-                </a:solidFill>
-                <a:latin typeface="Calibri"/>
-              </a:rPr>
-              <a:t>Common MLOps Layer: MLflow (model registry, experiment tracking) bridges both clouds. Apache Kafka handles invoice event streaming across cloud boundaries. LangGraph agent is cloud-agnostic — runs anywhere Python runs.</a:t>
+            <a:pPr>
+              <a:spcBef>
+                <a:spcPts val="300"/>
+              </a:spcBef>
+            </a:pPr>
+            <a:r>
+              <a:rPr sz="1200">
+                <a:solidFill>
+                  <a:srgbClr val="1A1A2E"/>
+                </a:solidFill>
+                <a:latin typeface="Calibri"/>
+              </a:rPr>
+              <a:t>• Oracle MCP Server exposes REST endpoints</a:t>
+            </a:r>
+          </a:p>
+          <a:p>
+            <a:pPr>
+              <a:spcBef>
+                <a:spcPts val="300"/>
+              </a:spcBef>
+            </a:pPr>
+            <a:r>
+              <a:rPr sz="1200">
+                <a:solidFill>
+                  <a:srgbClr val="1A1A2E"/>
+                </a:solidFill>
+                <a:latin typeface="Calibri"/>
+              </a:rPr>
+              <a:t>• PO: /fscmRestApi/resources/purchaseOrders</a:t>
+            </a:r>
+          </a:p>
+          <a:p>
+            <a:pPr>
+              <a:spcBef>
+                <a:spcPts val="300"/>
+              </a:spcBef>
+            </a:pPr>
+            <a:r>
+              <a:rPr sz="1200">
+                <a:solidFill>
+                  <a:srgbClr val="1A1A2E"/>
+                </a:solidFill>
+                <a:latin typeface="Calibri"/>
+              </a:rPr>
+              <a:t>• GRN: /fscmRestApi/resources/receivingReceipts</a:t>
+            </a:r>
+          </a:p>
+          <a:p>
+            <a:pPr>
+              <a:spcBef>
+                <a:spcPts val="300"/>
+              </a:spcBef>
+            </a:pPr>
+            <a:r>
+              <a:rPr sz="1200">
+                <a:solidFill>
+                  <a:srgbClr val="1A1A2E"/>
+                </a:solidFill>
+                <a:latin typeface="Calibri"/>
+              </a:rPr>
+              <a:t>• Auth: OAuth 2.0 with token refresh</a:t>
+            </a:r>
+          </a:p>
+          <a:p>
+            <a:pPr>
+              <a:spcBef>
+                <a:spcPts val="300"/>
+              </a:spcBef>
+            </a:pPr>
+            <a:r>
+              <a:rPr sz="1200">
+                <a:solidFill>
+                  <a:srgbClr val="1A1A2E"/>
+                </a:solidFill>
+                <a:latin typeface="Calibri"/>
+              </a:rPr>
+              <a:t>• Rate-limited with exponential backoff</a:t>
+            </a:r>
+          </a:p>
+          <a:p>
+            <a:pPr>
+              <a:spcBef>
+                <a:spcPts val="300"/>
+              </a:spcBef>
+            </a:pPr>
+            <a:r>
+              <a:rPr sz="1200">
+                <a:solidFill>
+                  <a:srgbClr val="1A1A2E"/>
+                </a:solidFill>
+                <a:latin typeface="Calibri"/>
+              </a:rPr>
+              <a:t>• Agent calls Oracle via MCP — same protocol as SAP</a:t>
             </a:r>
           </a:p>
         </p:txBody>
@@ -11482,7 +10463,7 @@
             <a:avLst/>
           </a:prstGeom>
           <a:solidFill>
-            <a:srgbClr val="1E2761"/>
+            <a:srgbClr val="FFFFFF"/>
           </a:solidFill>
           <a:ln>
             <a:noFill/>
@@ -11518,8 +10499,8 @@
         </p:nvSpPr>
         <p:spPr>
           <a:xfrm>
-            <a:off x="548640" y="274320"/>
-            <a:ext cx="10972800" cy="731520"/>
+            <a:off x="548640" y="228600"/>
+            <a:ext cx="10972800" cy="640080"/>
           </a:xfrm>
           <a:prstGeom prst="rect">
             <a:avLst/>
@@ -11527,20 +10508,20 @@
           <a:noFill/>
         </p:spPr>
         <p:txBody>
-          <a:bodyPr wrap="none">
+          <a:bodyPr wrap="square">
             <a:spAutoFit/>
           </a:bodyPr>
           <a:lstStyle/>
           <a:p>
             <a:pPr algn="l"/>
             <a:r>
-              <a:rPr sz="3200" b="1">
-                <a:solidFill>
-                  <a:srgbClr val="FFFFFF"/>
-                </a:solidFill>
-                <a:latin typeface="Calibri"/>
-              </a:rPr>
-              <a:t>Security &amp; GDPR Compliance</a:t>
+              <a:rPr sz="2800" b="1" i="0">
+                <a:solidFill>
+                  <a:srgbClr val="1A1A2E"/>
+                </a:solidFill>
+                <a:latin typeface="Calibri"/>
+              </a:rPr>
+              <a:t>Multi-Cloud Architecture — Azure + AWS</a:t>
             </a:r>
           </a:p>
         </p:txBody>
@@ -11553,14 +10534,14 @@
         </p:nvSpPr>
         <p:spPr>
           <a:xfrm>
-            <a:off x="548640" y="868680"/>
-            <a:ext cx="2286000" cy="45720"/>
+            <a:off x="548640" y="822960"/>
+            <a:ext cx="11064240" cy="36576"/>
           </a:xfrm>
           <a:prstGeom prst="rect">
             <a:avLst/>
           </a:prstGeom>
           <a:solidFill>
-            <a:srgbClr val="028090"/>
+            <a:srgbClr val="2E75B6"/>
           </a:solidFill>
           <a:ln>
             <a:noFill/>
@@ -11588,696 +10569,30 @@
           </a:p>
         </p:txBody>
       </p:sp>
-      <p:sp>
-        <p:nvSpPr>
-          <p:cNvPr id="5" name="Rectangle 4"/>
-          <p:cNvSpPr/>
-          <p:nvPr/>
-        </p:nvSpPr>
-        <p:spPr>
-          <a:xfrm>
-            <a:off x="365760" y="1097280"/>
-            <a:ext cx="5486400" cy="1463040"/>
-          </a:xfrm>
-          <a:prstGeom prst="rect">
-            <a:avLst/>
-          </a:prstGeom>
-          <a:solidFill>
-            <a:srgbClr val="36454F"/>
-          </a:solidFill>
-          <a:ln w="12700">
-            <a:solidFill>
-              <a:srgbClr val="028090"/>
-            </a:solidFill>
-          </a:ln>
-        </p:spPr>
-        <p:style>
-          <a:lnRef idx="1">
-            <a:schemeClr val="accent1"/>
-          </a:lnRef>
-          <a:fillRef idx="3">
-            <a:schemeClr val="accent1"/>
-          </a:fillRef>
-          <a:effectRef idx="2">
-            <a:schemeClr val="accent1"/>
-          </a:effectRef>
-          <a:fontRef idx="minor">
-            <a:schemeClr val="lt1"/>
-          </a:fontRef>
-        </p:style>
-        <p:txBody>
-          <a:bodyPr rtlCol="0" anchor="ctr"/>
-          <a:lstStyle/>
-          <a:p>
-            <a:pPr algn="ctr"/>
-          </a:p>
-        </p:txBody>
-      </p:sp>
-      <p:sp>
-        <p:nvSpPr>
-          <p:cNvPr id="6" name="TextBox 5"/>
-          <p:cNvSpPr txBox="1"/>
-          <p:nvPr/>
-        </p:nvSpPr>
-        <p:spPr>
-          <a:xfrm>
-            <a:off x="502920" y="1188720"/>
-            <a:ext cx="5212080" cy="365760"/>
-          </a:xfrm>
-          <a:prstGeom prst="rect">
-            <a:avLst/>
-          </a:prstGeom>
-          <a:noFill/>
-        </p:spPr>
-        <p:txBody>
-          <a:bodyPr wrap="square">
-            <a:spAutoFit/>
-          </a:bodyPr>
-          <a:lstStyle/>
-          <a:p>
-            <a:pPr algn="l"/>
-            <a:r>
-              <a:rPr sz="1300" b="1">
-                <a:solidFill>
-                  <a:srgbClr val="02C39A"/>
-                </a:solidFill>
-                <a:latin typeface="Calibri"/>
-              </a:rPr>
-              <a:t>Data Privacy</a:t>
-            </a:r>
-          </a:p>
-        </p:txBody>
-      </p:sp>
-      <p:sp>
-        <p:nvSpPr>
-          <p:cNvPr id="7" name="TextBox 6"/>
-          <p:cNvSpPr txBox="1"/>
-          <p:nvPr/>
-        </p:nvSpPr>
-        <p:spPr>
-          <a:xfrm>
-            <a:off x="502920" y="1600200"/>
-            <a:ext cx="5212080" cy="822960"/>
-          </a:xfrm>
-          <a:prstGeom prst="rect">
-            <a:avLst/>
-          </a:prstGeom>
-          <a:noFill/>
-        </p:spPr>
-        <p:txBody>
-          <a:bodyPr wrap="square">
-            <a:spAutoFit/>
-          </a:bodyPr>
-          <a:lstStyle/>
-          <a:p>
-            <a:pPr algn="l"/>
-            <a:r>
-              <a:rPr sz="1100" b="0">
-                <a:solidFill>
-                  <a:srgbClr val="FFFFFF"/>
-                </a:solidFill>
-                <a:latin typeface="Calibri"/>
-              </a:rPr>
-              <a:t>PII fields encrypted at rest (AES-256) and in transit (TLS 1.3). Vendor bank details never stored in ML dataset.</a:t>
-            </a:r>
-          </a:p>
-        </p:txBody>
-      </p:sp>
-      <p:sp>
-        <p:nvSpPr>
-          <p:cNvPr id="8" name="Rectangle 7"/>
-          <p:cNvSpPr/>
-          <p:nvPr/>
-        </p:nvSpPr>
-        <p:spPr>
-          <a:xfrm>
-            <a:off x="6309360" y="1097280"/>
-            <a:ext cx="5486400" cy="1463040"/>
-          </a:xfrm>
-          <a:prstGeom prst="rect">
-            <a:avLst/>
-          </a:prstGeom>
-          <a:solidFill>
-            <a:srgbClr val="36454F"/>
-          </a:solidFill>
-          <a:ln w="12700">
-            <a:solidFill>
-              <a:srgbClr val="028090"/>
-            </a:solidFill>
-          </a:ln>
-        </p:spPr>
-        <p:style>
-          <a:lnRef idx="1">
-            <a:schemeClr val="accent1"/>
-          </a:lnRef>
-          <a:fillRef idx="3">
-            <a:schemeClr val="accent1"/>
-          </a:fillRef>
-          <a:effectRef idx="2">
-            <a:schemeClr val="accent1"/>
-          </a:effectRef>
-          <a:fontRef idx="minor">
-            <a:schemeClr val="lt1"/>
-          </a:fontRef>
-        </p:style>
-        <p:txBody>
-          <a:bodyPr rtlCol="0" anchor="ctr"/>
-          <a:lstStyle/>
-          <a:p>
-            <a:pPr algn="ctr"/>
-          </a:p>
-        </p:txBody>
-      </p:sp>
-      <p:sp>
-        <p:nvSpPr>
-          <p:cNvPr id="9" name="TextBox 8"/>
-          <p:cNvSpPr txBox="1"/>
-          <p:nvPr/>
-        </p:nvSpPr>
-        <p:spPr>
-          <a:xfrm>
-            <a:off x="6446520" y="1188720"/>
-            <a:ext cx="5212080" cy="365760"/>
-          </a:xfrm>
-          <a:prstGeom prst="rect">
-            <a:avLst/>
-          </a:prstGeom>
-          <a:noFill/>
-        </p:spPr>
-        <p:txBody>
-          <a:bodyPr wrap="square">
-            <a:spAutoFit/>
-          </a:bodyPr>
-          <a:lstStyle/>
-          <a:p>
-            <a:pPr algn="l"/>
-            <a:r>
-              <a:rPr sz="1300" b="1">
-                <a:solidFill>
-                  <a:srgbClr val="02C39A"/>
-                </a:solidFill>
-                <a:latin typeface="Calibri"/>
-              </a:rPr>
-              <a:t>Access Control</a:t>
-            </a:r>
-          </a:p>
-        </p:txBody>
-      </p:sp>
-      <p:sp>
-        <p:nvSpPr>
-          <p:cNvPr id="10" name="TextBox 9"/>
-          <p:cNvSpPr txBox="1"/>
-          <p:nvPr/>
-        </p:nvSpPr>
-        <p:spPr>
-          <a:xfrm>
-            <a:off x="6446520" y="1600200"/>
-            <a:ext cx="5212080" cy="822960"/>
-          </a:xfrm>
-          <a:prstGeom prst="rect">
-            <a:avLst/>
-          </a:prstGeom>
-          <a:noFill/>
-        </p:spPr>
-        <p:txBody>
-          <a:bodyPr wrap="square">
-            <a:spAutoFit/>
-          </a:bodyPr>
-          <a:lstStyle/>
-          <a:p>
-            <a:pPr algn="l"/>
-            <a:r>
-              <a:rPr sz="1100" b="0">
-                <a:solidFill>
-                  <a:srgbClr val="FFFFFF"/>
-                </a:solidFill>
-                <a:latin typeface="Calibri"/>
-              </a:rPr>
-              <a:t>RBAC — AP clerks can view, managers can approve, admins can configure. Azure AD integration.</a:t>
-            </a:r>
-          </a:p>
-        </p:txBody>
-      </p:sp>
-      <p:sp>
-        <p:nvSpPr>
-          <p:cNvPr id="11" name="Rectangle 10"/>
-          <p:cNvSpPr/>
-          <p:nvPr/>
-        </p:nvSpPr>
-        <p:spPr>
-          <a:xfrm>
-            <a:off x="365760" y="2834639"/>
-            <a:ext cx="5486400" cy="1463040"/>
-          </a:xfrm>
-          <a:prstGeom prst="rect">
-            <a:avLst/>
-          </a:prstGeom>
-          <a:solidFill>
-            <a:srgbClr val="36454F"/>
-          </a:solidFill>
-          <a:ln w="12700">
-            <a:solidFill>
-              <a:srgbClr val="028090"/>
-            </a:solidFill>
-          </a:ln>
-        </p:spPr>
-        <p:style>
-          <a:lnRef idx="1">
-            <a:schemeClr val="accent1"/>
-          </a:lnRef>
-          <a:fillRef idx="3">
-            <a:schemeClr val="accent1"/>
-          </a:fillRef>
-          <a:effectRef idx="2">
-            <a:schemeClr val="accent1"/>
-          </a:effectRef>
-          <a:fontRef idx="minor">
-            <a:schemeClr val="lt1"/>
-          </a:fontRef>
-        </p:style>
-        <p:txBody>
-          <a:bodyPr rtlCol="0" anchor="ctr"/>
-          <a:lstStyle/>
-          <a:p>
-            <a:pPr algn="ctr"/>
-          </a:p>
-        </p:txBody>
-      </p:sp>
-      <p:sp>
-        <p:nvSpPr>
-          <p:cNvPr id="12" name="TextBox 11"/>
-          <p:cNvSpPr txBox="1"/>
-          <p:nvPr/>
-        </p:nvSpPr>
-        <p:spPr>
-          <a:xfrm>
-            <a:off x="502920" y="2926079"/>
-            <a:ext cx="5212080" cy="365760"/>
-          </a:xfrm>
-          <a:prstGeom prst="rect">
-            <a:avLst/>
-          </a:prstGeom>
-          <a:noFill/>
-        </p:spPr>
-        <p:txBody>
-          <a:bodyPr wrap="square">
-            <a:spAutoFit/>
-          </a:bodyPr>
-          <a:lstStyle/>
-          <a:p>
-            <a:pPr algn="l"/>
-            <a:r>
-              <a:rPr sz="1300" b="1">
-                <a:solidFill>
-                  <a:srgbClr val="02C39A"/>
-                </a:solidFill>
-                <a:latin typeface="Calibri"/>
-              </a:rPr>
-              <a:t>Audit Trail</a:t>
-            </a:r>
-          </a:p>
-        </p:txBody>
-      </p:sp>
-      <p:sp>
-        <p:nvSpPr>
-          <p:cNvPr id="13" name="TextBox 12"/>
-          <p:cNvSpPr txBox="1"/>
-          <p:nvPr/>
-        </p:nvSpPr>
-        <p:spPr>
-          <a:xfrm>
-            <a:off x="502920" y="3337559"/>
-            <a:ext cx="5212080" cy="822960"/>
-          </a:xfrm>
-          <a:prstGeom prst="rect">
-            <a:avLst/>
-          </a:prstGeom>
-          <a:noFill/>
-        </p:spPr>
-        <p:txBody>
-          <a:bodyPr wrap="square">
-            <a:spAutoFit/>
-          </a:bodyPr>
-          <a:lstStyle/>
-          <a:p>
-            <a:pPr algn="l"/>
-            <a:r>
-              <a:rPr sz="1100" b="0">
-                <a:solidFill>
-                  <a:srgbClr val="FFFFFF"/>
-                </a:solidFill>
-                <a:latin typeface="Calibri"/>
-              </a:rPr>
-              <a:t>Every agent decision logged with timestamp, user, invoice ID, and rationale. Immutable log in AWS S3.</a:t>
-            </a:r>
-          </a:p>
-        </p:txBody>
-      </p:sp>
-      <p:sp>
-        <p:nvSpPr>
-          <p:cNvPr id="14" name="Rectangle 13"/>
-          <p:cNvSpPr/>
-          <p:nvPr/>
-        </p:nvSpPr>
-        <p:spPr>
-          <a:xfrm>
-            <a:off x="6309360" y="2834639"/>
-            <a:ext cx="5486400" cy="1463040"/>
-          </a:xfrm>
-          <a:prstGeom prst="rect">
-            <a:avLst/>
-          </a:prstGeom>
-          <a:solidFill>
-            <a:srgbClr val="36454F"/>
-          </a:solidFill>
-          <a:ln w="12700">
-            <a:solidFill>
-              <a:srgbClr val="028090"/>
-            </a:solidFill>
-          </a:ln>
-        </p:spPr>
-        <p:style>
-          <a:lnRef idx="1">
-            <a:schemeClr val="accent1"/>
-          </a:lnRef>
-          <a:fillRef idx="3">
-            <a:schemeClr val="accent1"/>
-          </a:fillRef>
-          <a:effectRef idx="2">
-            <a:schemeClr val="accent1"/>
-          </a:effectRef>
-          <a:fontRef idx="minor">
-            <a:schemeClr val="lt1"/>
-          </a:fontRef>
-        </p:style>
-        <p:txBody>
-          <a:bodyPr rtlCol="0" anchor="ctr"/>
-          <a:lstStyle/>
-          <a:p>
-            <a:pPr algn="ctr"/>
-          </a:p>
-        </p:txBody>
-      </p:sp>
-      <p:sp>
-        <p:nvSpPr>
-          <p:cNvPr id="15" name="TextBox 14"/>
-          <p:cNvSpPr txBox="1"/>
-          <p:nvPr/>
-        </p:nvSpPr>
-        <p:spPr>
-          <a:xfrm>
-            <a:off x="6446520" y="2926079"/>
-            <a:ext cx="5212080" cy="365760"/>
-          </a:xfrm>
-          <a:prstGeom prst="rect">
-            <a:avLst/>
-          </a:prstGeom>
-          <a:noFill/>
-        </p:spPr>
-        <p:txBody>
-          <a:bodyPr wrap="square">
-            <a:spAutoFit/>
-          </a:bodyPr>
-          <a:lstStyle/>
-          <a:p>
-            <a:pPr algn="l"/>
-            <a:r>
-              <a:rPr sz="1300" b="1">
-                <a:solidFill>
-                  <a:srgbClr val="02C39A"/>
-                </a:solidFill>
-                <a:latin typeface="Calibri"/>
-              </a:rPr>
-              <a:t>Data Residency</a:t>
-            </a:r>
-          </a:p>
-        </p:txBody>
-      </p:sp>
-      <p:sp>
-        <p:nvSpPr>
-          <p:cNvPr id="16" name="TextBox 15"/>
-          <p:cNvSpPr txBox="1"/>
-          <p:nvPr/>
-        </p:nvSpPr>
-        <p:spPr>
-          <a:xfrm>
-            <a:off x="6446520" y="3337559"/>
-            <a:ext cx="5212080" cy="822960"/>
-          </a:xfrm>
-          <a:prstGeom prst="rect">
-            <a:avLst/>
-          </a:prstGeom>
-          <a:noFill/>
-        </p:spPr>
-        <p:txBody>
-          <a:bodyPr wrap="square">
-            <a:spAutoFit/>
-          </a:bodyPr>
-          <a:lstStyle/>
-          <a:p>
-            <a:pPr algn="l"/>
-            <a:r>
-              <a:rPr sz="1100" b="0">
-                <a:solidFill>
-                  <a:srgbClr val="FFFFFF"/>
-                </a:solidFill>
-                <a:latin typeface="Calibri"/>
-              </a:rPr>
-              <a:t>EU invoices processed only in Azure West Europe. Data never leaves EU boundary — GDPR Article 44.</a:t>
-            </a:r>
-          </a:p>
-        </p:txBody>
-      </p:sp>
-      <p:sp>
-        <p:nvSpPr>
-          <p:cNvPr id="17" name="Rectangle 16"/>
-          <p:cNvSpPr/>
-          <p:nvPr/>
-        </p:nvSpPr>
-        <p:spPr>
-          <a:xfrm>
-            <a:off x="365760" y="4572000"/>
-            <a:ext cx="5486400" cy="1463040"/>
-          </a:xfrm>
-          <a:prstGeom prst="rect">
-            <a:avLst/>
-          </a:prstGeom>
-          <a:solidFill>
-            <a:srgbClr val="36454F"/>
-          </a:solidFill>
-          <a:ln w="12700">
-            <a:solidFill>
-              <a:srgbClr val="028090"/>
-            </a:solidFill>
-          </a:ln>
-        </p:spPr>
-        <p:style>
-          <a:lnRef idx="1">
-            <a:schemeClr val="accent1"/>
-          </a:lnRef>
-          <a:fillRef idx="3">
-            <a:schemeClr val="accent1"/>
-          </a:fillRef>
-          <a:effectRef idx="2">
-            <a:schemeClr val="accent1"/>
-          </a:effectRef>
-          <a:fontRef idx="minor">
-            <a:schemeClr val="lt1"/>
-          </a:fontRef>
-        </p:style>
-        <p:txBody>
-          <a:bodyPr rtlCol="0" anchor="ctr"/>
-          <a:lstStyle/>
-          <a:p>
-            <a:pPr algn="ctr"/>
-          </a:p>
-        </p:txBody>
-      </p:sp>
-      <p:sp>
-        <p:nvSpPr>
-          <p:cNvPr id="18" name="TextBox 17"/>
-          <p:cNvSpPr txBox="1"/>
-          <p:nvPr/>
-        </p:nvSpPr>
-        <p:spPr>
-          <a:xfrm>
-            <a:off x="502920" y="4663440"/>
-            <a:ext cx="5212080" cy="365760"/>
-          </a:xfrm>
-          <a:prstGeom prst="rect">
-            <a:avLst/>
-          </a:prstGeom>
-          <a:noFill/>
-        </p:spPr>
-        <p:txBody>
-          <a:bodyPr wrap="square">
-            <a:spAutoFit/>
-          </a:bodyPr>
-          <a:lstStyle/>
-          <a:p>
-            <a:pPr algn="l"/>
-            <a:r>
-              <a:rPr sz="1300" b="1">
-                <a:solidFill>
-                  <a:srgbClr val="02C39A"/>
-                </a:solidFill>
-                <a:latin typeface="Calibri"/>
-              </a:rPr>
-              <a:t>Right to Erasure</a:t>
-            </a:r>
-          </a:p>
-        </p:txBody>
-      </p:sp>
-      <p:sp>
-        <p:nvSpPr>
-          <p:cNvPr id="19" name="TextBox 18"/>
-          <p:cNvSpPr txBox="1"/>
-          <p:nvPr/>
-        </p:nvSpPr>
-        <p:spPr>
-          <a:xfrm>
-            <a:off x="502920" y="5074920"/>
-            <a:ext cx="5212080" cy="822960"/>
-          </a:xfrm>
-          <a:prstGeom prst="rect">
-            <a:avLst/>
-          </a:prstGeom>
-          <a:noFill/>
-        </p:spPr>
-        <p:txBody>
-          <a:bodyPr wrap="square">
-            <a:spAutoFit/>
-          </a:bodyPr>
-          <a:lstStyle/>
-          <a:p>
-            <a:pPr algn="l"/>
-            <a:r>
-              <a:rPr sz="1100" b="0">
-                <a:solidFill>
-                  <a:srgbClr val="FFFFFF"/>
-                </a:solidFill>
-                <a:latin typeface="Calibri"/>
-              </a:rPr>
-              <a:t>Vendor data deletion workflow implemented. PII removed from all datasets within 30 days of request.</a:t>
-            </a:r>
-          </a:p>
-        </p:txBody>
-      </p:sp>
-      <p:sp>
-        <p:nvSpPr>
-          <p:cNvPr id="20" name="Rectangle 19"/>
-          <p:cNvSpPr/>
-          <p:nvPr/>
-        </p:nvSpPr>
-        <p:spPr>
-          <a:xfrm>
-            <a:off x="6309360" y="4572000"/>
-            <a:ext cx="5486400" cy="1463040"/>
-          </a:xfrm>
-          <a:prstGeom prst="rect">
-            <a:avLst/>
-          </a:prstGeom>
-          <a:solidFill>
-            <a:srgbClr val="36454F"/>
-          </a:solidFill>
-          <a:ln w="12700">
-            <a:solidFill>
-              <a:srgbClr val="028090"/>
-            </a:solidFill>
-          </a:ln>
-        </p:spPr>
-        <p:style>
-          <a:lnRef idx="1">
-            <a:schemeClr val="accent1"/>
-          </a:lnRef>
-          <a:fillRef idx="3">
-            <a:schemeClr val="accent1"/>
-          </a:fillRef>
-          <a:effectRef idx="2">
-            <a:schemeClr val="accent1"/>
-          </a:effectRef>
-          <a:fontRef idx="minor">
-            <a:schemeClr val="lt1"/>
-          </a:fontRef>
-        </p:style>
-        <p:txBody>
-          <a:bodyPr rtlCol="0" anchor="ctr"/>
-          <a:lstStyle/>
-          <a:p>
-            <a:pPr algn="ctr"/>
-          </a:p>
-        </p:txBody>
-      </p:sp>
-      <p:sp>
-        <p:nvSpPr>
-          <p:cNvPr id="21" name="TextBox 20"/>
-          <p:cNvSpPr txBox="1"/>
-          <p:nvPr/>
-        </p:nvSpPr>
-        <p:spPr>
-          <a:xfrm>
-            <a:off x="6446520" y="4663440"/>
-            <a:ext cx="5212080" cy="365760"/>
-          </a:xfrm>
-          <a:prstGeom prst="rect">
-            <a:avLst/>
-          </a:prstGeom>
-          <a:noFill/>
-        </p:spPr>
-        <p:txBody>
-          <a:bodyPr wrap="square">
-            <a:spAutoFit/>
-          </a:bodyPr>
-          <a:lstStyle/>
-          <a:p>
-            <a:pPr algn="l"/>
-            <a:r>
-              <a:rPr sz="1300" b="1">
-                <a:solidFill>
-                  <a:srgbClr val="02C39A"/>
-                </a:solidFill>
-                <a:latin typeface="Calibri"/>
-              </a:rPr>
-              <a:t>Model Governance</a:t>
-            </a:r>
-          </a:p>
-        </p:txBody>
-      </p:sp>
-      <p:sp>
-        <p:nvSpPr>
-          <p:cNvPr id="22" name="TextBox 21"/>
-          <p:cNvSpPr txBox="1"/>
-          <p:nvPr/>
-        </p:nvSpPr>
-        <p:spPr>
-          <a:xfrm>
-            <a:off x="6446520" y="5074920"/>
-            <a:ext cx="5212080" cy="822960"/>
-          </a:xfrm>
-          <a:prstGeom prst="rect">
-            <a:avLst/>
-          </a:prstGeom>
-          <a:noFill/>
-        </p:spPr>
-        <p:txBody>
-          <a:bodyPr wrap="square">
-            <a:spAutoFit/>
-          </a:bodyPr>
-          <a:lstStyle/>
-          <a:p>
-            <a:pPr algn="l"/>
-            <a:r>
-              <a:rPr sz="1100" b="0">
-                <a:solidFill>
-                  <a:srgbClr val="FFFFFF"/>
-                </a:solidFill>
-                <a:latin typeface="Calibri"/>
-              </a:rPr>
-              <a:t>All model predictions logged. Bias monitoring on vendor, currency, and country dimensions.</a:t>
-            </a:r>
-          </a:p>
-        </p:txBody>
-      </p:sp>
+      <p:pic>
+        <p:nvPicPr>
+          <p:cNvPr id="5" name="Picture 4" descr="diagram_multicloud.png"/>
+          <p:cNvPicPr>
+            <a:picLocks noChangeAspect="1"/>
+          </p:cNvPicPr>
+          <p:nvPr/>
+        </p:nvPicPr>
+        <p:blipFill>
+          <a:blip r:embed="rId2"/>
+          <a:stretch>
+            <a:fillRect/>
+          </a:stretch>
+        </p:blipFill>
+        <p:spPr>
+          <a:xfrm>
+            <a:off x="274320" y="1005840"/>
+            <a:ext cx="11612880" cy="5577840"/>
+          </a:xfrm>
+          <a:prstGeom prst="rect">
+            <a:avLst/>
+          </a:prstGeom>
+        </p:spPr>
+      </p:pic>
     </p:spTree>
   </p:cSld>
   <p:clrMapOvr>
